--- a/workshop-slides.pptx
+++ b/workshop-slides.pptx
@@ -9,6 +9,9 @@
     <p:sldId id="257" r:id="rId3"/>
     <p:sldId id="258" r:id="rId4"/>
     <p:sldId id="259" r:id="rId5"/>
+    <p:sldId id="266" r:id="rId17"/>
+    <p:sldId id="267" r:id="rId18"/>
+    <p:sldId id="268" r:id="rId19"/>
     <p:sldId id="260" r:id="rId6"/>
     <p:sldId id="261" r:id="rId7"/>
     <p:sldId id="262" r:id="rId8"/>
@@ -1695,6 +1698,10 @@
           </a:solidFill>
           <a:ln/>
         </p:spPr>
+        <p:txBody>
+          <a:bodyPr/>
+          <a:p/>
+        </p:txBody>
       </p:sp>
       <p:pic>
         <p:nvPicPr>
@@ -1861,6 +1868,10 @@
             <a:prstDash val="solid"/>
           </a:ln>
         </p:spPr>
+        <p:txBody>
+          <a:bodyPr/>
+          <a:p/>
+        </p:txBody>
       </p:sp>
       <p:sp>
         <p:nvSpPr>
@@ -1925,6 +1936,10 @@
             <a:prstDash val="solid"/>
           </a:ln>
         </p:spPr>
+        <p:txBody>
+          <a:bodyPr/>
+          <a:p/>
+        </p:txBody>
       </p:sp>
       <p:sp>
         <p:nvSpPr>
@@ -1989,6 +2004,10 @@
             <a:prstDash val="solid"/>
           </a:ln>
         </p:spPr>
+        <p:txBody>
+          <a:bodyPr/>
+          <a:p/>
+        </p:txBody>
       </p:sp>
       <p:sp>
         <p:nvSpPr>
@@ -2053,6 +2072,10 @@
             <a:prstDash val="solid"/>
           </a:ln>
         </p:spPr>
+        <p:txBody>
+          <a:bodyPr/>
+          <a:p/>
+        </p:txBody>
       </p:sp>
       <p:sp>
         <p:nvSpPr>
@@ -2117,6 +2140,10 @@
             <a:prstDash val="solid"/>
           </a:ln>
         </p:spPr>
+        <p:txBody>
+          <a:bodyPr/>
+          <a:p/>
+        </p:txBody>
       </p:sp>
       <p:sp>
         <p:nvSpPr>
@@ -2176,6 +2203,10 @@
           </a:solidFill>
           <a:ln/>
         </p:spPr>
+        <p:txBody>
+          <a:bodyPr/>
+          <a:p/>
+        </p:txBody>
       </p:sp>
       <p:sp>
         <p:nvSpPr>
@@ -2210,7 +2241,7 @@
                 <a:ea typeface="Arial" pitchFamily="34" charset="-122"/>
                 <a:cs typeface="Arial" pitchFamily="34" charset="-120"/>
               </a:rPr>
-              <a:t>1 / 10</a:t>
+              <a:t>1 / 13</a:t>
             </a:r>
             <a:endParaRPr lang="en-US" sz="900" dirty="0"/>
           </a:p>
@@ -2267,6 +2298,10 @@
           </a:solidFill>
           <a:ln/>
         </p:spPr>
+        <p:txBody>
+          <a:bodyPr/>
+          <a:p/>
+        </p:txBody>
       </p:sp>
       <p:sp>
         <p:nvSpPr>
@@ -2333,6 +2368,10 @@
             </a:outerShdw>
           </a:effectLst>
         </p:spPr>
+        <p:txBody>
+          <a:bodyPr/>
+          <a:p/>
+        </p:txBody>
       </p:sp>
       <p:sp>
         <p:nvSpPr>
@@ -2353,6 +2392,10 @@
           </a:solidFill>
           <a:ln/>
         </p:spPr>
+        <p:txBody>
+          <a:bodyPr/>
+          <a:p/>
+        </p:txBody>
       </p:sp>
       <p:pic>
         <p:nvPicPr>
@@ -2482,6 +2525,10 @@
             </a:outerShdw>
           </a:effectLst>
         </p:spPr>
+        <p:txBody>
+          <a:bodyPr/>
+          <a:p/>
+        </p:txBody>
       </p:sp>
       <p:sp>
         <p:nvSpPr>
@@ -2502,6 +2549,10 @@
           </a:solidFill>
           <a:ln/>
         </p:spPr>
+        <p:txBody>
+          <a:bodyPr/>
+          <a:p/>
+        </p:txBody>
       </p:sp>
       <p:pic>
         <p:nvPicPr>
@@ -2631,6 +2682,10 @@
             </a:outerShdw>
           </a:effectLst>
         </p:spPr>
+        <p:txBody>
+          <a:bodyPr/>
+          <a:p/>
+        </p:txBody>
       </p:sp>
       <p:sp>
         <p:nvSpPr>
@@ -2651,6 +2706,10 @@
           </a:solidFill>
           <a:ln/>
         </p:spPr>
+        <p:txBody>
+          <a:bodyPr/>
+          <a:p/>
+        </p:txBody>
       </p:sp>
       <p:pic>
         <p:nvPicPr>
@@ -2780,6 +2839,10 @@
             </a:outerShdw>
           </a:effectLst>
         </p:spPr>
+        <p:txBody>
+          <a:bodyPr/>
+          <a:p/>
+        </p:txBody>
       </p:sp>
       <p:sp>
         <p:nvSpPr>
@@ -2800,6 +2863,10 @@
           </a:solidFill>
           <a:ln/>
         </p:spPr>
+        <p:txBody>
+          <a:bodyPr/>
+          <a:p/>
+        </p:txBody>
       </p:sp>
       <p:pic>
         <p:nvPicPr>
@@ -2922,6 +2989,10 @@
           </a:solidFill>
           <a:ln/>
         </p:spPr>
+        <p:txBody>
+          <a:bodyPr/>
+          <a:p/>
+        </p:txBody>
       </p:sp>
       <p:sp>
         <p:nvSpPr>
@@ -2956,9 +3027,6573 @@
                 <a:ea typeface="Arial" pitchFamily="34" charset="-122"/>
                 <a:cs typeface="Arial" pitchFamily="34" charset="-120"/>
               </a:rPr>
-              <a:t>10 / 10</a:t>
+              <a:t>13 / 13</a:t>
             </a:r>
             <a:endParaRPr lang="en-US" sz="900" dirty="0"/>
+          </a:p>
+        </p:txBody>
+      </p:sp>
+    </p:spTree>
+  </p:cSld>
+  <p:clrMapOvr>
+    <a:masterClrMapping/>
+  </p:clrMapOvr>
+</p:sld>
+</file>
+
+<file path=ppt/slides/slide11.xml><?xml version="1.0" encoding="utf-8"?>
+<p:sld xmlns:a="http://schemas.openxmlformats.org/drawingml/2006/main" xmlns:p="http://schemas.openxmlformats.org/presentationml/2006/main" xmlns:r="http://schemas.openxmlformats.org/officeDocument/2006/relationships">
+  <p:cSld>
+    <p:bg>
+      <p:bgPr>
+        <a:solidFill>
+          <a:srgbClr val="0F172A"/>
+        </a:solidFill>
+        <a:effectLst/>
+      </p:bgPr>
+    </p:bg>
+    <p:spTree>
+      <p:nvGrpSpPr>
+        <p:cNvPr id="1" name=""/>
+        <p:cNvGrpSpPr/>
+        <p:nvPr/>
+      </p:nvGrpSpPr>
+      <p:grpSpPr/>
+      <p:sp>
+        <p:nvSpPr>
+          <p:cNvPr id="2" name="TextBox 1"/>
+          <p:cNvSpPr txBox="1"/>
+          <p:nvPr/>
+        </p:nvSpPr>
+        <p:spPr>
+          <a:xfrm>
+            <a:off x="457200" y="274320"/>
+            <a:ext cx="8229600" cy="640080"/>
+          </a:xfrm>
+          <a:prstGeom prst="rect">
+            <a:avLst/>
+          </a:prstGeom>
+          <a:noFill/>
+        </p:spPr>
+        <p:txBody>
+          <a:bodyPr wrap="square" lIns="0" rIns="0" tIns="0" bIns="0" anchor="ctr">
+            <a:spAutoFit/>
+          </a:bodyPr>
+          <a:lstStyle/>
+          <a:p>
+            <a:pPr algn="l"/>
+            <a:r>
+              <a:rPr sz="2600" b="1" i="0">
+                <a:solidFill>
+                  <a:srgbClr val="F8FAFC"/>
+                </a:solidFill>
+                <a:latin typeface="Arial Black"/>
+              </a:rPr>
+              <a:t>KRÁTKÝ PROMPT = NÁHODNÝ VÝSLEDEK</a:t>
+            </a:r>
+          </a:p>
+        </p:txBody>
+      </p:sp>
+      <p:sp>
+        <p:nvSpPr>
+          <p:cNvPr id="3" name="TextBox 2"/>
+          <p:cNvSpPr txBox="1"/>
+          <p:nvPr/>
+        </p:nvSpPr>
+        <p:spPr>
+          <a:xfrm>
+            <a:off x="457200" y="868680"/>
+            <a:ext cx="8229600" cy="320040"/>
+          </a:xfrm>
+          <a:prstGeom prst="rect">
+            <a:avLst/>
+          </a:prstGeom>
+          <a:noFill/>
+        </p:spPr>
+        <p:txBody>
+          <a:bodyPr wrap="square" lIns="0" rIns="0" tIns="0" bIns="0" anchor="ctr">
+            <a:spAutoFit/>
+          </a:bodyPr>
+          <a:lstStyle/>
+          <a:p>
+            <a:pPr algn="l"/>
+            <a:r>
+              <a:rPr sz="1400" b="0" i="1">
+                <a:solidFill>
+                  <a:srgbClr val="94A3B8"/>
+                </a:solidFill>
+                <a:latin typeface="Arial"/>
+              </a:rPr>
+              <a:t>Stejný prompt, 4 úplně jiné appky — AI musí hádat</a:t>
+            </a:r>
+          </a:p>
+        </p:txBody>
+      </p:sp>
+      <p:sp>
+        <p:nvSpPr>
+          <p:cNvPr id="4" name="Rectangle 3"/>
+          <p:cNvSpPr/>
+          <p:nvPr/>
+        </p:nvSpPr>
+        <p:spPr>
+          <a:xfrm>
+            <a:off x="0" y="4892040"/>
+            <a:ext cx="9144000" cy="251460"/>
+          </a:xfrm>
+          <a:prstGeom prst="rect">
+            <a:avLst/>
+          </a:prstGeom>
+          <a:solidFill>
+            <a:srgbClr val="38BDF8"/>
+          </a:solidFill>
+          <a:ln>
+            <a:noFill/>
+          </a:ln>
+        </p:spPr>
+        <p:style>
+          <a:lnRef idx="1">
+            <a:schemeClr val="accent1"/>
+          </a:lnRef>
+          <a:fillRef idx="3">
+            <a:schemeClr val="accent1"/>
+          </a:fillRef>
+          <a:effectRef idx="2">
+            <a:schemeClr val="accent1"/>
+          </a:effectRef>
+          <a:fontRef idx="minor">
+            <a:schemeClr val="lt1"/>
+          </a:fontRef>
+        </p:style>
+        <p:txBody>
+          <a:bodyPr rtlCol="0" anchor="ctr"/>
+          <a:lstStyle/>
+          <a:p>
+            <a:pPr algn="ctr"/>
+          </a:p>
+        </p:txBody>
+      </p:sp>
+      <p:sp>
+        <p:nvSpPr>
+          <p:cNvPr id="5" name="TextBox 4"/>
+          <p:cNvSpPr txBox="1"/>
+          <p:nvPr/>
+        </p:nvSpPr>
+        <p:spPr>
+          <a:xfrm>
+            <a:off x="8046720" y="4754880"/>
+            <a:ext cx="914400" cy="274320"/>
+          </a:xfrm>
+          <a:prstGeom prst="rect">
+            <a:avLst/>
+          </a:prstGeom>
+          <a:noFill/>
+        </p:spPr>
+        <p:txBody>
+          <a:bodyPr wrap="square" lIns="0" rIns="0" tIns="0" bIns="0" anchor="ctr">
+            <a:spAutoFit/>
+          </a:bodyPr>
+          <a:lstStyle/>
+          <a:p>
+            <a:pPr algn="r"/>
+            <a:r>
+              <a:rPr sz="900" b="0" i="0">
+                <a:solidFill>
+                  <a:srgbClr val="94A3B8"/>
+                </a:solidFill>
+                <a:latin typeface="Arial"/>
+              </a:rPr>
+              <a:t>5 / 13</a:t>
+            </a:r>
+          </a:p>
+        </p:txBody>
+      </p:sp>
+      <p:sp>
+        <p:nvSpPr>
+          <p:cNvPr id="6" name="Rectangle 5"/>
+          <p:cNvSpPr/>
+          <p:nvPr/>
+        </p:nvSpPr>
+        <p:spPr>
+          <a:xfrm>
+            <a:off x="2286000" y="1371600"/>
+            <a:ext cx="4572000" cy="500000"/>
+          </a:xfrm>
+          <a:prstGeom prst="rect">
+            <a:avLst/>
+          </a:prstGeom>
+          <a:solidFill>
+            <a:srgbClr val="1E293B"/>
+          </a:solidFill>
+          <a:ln>
+            <a:noFill/>
+          </a:ln>
+        </p:spPr>
+        <p:style>
+          <a:lnRef idx="1">
+            <a:schemeClr val="accent1"/>
+          </a:lnRef>
+          <a:fillRef idx="3">
+            <a:schemeClr val="accent1"/>
+          </a:fillRef>
+          <a:effectRef idx="2">
+            <a:schemeClr val="accent1"/>
+          </a:effectRef>
+          <a:fontRef idx="minor">
+            <a:schemeClr val="lt1"/>
+          </a:fontRef>
+        </p:style>
+        <p:txBody>
+          <a:bodyPr rtlCol="0" anchor="ctr"/>
+          <a:lstStyle/>
+          <a:p>
+            <a:pPr algn="ctr"/>
+          </a:p>
+        </p:txBody>
+      </p:sp>
+      <p:sp>
+        <p:nvSpPr>
+          <p:cNvPr id="7" name="Rectangle 6"/>
+          <p:cNvSpPr/>
+          <p:nvPr/>
+        </p:nvSpPr>
+        <p:spPr>
+          <a:xfrm>
+            <a:off x="2286000" y="1371600"/>
+            <a:ext cx="54864" cy="500000"/>
+          </a:xfrm>
+          <a:prstGeom prst="rect">
+            <a:avLst/>
+          </a:prstGeom>
+          <a:solidFill>
+            <a:srgbClr val="38BDF8"/>
+          </a:solidFill>
+          <a:ln>
+            <a:noFill/>
+          </a:ln>
+        </p:spPr>
+        <p:style>
+          <a:lnRef idx="1">
+            <a:schemeClr val="accent1"/>
+          </a:lnRef>
+          <a:fillRef idx="3">
+            <a:schemeClr val="accent1"/>
+          </a:fillRef>
+          <a:effectRef idx="2">
+            <a:schemeClr val="accent1"/>
+          </a:effectRef>
+          <a:fontRef idx="minor">
+            <a:schemeClr val="lt1"/>
+          </a:fontRef>
+        </p:style>
+        <p:txBody>
+          <a:bodyPr rtlCol="0" anchor="ctr"/>
+          <a:lstStyle/>
+          <a:p>
+            <a:pPr algn="ctr"/>
+          </a:p>
+        </p:txBody>
+      </p:sp>
+      <p:sp>
+        <p:nvSpPr>
+          <p:cNvPr id="8" name="TextBox 7"/>
+          <p:cNvSpPr txBox="1"/>
+          <p:nvPr/>
+        </p:nvSpPr>
+        <p:spPr>
+          <a:xfrm>
+            <a:off x="2468880" y="1371600"/>
+            <a:ext cx="4297680" cy="500000"/>
+          </a:xfrm>
+          <a:prstGeom prst="rect">
+            <a:avLst/>
+          </a:prstGeom>
+          <a:noFill/>
+        </p:spPr>
+        <p:txBody>
+          <a:bodyPr wrap="square" lIns="0" rIns="0" tIns="0" bIns="0" anchor="ctr">
+            <a:spAutoFit/>
+          </a:bodyPr>
+          <a:lstStyle/>
+          <a:p>
+            <a:pPr algn="l"/>
+            <a:r>
+              <a:rPr sz="1800" b="1" i="1">
+                <a:solidFill>
+                  <a:srgbClr val="F8FAFC"/>
+                </a:solidFill>
+                <a:latin typeface="Arial"/>
+              </a:rPr>
+              <a:t>„Udělej mi TODO list"</a:t>
+            </a:r>
+          </a:p>
+        </p:txBody>
+      </p:sp>
+      <p:sp>
+        <p:nvSpPr>
+          <p:cNvPr id="9" name="TextBox 8"/>
+          <p:cNvSpPr txBox="1"/>
+          <p:nvPr/>
+        </p:nvSpPr>
+        <p:spPr>
+          <a:xfrm>
+            <a:off x="4324350" y="1920000"/>
+            <a:ext cx="500000" cy="260000"/>
+          </a:xfrm>
+          <a:prstGeom prst="rect">
+            <a:avLst/>
+          </a:prstGeom>
+          <a:noFill/>
+        </p:spPr>
+        <p:txBody>
+          <a:bodyPr wrap="square" lIns="0" rIns="0" tIns="0" bIns="0" anchor="ctr">
+            <a:spAutoFit/>
+          </a:bodyPr>
+          <a:lstStyle/>
+          <a:p>
+            <a:pPr algn="ctr"/>
+            <a:r>
+              <a:rPr sz="2000" b="0" i="0">
+                <a:solidFill>
+                  <a:srgbClr val="94A3B8"/>
+                </a:solidFill>
+                <a:latin typeface="Arial"/>
+              </a:rPr>
+              <a:t>↓</a:t>
+            </a:r>
+          </a:p>
+        </p:txBody>
+      </p:sp>
+      <p:sp>
+        <p:nvSpPr>
+          <p:cNvPr id="10" name="Rectangle 9"/>
+          <p:cNvSpPr/>
+          <p:nvPr/>
+        </p:nvSpPr>
+        <p:spPr>
+          <a:xfrm>
+            <a:off x="228600" y="2250000"/>
+            <a:ext cx="2068830" cy="1760000"/>
+          </a:xfrm>
+          <a:prstGeom prst="rect">
+            <a:avLst/>
+          </a:prstGeom>
+          <a:solidFill>
+            <a:srgbClr val="0F1C2C"/>
+          </a:solidFill>
+          <a:ln>
+            <a:noFill/>
+          </a:ln>
+        </p:spPr>
+        <p:style>
+          <a:lnRef idx="1">
+            <a:schemeClr val="accent1"/>
+          </a:lnRef>
+          <a:fillRef idx="3">
+            <a:schemeClr val="accent1"/>
+          </a:fillRef>
+          <a:effectRef idx="2">
+            <a:schemeClr val="accent1"/>
+          </a:effectRef>
+          <a:fontRef idx="minor">
+            <a:schemeClr val="lt1"/>
+          </a:fontRef>
+        </p:style>
+        <p:txBody>
+          <a:bodyPr rtlCol="0" anchor="ctr"/>
+          <a:lstStyle/>
+          <a:p>
+            <a:pPr algn="ctr"/>
+          </a:p>
+        </p:txBody>
+      </p:sp>
+      <p:sp>
+        <p:nvSpPr>
+          <p:cNvPr id="11" name="Rectangle 10"/>
+          <p:cNvSpPr/>
+          <p:nvPr/>
+        </p:nvSpPr>
+        <p:spPr>
+          <a:xfrm>
+            <a:off x="228600" y="2250000"/>
+            <a:ext cx="2068830" cy="182880"/>
+          </a:xfrm>
+          <a:prstGeom prst="rect">
+            <a:avLst/>
+          </a:prstGeom>
+          <a:solidFill>
+            <a:srgbClr val="334155"/>
+          </a:solidFill>
+          <a:ln>
+            <a:noFill/>
+          </a:ln>
+        </p:spPr>
+        <p:style>
+          <a:lnRef idx="1">
+            <a:schemeClr val="accent1"/>
+          </a:lnRef>
+          <a:fillRef idx="3">
+            <a:schemeClr val="accent1"/>
+          </a:fillRef>
+          <a:effectRef idx="2">
+            <a:schemeClr val="accent1"/>
+          </a:effectRef>
+          <a:fontRef idx="minor">
+            <a:schemeClr val="lt1"/>
+          </a:fontRef>
+        </p:style>
+        <p:txBody>
+          <a:bodyPr rtlCol="0" anchor="ctr"/>
+          <a:lstStyle/>
+          <a:p>
+            <a:pPr algn="ctr"/>
+          </a:p>
+        </p:txBody>
+      </p:sp>
+      <p:sp>
+        <p:nvSpPr>
+          <p:cNvPr id="12" name="TextBox 11"/>
+          <p:cNvSpPr txBox="1"/>
+          <p:nvPr/>
+        </p:nvSpPr>
+        <p:spPr>
+          <a:xfrm>
+            <a:off x="320040" y="2268000"/>
+            <a:ext cx="1885950" cy="150000"/>
+          </a:xfrm>
+          <a:prstGeom prst="rect">
+            <a:avLst/>
+          </a:prstGeom>
+          <a:noFill/>
+        </p:spPr>
+        <p:txBody>
+          <a:bodyPr wrap="square" lIns="0" rIns="0" tIns="0" bIns="0" anchor="t">
+            <a:spAutoFit/>
+          </a:bodyPr>
+          <a:lstStyle/>
+          <a:p>
+            <a:pPr algn="l"/>
+            <a:r>
+              <a:rPr sz="800" b="1" i="0">
+                <a:solidFill>
+                  <a:srgbClr val="F8FAFC"/>
+                </a:solidFill>
+                <a:latin typeface="Arial"/>
+              </a:rPr>
+              <a:t>TODO  /  Board</a:t>
+            </a:r>
+          </a:p>
+        </p:txBody>
+      </p:sp>
+      <p:sp>
+        <p:nvSpPr>
+          <p:cNvPr id="13" name="Rectangle 12"/>
+          <p:cNvSpPr/>
+          <p:nvPr/>
+        </p:nvSpPr>
+        <p:spPr>
+          <a:xfrm>
+            <a:off x="320040" y="2470000"/>
+            <a:ext cx="567690" cy="1510000"/>
+          </a:xfrm>
+          <a:prstGeom prst="rect">
+            <a:avLst/>
+          </a:prstGeom>
+          <a:solidFill>
+            <a:srgbClr val="0F172A"/>
+          </a:solidFill>
+          <a:ln>
+            <a:noFill/>
+          </a:ln>
+        </p:spPr>
+        <p:style>
+          <a:lnRef idx="1">
+            <a:schemeClr val="accent1"/>
+          </a:lnRef>
+          <a:fillRef idx="3">
+            <a:schemeClr val="accent1"/>
+          </a:fillRef>
+          <a:effectRef idx="2">
+            <a:schemeClr val="accent1"/>
+          </a:effectRef>
+          <a:fontRef idx="minor">
+            <a:schemeClr val="lt1"/>
+          </a:fontRef>
+        </p:style>
+        <p:txBody>
+          <a:bodyPr rtlCol="0" anchor="ctr"/>
+          <a:lstStyle/>
+          <a:p>
+            <a:pPr algn="ctr"/>
+          </a:p>
+        </p:txBody>
+      </p:sp>
+      <p:sp>
+        <p:nvSpPr>
+          <p:cNvPr id="14" name="TextBox 13"/>
+          <p:cNvSpPr txBox="1"/>
+          <p:nvPr/>
+        </p:nvSpPr>
+        <p:spPr>
+          <a:xfrm>
+            <a:off x="365760" y="2490000"/>
+            <a:ext cx="476250" cy="120000"/>
+          </a:xfrm>
+          <a:prstGeom prst="rect">
+            <a:avLst/>
+          </a:prstGeom>
+          <a:noFill/>
+        </p:spPr>
+        <p:txBody>
+          <a:bodyPr wrap="square" lIns="0" rIns="0" tIns="0" bIns="0" anchor="t">
+            <a:spAutoFit/>
+          </a:bodyPr>
+          <a:lstStyle/>
+          <a:p>
+            <a:pPr algn="l"/>
+            <a:r>
+              <a:rPr sz="700" b="1" i="0">
+                <a:solidFill>
+                  <a:srgbClr val="94A3B8"/>
+                </a:solidFill>
+                <a:latin typeface="Arial"/>
+              </a:rPr>
+              <a:t>To Do</a:t>
+            </a:r>
+          </a:p>
+        </p:txBody>
+      </p:sp>
+      <p:sp>
+        <p:nvSpPr>
+          <p:cNvPr id="15" name="Rectangle 14"/>
+          <p:cNvSpPr/>
+          <p:nvPr/>
+        </p:nvSpPr>
+        <p:spPr>
+          <a:xfrm>
+            <a:off x="365760" y="2630000"/>
+            <a:ext cx="476250" cy="140000"/>
+          </a:xfrm>
+          <a:prstGeom prst="rect">
+            <a:avLst/>
+          </a:prstGeom>
+          <a:solidFill>
+            <a:srgbClr val="1E293B"/>
+          </a:solidFill>
+          <a:ln>
+            <a:noFill/>
+          </a:ln>
+        </p:spPr>
+        <p:style>
+          <a:lnRef idx="1">
+            <a:schemeClr val="accent1"/>
+          </a:lnRef>
+          <a:fillRef idx="3">
+            <a:schemeClr val="accent1"/>
+          </a:fillRef>
+          <a:effectRef idx="2">
+            <a:schemeClr val="accent1"/>
+          </a:effectRef>
+          <a:fontRef idx="minor">
+            <a:schemeClr val="lt1"/>
+          </a:fontRef>
+        </p:style>
+        <p:txBody>
+          <a:bodyPr rtlCol="0" anchor="ctr"/>
+          <a:lstStyle/>
+          <a:p>
+            <a:pPr algn="ctr"/>
+          </a:p>
+        </p:txBody>
+      </p:sp>
+      <p:sp>
+        <p:nvSpPr>
+          <p:cNvPr id="16" name="Rectangle 15"/>
+          <p:cNvSpPr/>
+          <p:nvPr/>
+        </p:nvSpPr>
+        <p:spPr>
+          <a:xfrm>
+            <a:off x="365760" y="2815720"/>
+            <a:ext cx="476250" cy="140000"/>
+          </a:xfrm>
+          <a:prstGeom prst="rect">
+            <a:avLst/>
+          </a:prstGeom>
+          <a:solidFill>
+            <a:srgbClr val="1E293B"/>
+          </a:solidFill>
+          <a:ln>
+            <a:noFill/>
+          </a:ln>
+        </p:spPr>
+        <p:style>
+          <a:lnRef idx="1">
+            <a:schemeClr val="accent1"/>
+          </a:lnRef>
+          <a:fillRef idx="3">
+            <a:schemeClr val="accent1"/>
+          </a:fillRef>
+          <a:effectRef idx="2">
+            <a:schemeClr val="accent1"/>
+          </a:effectRef>
+          <a:fontRef idx="minor">
+            <a:schemeClr val="lt1"/>
+          </a:fontRef>
+        </p:style>
+        <p:txBody>
+          <a:bodyPr rtlCol="0" anchor="ctr"/>
+          <a:lstStyle/>
+          <a:p>
+            <a:pPr algn="ctr"/>
+          </a:p>
+        </p:txBody>
+      </p:sp>
+      <p:sp>
+        <p:nvSpPr>
+          <p:cNvPr id="17" name="Rectangle 16"/>
+          <p:cNvSpPr/>
+          <p:nvPr/>
+        </p:nvSpPr>
+        <p:spPr>
+          <a:xfrm>
+            <a:off x="933450" y="2470000"/>
+            <a:ext cx="567690" cy="1510000"/>
+          </a:xfrm>
+          <a:prstGeom prst="rect">
+            <a:avLst/>
+          </a:prstGeom>
+          <a:solidFill>
+            <a:srgbClr val="0F172A"/>
+          </a:solidFill>
+          <a:ln>
+            <a:noFill/>
+          </a:ln>
+        </p:spPr>
+        <p:style>
+          <a:lnRef idx="1">
+            <a:schemeClr val="accent1"/>
+          </a:lnRef>
+          <a:fillRef idx="3">
+            <a:schemeClr val="accent1"/>
+          </a:fillRef>
+          <a:effectRef idx="2">
+            <a:schemeClr val="accent1"/>
+          </a:effectRef>
+          <a:fontRef idx="minor">
+            <a:schemeClr val="lt1"/>
+          </a:fontRef>
+        </p:style>
+        <p:txBody>
+          <a:bodyPr rtlCol="0" anchor="ctr"/>
+          <a:lstStyle/>
+          <a:p>
+            <a:pPr algn="ctr"/>
+          </a:p>
+        </p:txBody>
+      </p:sp>
+      <p:sp>
+        <p:nvSpPr>
+          <p:cNvPr id="18" name="TextBox 17"/>
+          <p:cNvSpPr txBox="1"/>
+          <p:nvPr/>
+        </p:nvSpPr>
+        <p:spPr>
+          <a:xfrm>
+            <a:off x="979170" y="2490000"/>
+            <a:ext cx="476250" cy="120000"/>
+          </a:xfrm>
+          <a:prstGeom prst="rect">
+            <a:avLst/>
+          </a:prstGeom>
+          <a:noFill/>
+        </p:spPr>
+        <p:txBody>
+          <a:bodyPr wrap="square" lIns="0" rIns="0" tIns="0" bIns="0" anchor="t">
+            <a:spAutoFit/>
+          </a:bodyPr>
+          <a:lstStyle/>
+          <a:p>
+            <a:pPr algn="l"/>
+            <a:r>
+              <a:rPr sz="700" b="1" i="0">
+                <a:solidFill>
+                  <a:srgbClr val="FBBF24"/>
+                </a:solidFill>
+                <a:latin typeface="Arial"/>
+              </a:rPr>
+              <a:t>Doing</a:t>
+            </a:r>
+          </a:p>
+        </p:txBody>
+      </p:sp>
+      <p:sp>
+        <p:nvSpPr>
+          <p:cNvPr id="19" name="Rectangle 18"/>
+          <p:cNvSpPr/>
+          <p:nvPr/>
+        </p:nvSpPr>
+        <p:spPr>
+          <a:xfrm>
+            <a:off x="979170" y="2630000"/>
+            <a:ext cx="476250" cy="140000"/>
+          </a:xfrm>
+          <a:prstGeom prst="rect">
+            <a:avLst/>
+          </a:prstGeom>
+          <a:solidFill>
+            <a:srgbClr val="1E293B"/>
+          </a:solidFill>
+          <a:ln>
+            <a:noFill/>
+          </a:ln>
+        </p:spPr>
+        <p:style>
+          <a:lnRef idx="1">
+            <a:schemeClr val="accent1"/>
+          </a:lnRef>
+          <a:fillRef idx="3">
+            <a:schemeClr val="accent1"/>
+          </a:fillRef>
+          <a:effectRef idx="2">
+            <a:schemeClr val="accent1"/>
+          </a:effectRef>
+          <a:fontRef idx="minor">
+            <a:schemeClr val="lt1"/>
+          </a:fontRef>
+        </p:style>
+        <p:txBody>
+          <a:bodyPr rtlCol="0" anchor="ctr"/>
+          <a:lstStyle/>
+          <a:p>
+            <a:pPr algn="ctr"/>
+          </a:p>
+        </p:txBody>
+      </p:sp>
+      <p:sp>
+        <p:nvSpPr>
+          <p:cNvPr id="20" name="Rectangle 19"/>
+          <p:cNvSpPr/>
+          <p:nvPr/>
+        </p:nvSpPr>
+        <p:spPr>
+          <a:xfrm>
+            <a:off x="979170" y="2815720"/>
+            <a:ext cx="476250" cy="140000"/>
+          </a:xfrm>
+          <a:prstGeom prst="rect">
+            <a:avLst/>
+          </a:prstGeom>
+          <a:solidFill>
+            <a:srgbClr val="1E293B"/>
+          </a:solidFill>
+          <a:ln>
+            <a:noFill/>
+          </a:ln>
+        </p:spPr>
+        <p:style>
+          <a:lnRef idx="1">
+            <a:schemeClr val="accent1"/>
+          </a:lnRef>
+          <a:fillRef idx="3">
+            <a:schemeClr val="accent1"/>
+          </a:fillRef>
+          <a:effectRef idx="2">
+            <a:schemeClr val="accent1"/>
+          </a:effectRef>
+          <a:fontRef idx="minor">
+            <a:schemeClr val="lt1"/>
+          </a:fontRef>
+        </p:style>
+        <p:txBody>
+          <a:bodyPr rtlCol="0" anchor="ctr"/>
+          <a:lstStyle/>
+          <a:p>
+            <a:pPr algn="ctr"/>
+          </a:p>
+        </p:txBody>
+      </p:sp>
+      <p:sp>
+        <p:nvSpPr>
+          <p:cNvPr id="21" name="Rectangle 20"/>
+          <p:cNvSpPr/>
+          <p:nvPr/>
+        </p:nvSpPr>
+        <p:spPr>
+          <a:xfrm>
+            <a:off x="1546860" y="2470000"/>
+            <a:ext cx="567690" cy="1510000"/>
+          </a:xfrm>
+          <a:prstGeom prst="rect">
+            <a:avLst/>
+          </a:prstGeom>
+          <a:solidFill>
+            <a:srgbClr val="0F172A"/>
+          </a:solidFill>
+          <a:ln>
+            <a:noFill/>
+          </a:ln>
+        </p:spPr>
+        <p:style>
+          <a:lnRef idx="1">
+            <a:schemeClr val="accent1"/>
+          </a:lnRef>
+          <a:fillRef idx="3">
+            <a:schemeClr val="accent1"/>
+          </a:fillRef>
+          <a:effectRef idx="2">
+            <a:schemeClr val="accent1"/>
+          </a:effectRef>
+          <a:fontRef idx="minor">
+            <a:schemeClr val="lt1"/>
+          </a:fontRef>
+        </p:style>
+        <p:txBody>
+          <a:bodyPr rtlCol="0" anchor="ctr"/>
+          <a:lstStyle/>
+          <a:p>
+            <a:pPr algn="ctr"/>
+          </a:p>
+        </p:txBody>
+      </p:sp>
+      <p:sp>
+        <p:nvSpPr>
+          <p:cNvPr id="22" name="TextBox 21"/>
+          <p:cNvSpPr txBox="1"/>
+          <p:nvPr/>
+        </p:nvSpPr>
+        <p:spPr>
+          <a:xfrm>
+            <a:off x="1592580" y="2490000"/>
+            <a:ext cx="476250" cy="120000"/>
+          </a:xfrm>
+          <a:prstGeom prst="rect">
+            <a:avLst/>
+          </a:prstGeom>
+          <a:noFill/>
+        </p:spPr>
+        <p:txBody>
+          <a:bodyPr wrap="square" lIns="0" rIns="0" tIns="0" bIns="0" anchor="t">
+            <a:spAutoFit/>
+          </a:bodyPr>
+          <a:lstStyle/>
+          <a:p>
+            <a:pPr algn="l"/>
+            <a:r>
+              <a:rPr sz="700" b="1" i="0">
+                <a:solidFill>
+                  <a:srgbClr val="34D399"/>
+                </a:solidFill>
+                <a:latin typeface="Arial"/>
+              </a:rPr>
+              <a:t>Done</a:t>
+            </a:r>
+          </a:p>
+        </p:txBody>
+      </p:sp>
+      <p:sp>
+        <p:nvSpPr>
+          <p:cNvPr id="23" name="Rectangle 22"/>
+          <p:cNvSpPr/>
+          <p:nvPr/>
+        </p:nvSpPr>
+        <p:spPr>
+          <a:xfrm>
+            <a:off x="1592580" y="2630000"/>
+            <a:ext cx="476250" cy="140000"/>
+          </a:xfrm>
+          <a:prstGeom prst="rect">
+            <a:avLst/>
+          </a:prstGeom>
+          <a:solidFill>
+            <a:srgbClr val="1E293B"/>
+          </a:solidFill>
+          <a:ln>
+            <a:noFill/>
+          </a:ln>
+        </p:spPr>
+        <p:style>
+          <a:lnRef idx="1">
+            <a:schemeClr val="accent1"/>
+          </a:lnRef>
+          <a:fillRef idx="3">
+            <a:schemeClr val="accent1"/>
+          </a:fillRef>
+          <a:effectRef idx="2">
+            <a:schemeClr val="accent1"/>
+          </a:effectRef>
+          <a:fontRef idx="minor">
+            <a:schemeClr val="lt1"/>
+          </a:fontRef>
+        </p:style>
+        <p:txBody>
+          <a:bodyPr rtlCol="0" anchor="ctr"/>
+          <a:lstStyle/>
+          <a:p>
+            <a:pPr algn="ctr"/>
+          </a:p>
+        </p:txBody>
+      </p:sp>
+      <p:sp>
+        <p:nvSpPr>
+          <p:cNvPr id="24" name="TextBox 23"/>
+          <p:cNvSpPr txBox="1"/>
+          <p:nvPr/>
+        </p:nvSpPr>
+        <p:spPr>
+          <a:xfrm>
+            <a:off x="228600" y="4055720"/>
+            <a:ext cx="2068830" cy="160000"/>
+          </a:xfrm>
+          <a:prstGeom prst="rect">
+            <a:avLst/>
+          </a:prstGeom>
+          <a:noFill/>
+        </p:spPr>
+        <p:txBody>
+          <a:bodyPr wrap="square" lIns="0" rIns="0" tIns="0" bIns="0" anchor="t">
+            <a:spAutoFit/>
+          </a:bodyPr>
+          <a:lstStyle/>
+          <a:p>
+            <a:pPr algn="ctr"/>
+            <a:r>
+              <a:rPr sz="1000" b="1" i="0">
+                <a:solidFill>
+                  <a:srgbClr val="34D399"/>
+                </a:solidFill>
+                <a:latin typeface="Arial"/>
+              </a:rPr>
+              <a:t>Kanban</a:t>
+            </a:r>
+          </a:p>
+        </p:txBody>
+      </p:sp>
+      <p:sp>
+        <p:nvSpPr>
+          <p:cNvPr id="25" name="TextBox 24"/>
+          <p:cNvSpPr txBox="1"/>
+          <p:nvPr/>
+        </p:nvSpPr>
+        <p:spPr>
+          <a:xfrm>
+            <a:off x="228600" y="4205720"/>
+            <a:ext cx="2068830" cy="140000"/>
+          </a:xfrm>
+          <a:prstGeom prst="rect">
+            <a:avLst/>
+          </a:prstGeom>
+          <a:noFill/>
+        </p:spPr>
+        <p:txBody>
+          <a:bodyPr wrap="square" lIns="0" rIns="0" tIns="0" bIns="0" anchor="t">
+            <a:spAutoFit/>
+          </a:bodyPr>
+          <a:lstStyle/>
+          <a:p>
+            <a:pPr algn="ctr"/>
+            <a:r>
+              <a:rPr sz="800" b="0" i="0">
+                <a:solidFill>
+                  <a:srgbClr val="94A3B8"/>
+                </a:solidFill>
+                <a:latin typeface="Arial"/>
+              </a:rPr>
+              <a:t>Trello-like</a:t>
+            </a:r>
+          </a:p>
+        </p:txBody>
+      </p:sp>
+      <p:sp>
+        <p:nvSpPr>
+          <p:cNvPr id="26" name="Rectangle 25"/>
+          <p:cNvSpPr/>
+          <p:nvPr/>
+        </p:nvSpPr>
+        <p:spPr>
+          <a:xfrm>
+            <a:off x="2434590" y="2250000"/>
+            <a:ext cx="2068830" cy="1760000"/>
+          </a:xfrm>
+          <a:prstGeom prst="rect">
+            <a:avLst/>
+          </a:prstGeom>
+          <a:solidFill>
+            <a:srgbClr val="0F1C2C"/>
+          </a:solidFill>
+          <a:ln>
+            <a:noFill/>
+          </a:ln>
+        </p:spPr>
+        <p:style>
+          <a:lnRef idx="1">
+            <a:schemeClr val="accent1"/>
+          </a:lnRef>
+          <a:fillRef idx="3">
+            <a:schemeClr val="accent1"/>
+          </a:fillRef>
+          <a:effectRef idx="2">
+            <a:schemeClr val="accent1"/>
+          </a:effectRef>
+          <a:fontRef idx="minor">
+            <a:schemeClr val="lt1"/>
+          </a:fontRef>
+        </p:style>
+        <p:txBody>
+          <a:bodyPr rtlCol="0" anchor="ctr"/>
+          <a:lstStyle/>
+          <a:p>
+            <a:pPr algn="ctr"/>
+          </a:p>
+        </p:txBody>
+      </p:sp>
+      <p:sp>
+        <p:nvSpPr>
+          <p:cNvPr id="27" name="Rectangle 26"/>
+          <p:cNvSpPr/>
+          <p:nvPr/>
+        </p:nvSpPr>
+        <p:spPr>
+          <a:xfrm>
+            <a:off x="2434590" y="2250000"/>
+            <a:ext cx="2068830" cy="182880"/>
+          </a:xfrm>
+          <a:prstGeom prst="rect">
+            <a:avLst/>
+          </a:prstGeom>
+          <a:solidFill>
+            <a:srgbClr val="334155"/>
+          </a:solidFill>
+          <a:ln>
+            <a:noFill/>
+          </a:ln>
+        </p:spPr>
+        <p:style>
+          <a:lnRef idx="1">
+            <a:schemeClr val="accent1"/>
+          </a:lnRef>
+          <a:fillRef idx="3">
+            <a:schemeClr val="accent1"/>
+          </a:fillRef>
+          <a:effectRef idx="2">
+            <a:schemeClr val="accent1"/>
+          </a:effectRef>
+          <a:fontRef idx="minor">
+            <a:schemeClr val="lt1"/>
+          </a:fontRef>
+        </p:style>
+        <p:txBody>
+          <a:bodyPr rtlCol="0" anchor="ctr"/>
+          <a:lstStyle/>
+          <a:p>
+            <a:pPr algn="ctr"/>
+          </a:p>
+        </p:txBody>
+      </p:sp>
+      <p:sp>
+        <p:nvSpPr>
+          <p:cNvPr id="28" name="TextBox 27"/>
+          <p:cNvSpPr txBox="1"/>
+          <p:nvPr/>
+        </p:nvSpPr>
+        <p:spPr>
+          <a:xfrm>
+            <a:off x="2526030" y="2268000"/>
+            <a:ext cx="1885950" cy="150000"/>
+          </a:xfrm>
+          <a:prstGeom prst="rect">
+            <a:avLst/>
+          </a:prstGeom>
+          <a:noFill/>
+        </p:spPr>
+        <p:txBody>
+          <a:bodyPr wrap="square" lIns="0" rIns="0" tIns="0" bIns="0" anchor="t">
+            <a:spAutoFit/>
+          </a:bodyPr>
+          <a:lstStyle/>
+          <a:p>
+            <a:pPr algn="l"/>
+            <a:r>
+              <a:rPr sz="800" b="1" i="0">
+                <a:solidFill>
+                  <a:srgbClr val="F8FAFC"/>
+                </a:solidFill>
+                <a:latin typeface="Arial"/>
+              </a:rPr>
+              <a:t>TODO  /  Focus</a:t>
+            </a:r>
+          </a:p>
+        </p:txBody>
+      </p:sp>
+      <p:sp>
+        <p:nvSpPr>
+          <p:cNvPr id="29" name="TextBox 28"/>
+          <p:cNvSpPr txBox="1"/>
+          <p:nvPr/>
+        </p:nvSpPr>
+        <p:spPr>
+          <a:xfrm>
+            <a:off x="2434590" y="2530000"/>
+            <a:ext cx="2068830" cy="280000"/>
+          </a:xfrm>
+          <a:prstGeom prst="rect">
+            <a:avLst/>
+          </a:prstGeom>
+          <a:noFill/>
+        </p:spPr>
+        <p:txBody>
+          <a:bodyPr wrap="square" lIns="0" rIns="0" tIns="0" bIns="0" anchor="ctr">
+            <a:spAutoFit/>
+          </a:bodyPr>
+          <a:lstStyle/>
+          <a:p>
+            <a:pPr algn="ctr"/>
+            <a:r>
+              <a:rPr sz="2800" b="1" i="0">
+                <a:solidFill>
+                  <a:srgbClr val="F87171"/>
+                </a:solidFill>
+                <a:latin typeface="Consolas"/>
+              </a:rPr>
+              <a:t>25:00</a:t>
+            </a:r>
+          </a:p>
+        </p:txBody>
+      </p:sp>
+      <p:sp>
+        <p:nvSpPr>
+          <p:cNvPr id="30" name="TextBox 29"/>
+          <p:cNvSpPr txBox="1"/>
+          <p:nvPr/>
+        </p:nvSpPr>
+        <p:spPr>
+          <a:xfrm>
+            <a:off x="2526030" y="2870000"/>
+            <a:ext cx="1885950" cy="120000"/>
+          </a:xfrm>
+          <a:prstGeom prst="rect">
+            <a:avLst/>
+          </a:prstGeom>
+          <a:noFill/>
+        </p:spPr>
+        <p:txBody>
+          <a:bodyPr wrap="square" lIns="0" rIns="0" tIns="0" bIns="0" anchor="t">
+            <a:spAutoFit/>
+          </a:bodyPr>
+          <a:lstStyle/>
+          <a:p>
+            <a:pPr algn="l"/>
+            <a:r>
+              <a:rPr sz="700" b="1" i="0">
+                <a:solidFill>
+                  <a:srgbClr val="F8FAFC"/>
+                </a:solidFill>
+                <a:latin typeface="Arial"/>
+              </a:rPr>
+              <a:t>▶  Write report</a:t>
+            </a:r>
+          </a:p>
+        </p:txBody>
+      </p:sp>
+      <p:sp>
+        <p:nvSpPr>
+          <p:cNvPr id="31" name="TextBox 30"/>
+          <p:cNvSpPr txBox="1"/>
+          <p:nvPr/>
+        </p:nvSpPr>
+        <p:spPr>
+          <a:xfrm>
+            <a:off x="2526030" y="3000000"/>
+            <a:ext cx="1885950" cy="120000"/>
+          </a:xfrm>
+          <a:prstGeom prst="rect">
+            <a:avLst/>
+          </a:prstGeom>
+          <a:noFill/>
+        </p:spPr>
+        <p:txBody>
+          <a:bodyPr wrap="square" lIns="0" rIns="0" tIns="0" bIns="0" anchor="t">
+            <a:spAutoFit/>
+          </a:bodyPr>
+          <a:lstStyle/>
+          <a:p>
+            <a:pPr algn="l"/>
+            <a:r>
+              <a:rPr sz="700" b="0" i="0">
+                <a:solidFill>
+                  <a:srgbClr val="94A3B8"/>
+                </a:solidFill>
+                <a:latin typeface="Arial"/>
+              </a:rPr>
+              <a:t>○  Review PR</a:t>
+            </a:r>
+          </a:p>
+        </p:txBody>
+      </p:sp>
+      <p:sp>
+        <p:nvSpPr>
+          <p:cNvPr id="32" name="TextBox 31"/>
+          <p:cNvSpPr txBox="1"/>
+          <p:nvPr/>
+        </p:nvSpPr>
+        <p:spPr>
+          <a:xfrm>
+            <a:off x="2526030" y="3130000"/>
+            <a:ext cx="1885950" cy="120000"/>
+          </a:xfrm>
+          <a:prstGeom prst="rect">
+            <a:avLst/>
+          </a:prstGeom>
+          <a:noFill/>
+        </p:spPr>
+        <p:txBody>
+          <a:bodyPr wrap="square" lIns="0" rIns="0" tIns="0" bIns="0" anchor="t">
+            <a:spAutoFit/>
+          </a:bodyPr>
+          <a:lstStyle/>
+          <a:p>
+            <a:pPr algn="l"/>
+            <a:r>
+              <a:rPr sz="700" b="0" i="0">
+                <a:solidFill>
+                  <a:srgbClr val="94A3B8"/>
+                </a:solidFill>
+                <a:latin typeface="Arial"/>
+              </a:rPr>
+              <a:t>○  Deploy fix</a:t>
+            </a:r>
+          </a:p>
+        </p:txBody>
+      </p:sp>
+      <p:sp>
+        <p:nvSpPr>
+          <p:cNvPr id="33" name="TextBox 32"/>
+          <p:cNvSpPr txBox="1"/>
+          <p:nvPr/>
+        </p:nvSpPr>
+        <p:spPr>
+          <a:xfrm>
+            <a:off x="2434590" y="4055720"/>
+            <a:ext cx="2068830" cy="160000"/>
+          </a:xfrm>
+          <a:prstGeom prst="rect">
+            <a:avLst/>
+          </a:prstGeom>
+          <a:noFill/>
+        </p:spPr>
+        <p:txBody>
+          <a:bodyPr wrap="square" lIns="0" rIns="0" tIns="0" bIns="0" anchor="t">
+            <a:spAutoFit/>
+          </a:bodyPr>
+          <a:lstStyle/>
+          <a:p>
+            <a:pPr algn="ctr"/>
+            <a:r>
+              <a:rPr sz="1000" b="1" i="0">
+                <a:solidFill>
+                  <a:srgbClr val="F87171"/>
+                </a:solidFill>
+                <a:latin typeface="Arial"/>
+              </a:rPr>
+              <a:t>Pomodoro</a:t>
+            </a:r>
+          </a:p>
+        </p:txBody>
+      </p:sp>
+      <p:sp>
+        <p:nvSpPr>
+          <p:cNvPr id="34" name="TextBox 33"/>
+          <p:cNvSpPr txBox="1"/>
+          <p:nvPr/>
+        </p:nvSpPr>
+        <p:spPr>
+          <a:xfrm>
+            <a:off x="2434590" y="4205720"/>
+            <a:ext cx="2068830" cy="140000"/>
+          </a:xfrm>
+          <a:prstGeom prst="rect">
+            <a:avLst/>
+          </a:prstGeom>
+          <a:noFill/>
+        </p:spPr>
+        <p:txBody>
+          <a:bodyPr wrap="square" lIns="0" rIns="0" tIns="0" bIns="0" anchor="t">
+            <a:spAutoFit/>
+          </a:bodyPr>
+          <a:lstStyle/>
+          <a:p>
+            <a:pPr algn="ctr"/>
+            <a:r>
+              <a:rPr sz="800" b="0" i="0">
+                <a:solidFill>
+                  <a:srgbClr val="94A3B8"/>
+                </a:solidFill>
+                <a:latin typeface="Arial"/>
+              </a:rPr>
+              <a:t>Focus timer</a:t>
+            </a:r>
+          </a:p>
+        </p:txBody>
+      </p:sp>
+      <p:sp>
+        <p:nvSpPr>
+          <p:cNvPr id="35" name="Rectangle 34"/>
+          <p:cNvSpPr/>
+          <p:nvPr/>
+        </p:nvSpPr>
+        <p:spPr>
+          <a:xfrm>
+            <a:off x="4640580" y="2250000"/>
+            <a:ext cx="2068830" cy="1760000"/>
+          </a:xfrm>
+          <a:prstGeom prst="rect">
+            <a:avLst/>
+          </a:prstGeom>
+          <a:solidFill>
+            <a:srgbClr val="0F1C2C"/>
+          </a:solidFill>
+          <a:ln>
+            <a:noFill/>
+          </a:ln>
+        </p:spPr>
+        <p:style>
+          <a:lnRef idx="1">
+            <a:schemeClr val="accent1"/>
+          </a:lnRef>
+          <a:fillRef idx="3">
+            <a:schemeClr val="accent1"/>
+          </a:fillRef>
+          <a:effectRef idx="2">
+            <a:schemeClr val="accent1"/>
+          </a:effectRef>
+          <a:fontRef idx="minor">
+            <a:schemeClr val="lt1"/>
+          </a:fontRef>
+        </p:style>
+        <p:txBody>
+          <a:bodyPr rtlCol="0" anchor="ctr"/>
+          <a:lstStyle/>
+          <a:p>
+            <a:pPr algn="ctr"/>
+          </a:p>
+        </p:txBody>
+      </p:sp>
+      <p:sp>
+        <p:nvSpPr>
+          <p:cNvPr id="36" name="Rectangle 35"/>
+          <p:cNvSpPr/>
+          <p:nvPr/>
+        </p:nvSpPr>
+        <p:spPr>
+          <a:xfrm>
+            <a:off x="4640580" y="2250000"/>
+            <a:ext cx="2068830" cy="182880"/>
+          </a:xfrm>
+          <a:prstGeom prst="rect">
+            <a:avLst/>
+          </a:prstGeom>
+          <a:solidFill>
+            <a:srgbClr val="334155"/>
+          </a:solidFill>
+          <a:ln>
+            <a:noFill/>
+          </a:ln>
+        </p:spPr>
+        <p:style>
+          <a:lnRef idx="1">
+            <a:schemeClr val="accent1"/>
+          </a:lnRef>
+          <a:fillRef idx="3">
+            <a:schemeClr val="accent1"/>
+          </a:fillRef>
+          <a:effectRef idx="2">
+            <a:schemeClr val="accent1"/>
+          </a:effectRef>
+          <a:fontRef idx="minor">
+            <a:schemeClr val="lt1"/>
+          </a:fontRef>
+        </p:style>
+        <p:txBody>
+          <a:bodyPr rtlCol="0" anchor="ctr"/>
+          <a:lstStyle/>
+          <a:p>
+            <a:pPr algn="ctr"/>
+          </a:p>
+        </p:txBody>
+      </p:sp>
+      <p:sp>
+        <p:nvSpPr>
+          <p:cNvPr id="37" name="TextBox 36"/>
+          <p:cNvSpPr txBox="1"/>
+          <p:nvPr/>
+        </p:nvSpPr>
+        <p:spPr>
+          <a:xfrm>
+            <a:off x="4732020" y="2268000"/>
+            <a:ext cx="1885950" cy="150000"/>
+          </a:xfrm>
+          <a:prstGeom prst="rect">
+            <a:avLst/>
+          </a:prstGeom>
+          <a:noFill/>
+        </p:spPr>
+        <p:txBody>
+          <a:bodyPr wrap="square" lIns="0" rIns="0" tIns="0" bIns="0" anchor="t">
+            <a:spAutoFit/>
+          </a:bodyPr>
+          <a:lstStyle/>
+          <a:p>
+            <a:pPr algn="l"/>
+            <a:r>
+              <a:rPr sz="800" b="1" i="0">
+                <a:solidFill>
+                  <a:srgbClr val="F8FAFC"/>
+                </a:solidFill>
+                <a:latin typeface="Arial"/>
+              </a:rPr>
+              <a:t>TODO  /  Quick</a:t>
+            </a:r>
+          </a:p>
+        </p:txBody>
+      </p:sp>
+      <p:sp>
+        <p:nvSpPr>
+          <p:cNvPr id="38" name="Rectangle 37"/>
+          <p:cNvSpPr/>
+          <p:nvPr/>
+        </p:nvSpPr>
+        <p:spPr>
+          <a:xfrm>
+            <a:off x="4840580" y="2480000"/>
+            <a:ext cx="1668830" cy="1480000"/>
+          </a:xfrm>
+          <a:prstGeom prst="rect">
+            <a:avLst/>
+          </a:prstGeom>
+          <a:solidFill>
+            <a:srgbClr val="0F172A"/>
+          </a:solidFill>
+          <a:ln>
+            <a:solidFill>
+              <a:srgbClr val="334155"/>
+            </a:solidFill>
+          </a:ln>
+        </p:spPr>
+        <p:style>
+          <a:lnRef idx="1">
+            <a:schemeClr val="accent1"/>
+          </a:lnRef>
+          <a:fillRef idx="3">
+            <a:schemeClr val="accent1"/>
+          </a:fillRef>
+          <a:effectRef idx="2">
+            <a:schemeClr val="accent1"/>
+          </a:effectRef>
+          <a:fontRef idx="minor">
+            <a:schemeClr val="lt1"/>
+          </a:fontRef>
+        </p:style>
+        <p:txBody>
+          <a:bodyPr rtlCol="0" anchor="ctr"/>
+          <a:lstStyle/>
+          <a:p>
+            <a:pPr algn="ctr"/>
+          </a:p>
+        </p:txBody>
+      </p:sp>
+      <p:sp>
+        <p:nvSpPr>
+          <p:cNvPr id="39" name="Rectangle 38"/>
+          <p:cNvSpPr/>
+          <p:nvPr/>
+        </p:nvSpPr>
+        <p:spPr>
+          <a:xfrm>
+            <a:off x="4880580" y="2530000"/>
+            <a:ext cx="1588830" cy="256000"/>
+          </a:xfrm>
+          <a:prstGeom prst="rect">
+            <a:avLst/>
+          </a:prstGeom>
+          <a:solidFill>
+            <a:srgbClr val="1E293B"/>
+          </a:solidFill>
+          <a:ln>
+            <a:noFill/>
+          </a:ln>
+        </p:spPr>
+        <p:style>
+          <a:lnRef idx="1">
+            <a:schemeClr val="accent1"/>
+          </a:lnRef>
+          <a:fillRef idx="3">
+            <a:schemeClr val="accent1"/>
+          </a:fillRef>
+          <a:effectRef idx="2">
+            <a:schemeClr val="accent1"/>
+          </a:effectRef>
+          <a:fontRef idx="minor">
+            <a:schemeClr val="lt1"/>
+          </a:fontRef>
+        </p:style>
+        <p:txBody>
+          <a:bodyPr rtlCol="0" anchor="ctr"/>
+          <a:lstStyle/>
+          <a:p>
+            <a:pPr algn="ctr"/>
+          </a:p>
+        </p:txBody>
+      </p:sp>
+      <p:sp>
+        <p:nvSpPr>
+          <p:cNvPr id="40" name="Rectangle 39"/>
+          <p:cNvSpPr/>
+          <p:nvPr/>
+        </p:nvSpPr>
+        <p:spPr>
+          <a:xfrm>
+            <a:off x="4880580" y="2530000"/>
+            <a:ext cx="30000" cy="256000"/>
+          </a:xfrm>
+          <a:prstGeom prst="rect">
+            <a:avLst/>
+          </a:prstGeom>
+          <a:solidFill>
+            <a:srgbClr val="38BDF8"/>
+          </a:solidFill>
+          <a:ln>
+            <a:noFill/>
+          </a:ln>
+        </p:spPr>
+        <p:style>
+          <a:lnRef idx="1">
+            <a:schemeClr val="accent1"/>
+          </a:lnRef>
+          <a:fillRef idx="3">
+            <a:schemeClr val="accent1"/>
+          </a:fillRef>
+          <a:effectRef idx="2">
+            <a:schemeClr val="accent1"/>
+          </a:effectRef>
+          <a:fontRef idx="minor">
+            <a:schemeClr val="lt1"/>
+          </a:fontRef>
+        </p:style>
+        <p:txBody>
+          <a:bodyPr rtlCol="0" anchor="ctr"/>
+          <a:lstStyle/>
+          <a:p>
+            <a:pPr algn="ctr"/>
+          </a:p>
+        </p:txBody>
+      </p:sp>
+      <p:sp>
+        <p:nvSpPr>
+          <p:cNvPr id="41" name="TextBox 40"/>
+          <p:cNvSpPr txBox="1"/>
+          <p:nvPr/>
+        </p:nvSpPr>
+        <p:spPr>
+          <a:xfrm>
+            <a:off x="4935580" y="2530000"/>
+            <a:ext cx="1528830" cy="256000"/>
+          </a:xfrm>
+          <a:prstGeom prst="rect">
+            <a:avLst/>
+          </a:prstGeom>
+          <a:noFill/>
+        </p:spPr>
+        <p:txBody>
+          <a:bodyPr wrap="square" lIns="0" rIns="0" tIns="0" bIns="0" anchor="ctr">
+            <a:spAutoFit/>
+          </a:bodyPr>
+          <a:lstStyle/>
+          <a:p>
+            <a:pPr algn="l"/>
+            <a:r>
+              <a:rPr sz="700" b="0" i="0">
+                <a:solidFill>
+                  <a:srgbClr val="F8FAFC"/>
+                </a:solidFill>
+                <a:latin typeface="Arial"/>
+              </a:rPr>
+              <a:t>Buy groceries</a:t>
+            </a:r>
+          </a:p>
+        </p:txBody>
+      </p:sp>
+      <p:sp>
+        <p:nvSpPr>
+          <p:cNvPr id="42" name="Rectangle 41"/>
+          <p:cNvSpPr/>
+          <p:nvPr/>
+        </p:nvSpPr>
+        <p:spPr>
+          <a:xfrm>
+            <a:off x="4880580" y="2811000"/>
+            <a:ext cx="1588830" cy="256000"/>
+          </a:xfrm>
+          <a:prstGeom prst="rect">
+            <a:avLst/>
+          </a:prstGeom>
+          <a:solidFill>
+            <a:srgbClr val="1E293B"/>
+          </a:solidFill>
+          <a:ln>
+            <a:noFill/>
+          </a:ln>
+        </p:spPr>
+        <p:style>
+          <a:lnRef idx="1">
+            <a:schemeClr val="accent1"/>
+          </a:lnRef>
+          <a:fillRef idx="3">
+            <a:schemeClr val="accent1"/>
+          </a:fillRef>
+          <a:effectRef idx="2">
+            <a:schemeClr val="accent1"/>
+          </a:effectRef>
+          <a:fontRef idx="minor">
+            <a:schemeClr val="lt1"/>
+          </a:fontRef>
+        </p:style>
+        <p:txBody>
+          <a:bodyPr rtlCol="0" anchor="ctr"/>
+          <a:lstStyle/>
+          <a:p>
+            <a:pPr algn="ctr"/>
+          </a:p>
+        </p:txBody>
+      </p:sp>
+      <p:sp>
+        <p:nvSpPr>
+          <p:cNvPr id="43" name="Rectangle 42"/>
+          <p:cNvSpPr/>
+          <p:nvPr/>
+        </p:nvSpPr>
+        <p:spPr>
+          <a:xfrm>
+            <a:off x="4880580" y="2811000"/>
+            <a:ext cx="30000" cy="256000"/>
+          </a:xfrm>
+          <a:prstGeom prst="rect">
+            <a:avLst/>
+          </a:prstGeom>
+          <a:solidFill>
+            <a:srgbClr val="F472B6"/>
+          </a:solidFill>
+          <a:ln>
+            <a:noFill/>
+          </a:ln>
+        </p:spPr>
+        <p:style>
+          <a:lnRef idx="1">
+            <a:schemeClr val="accent1"/>
+          </a:lnRef>
+          <a:fillRef idx="3">
+            <a:schemeClr val="accent1"/>
+          </a:fillRef>
+          <a:effectRef idx="2">
+            <a:schemeClr val="accent1"/>
+          </a:effectRef>
+          <a:fontRef idx="minor">
+            <a:schemeClr val="lt1"/>
+          </a:fontRef>
+        </p:style>
+        <p:txBody>
+          <a:bodyPr rtlCol="0" anchor="ctr"/>
+          <a:lstStyle/>
+          <a:p>
+            <a:pPr algn="ctr"/>
+          </a:p>
+        </p:txBody>
+      </p:sp>
+      <p:sp>
+        <p:nvSpPr>
+          <p:cNvPr id="44" name="TextBox 43"/>
+          <p:cNvSpPr txBox="1"/>
+          <p:nvPr/>
+        </p:nvSpPr>
+        <p:spPr>
+          <a:xfrm>
+            <a:off x="4935580" y="2811000"/>
+            <a:ext cx="1528830" cy="256000"/>
+          </a:xfrm>
+          <a:prstGeom prst="rect">
+            <a:avLst/>
+          </a:prstGeom>
+          <a:noFill/>
+        </p:spPr>
+        <p:txBody>
+          <a:bodyPr wrap="square" lIns="0" rIns="0" tIns="0" bIns="0" anchor="ctr">
+            <a:spAutoFit/>
+          </a:bodyPr>
+          <a:lstStyle/>
+          <a:p>
+            <a:pPr algn="l"/>
+            <a:r>
+              <a:rPr sz="700" b="0" i="0">
+                <a:solidFill>
+                  <a:srgbClr val="F8FAFC"/>
+                </a:solidFill>
+                <a:latin typeface="Arial"/>
+              </a:rPr>
+              <a:t>Call mom</a:t>
+            </a:r>
+          </a:p>
+        </p:txBody>
+      </p:sp>
+      <p:sp>
+        <p:nvSpPr>
+          <p:cNvPr id="45" name="Rectangle 44"/>
+          <p:cNvSpPr/>
+          <p:nvPr/>
+        </p:nvSpPr>
+        <p:spPr>
+          <a:xfrm>
+            <a:off x="4880580" y="3092000"/>
+            <a:ext cx="1588830" cy="256000"/>
+          </a:xfrm>
+          <a:prstGeom prst="rect">
+            <a:avLst/>
+          </a:prstGeom>
+          <a:solidFill>
+            <a:srgbClr val="1E293B"/>
+          </a:solidFill>
+          <a:ln>
+            <a:noFill/>
+          </a:ln>
+        </p:spPr>
+        <p:style>
+          <a:lnRef idx="1">
+            <a:schemeClr val="accent1"/>
+          </a:lnRef>
+          <a:fillRef idx="3">
+            <a:schemeClr val="accent1"/>
+          </a:fillRef>
+          <a:effectRef idx="2">
+            <a:schemeClr val="accent1"/>
+          </a:effectRef>
+          <a:fontRef idx="minor">
+            <a:schemeClr val="lt1"/>
+          </a:fontRef>
+        </p:style>
+        <p:txBody>
+          <a:bodyPr rtlCol="0" anchor="ctr"/>
+          <a:lstStyle/>
+          <a:p>
+            <a:pPr algn="ctr"/>
+          </a:p>
+        </p:txBody>
+      </p:sp>
+      <p:sp>
+        <p:nvSpPr>
+          <p:cNvPr id="46" name="Rectangle 45"/>
+          <p:cNvSpPr/>
+          <p:nvPr/>
+        </p:nvSpPr>
+        <p:spPr>
+          <a:xfrm>
+            <a:off x="4880580" y="3092000"/>
+            <a:ext cx="30000" cy="256000"/>
+          </a:xfrm>
+          <a:prstGeom prst="rect">
+            <a:avLst/>
+          </a:prstGeom>
+          <a:solidFill>
+            <a:srgbClr val="34D399"/>
+          </a:solidFill>
+          <a:ln>
+            <a:noFill/>
+          </a:ln>
+        </p:spPr>
+        <p:style>
+          <a:lnRef idx="1">
+            <a:schemeClr val="accent1"/>
+          </a:lnRef>
+          <a:fillRef idx="3">
+            <a:schemeClr val="accent1"/>
+          </a:fillRef>
+          <a:effectRef idx="2">
+            <a:schemeClr val="accent1"/>
+          </a:effectRef>
+          <a:fontRef idx="minor">
+            <a:schemeClr val="lt1"/>
+          </a:fontRef>
+        </p:style>
+        <p:txBody>
+          <a:bodyPr rtlCol="0" anchor="ctr"/>
+          <a:lstStyle/>
+          <a:p>
+            <a:pPr algn="ctr"/>
+          </a:p>
+        </p:txBody>
+      </p:sp>
+      <p:sp>
+        <p:nvSpPr>
+          <p:cNvPr id="47" name="TextBox 46"/>
+          <p:cNvSpPr txBox="1"/>
+          <p:nvPr/>
+        </p:nvSpPr>
+        <p:spPr>
+          <a:xfrm>
+            <a:off x="4935580" y="3092000"/>
+            <a:ext cx="1528830" cy="256000"/>
+          </a:xfrm>
+          <a:prstGeom prst="rect">
+            <a:avLst/>
+          </a:prstGeom>
+          <a:noFill/>
+        </p:spPr>
+        <p:txBody>
+          <a:bodyPr wrap="square" lIns="0" rIns="0" tIns="0" bIns="0" anchor="ctr">
+            <a:spAutoFit/>
+          </a:bodyPr>
+          <a:lstStyle/>
+          <a:p>
+            <a:pPr algn="l"/>
+            <a:r>
+              <a:rPr sz="700" b="0" i="0">
+                <a:solidFill>
+                  <a:srgbClr val="F8FAFC"/>
+                </a:solidFill>
+                <a:latin typeface="Arial"/>
+              </a:rPr>
+              <a:t>Gym @6pm</a:t>
+            </a:r>
+          </a:p>
+        </p:txBody>
+      </p:sp>
+      <p:sp>
+        <p:nvSpPr>
+          <p:cNvPr id="48" name="Rectangle 47"/>
+          <p:cNvSpPr/>
+          <p:nvPr/>
+        </p:nvSpPr>
+        <p:spPr>
+          <a:xfrm>
+            <a:off x="4880580" y="3373000"/>
+            <a:ext cx="1588830" cy="256000"/>
+          </a:xfrm>
+          <a:prstGeom prst="rect">
+            <a:avLst/>
+          </a:prstGeom>
+          <a:solidFill>
+            <a:srgbClr val="1E293B"/>
+          </a:solidFill>
+          <a:ln>
+            <a:noFill/>
+          </a:ln>
+        </p:spPr>
+        <p:style>
+          <a:lnRef idx="1">
+            <a:schemeClr val="accent1"/>
+          </a:lnRef>
+          <a:fillRef idx="3">
+            <a:schemeClr val="accent1"/>
+          </a:fillRef>
+          <a:effectRef idx="2">
+            <a:schemeClr val="accent1"/>
+          </a:effectRef>
+          <a:fontRef idx="minor">
+            <a:schemeClr val="lt1"/>
+          </a:fontRef>
+        </p:style>
+        <p:txBody>
+          <a:bodyPr rtlCol="0" anchor="ctr"/>
+          <a:lstStyle/>
+          <a:p>
+            <a:pPr algn="ctr"/>
+          </a:p>
+        </p:txBody>
+      </p:sp>
+      <p:sp>
+        <p:nvSpPr>
+          <p:cNvPr id="49" name="Rectangle 48"/>
+          <p:cNvSpPr/>
+          <p:nvPr/>
+        </p:nvSpPr>
+        <p:spPr>
+          <a:xfrm>
+            <a:off x="4880580" y="3373000"/>
+            <a:ext cx="30000" cy="256000"/>
+          </a:xfrm>
+          <a:prstGeom prst="rect">
+            <a:avLst/>
+          </a:prstGeom>
+          <a:solidFill>
+            <a:srgbClr val="FB923C"/>
+          </a:solidFill>
+          <a:ln>
+            <a:noFill/>
+          </a:ln>
+        </p:spPr>
+        <p:style>
+          <a:lnRef idx="1">
+            <a:schemeClr val="accent1"/>
+          </a:lnRef>
+          <a:fillRef idx="3">
+            <a:schemeClr val="accent1"/>
+          </a:fillRef>
+          <a:effectRef idx="2">
+            <a:schemeClr val="accent1"/>
+          </a:effectRef>
+          <a:fontRef idx="minor">
+            <a:schemeClr val="lt1"/>
+          </a:fontRef>
+        </p:style>
+        <p:txBody>
+          <a:bodyPr rtlCol="0" anchor="ctr"/>
+          <a:lstStyle/>
+          <a:p>
+            <a:pPr algn="ctr"/>
+          </a:p>
+        </p:txBody>
+      </p:sp>
+      <p:sp>
+        <p:nvSpPr>
+          <p:cNvPr id="50" name="TextBox 49"/>
+          <p:cNvSpPr txBox="1"/>
+          <p:nvPr/>
+        </p:nvSpPr>
+        <p:spPr>
+          <a:xfrm>
+            <a:off x="4935580" y="3373000"/>
+            <a:ext cx="1528830" cy="256000"/>
+          </a:xfrm>
+          <a:prstGeom prst="rect">
+            <a:avLst/>
+          </a:prstGeom>
+          <a:noFill/>
+        </p:spPr>
+        <p:txBody>
+          <a:bodyPr wrap="square" lIns="0" rIns="0" tIns="0" bIns="0" anchor="ctr">
+            <a:spAutoFit/>
+          </a:bodyPr>
+          <a:lstStyle/>
+          <a:p>
+            <a:pPr algn="l"/>
+            <a:r>
+              <a:rPr sz="700" b="0" i="0">
+                <a:solidFill>
+                  <a:srgbClr val="F8FAFC"/>
+                </a:solidFill>
+                <a:latin typeface="Arial"/>
+              </a:rPr>
+              <a:t>Fix sink</a:t>
+            </a:r>
+          </a:p>
+        </p:txBody>
+      </p:sp>
+      <p:sp>
+        <p:nvSpPr>
+          <p:cNvPr id="51" name="Rectangle 50"/>
+          <p:cNvSpPr/>
+          <p:nvPr/>
+        </p:nvSpPr>
+        <p:spPr>
+          <a:xfrm>
+            <a:off x="4880580" y="3654000"/>
+            <a:ext cx="1588830" cy="256000"/>
+          </a:xfrm>
+          <a:prstGeom prst="rect">
+            <a:avLst/>
+          </a:prstGeom>
+          <a:solidFill>
+            <a:srgbClr val="1E293B"/>
+          </a:solidFill>
+          <a:ln>
+            <a:noFill/>
+          </a:ln>
+        </p:spPr>
+        <p:style>
+          <a:lnRef idx="1">
+            <a:schemeClr val="accent1"/>
+          </a:lnRef>
+          <a:fillRef idx="3">
+            <a:schemeClr val="accent1"/>
+          </a:fillRef>
+          <a:effectRef idx="2">
+            <a:schemeClr val="accent1"/>
+          </a:effectRef>
+          <a:fontRef idx="minor">
+            <a:schemeClr val="lt1"/>
+          </a:fontRef>
+        </p:style>
+        <p:txBody>
+          <a:bodyPr rtlCol="0" anchor="ctr"/>
+          <a:lstStyle/>
+          <a:p>
+            <a:pPr algn="ctr"/>
+          </a:p>
+        </p:txBody>
+      </p:sp>
+      <p:sp>
+        <p:nvSpPr>
+          <p:cNvPr id="52" name="Rectangle 51"/>
+          <p:cNvSpPr/>
+          <p:nvPr/>
+        </p:nvSpPr>
+        <p:spPr>
+          <a:xfrm>
+            <a:off x="4880580" y="3654000"/>
+            <a:ext cx="30000" cy="256000"/>
+          </a:xfrm>
+          <a:prstGeom prst="rect">
+            <a:avLst/>
+          </a:prstGeom>
+          <a:solidFill>
+            <a:srgbClr val="A78BFA"/>
+          </a:solidFill>
+          <a:ln>
+            <a:noFill/>
+          </a:ln>
+        </p:spPr>
+        <p:style>
+          <a:lnRef idx="1">
+            <a:schemeClr val="accent1"/>
+          </a:lnRef>
+          <a:fillRef idx="3">
+            <a:schemeClr val="accent1"/>
+          </a:fillRef>
+          <a:effectRef idx="2">
+            <a:schemeClr val="accent1"/>
+          </a:effectRef>
+          <a:fontRef idx="minor">
+            <a:schemeClr val="lt1"/>
+          </a:fontRef>
+        </p:style>
+        <p:txBody>
+          <a:bodyPr rtlCol="0" anchor="ctr"/>
+          <a:lstStyle/>
+          <a:p>
+            <a:pPr algn="ctr"/>
+          </a:p>
+        </p:txBody>
+      </p:sp>
+      <p:sp>
+        <p:nvSpPr>
+          <p:cNvPr id="53" name="TextBox 52"/>
+          <p:cNvSpPr txBox="1"/>
+          <p:nvPr/>
+        </p:nvSpPr>
+        <p:spPr>
+          <a:xfrm>
+            <a:off x="4935580" y="3654000"/>
+            <a:ext cx="1528830" cy="256000"/>
+          </a:xfrm>
+          <a:prstGeom prst="rect">
+            <a:avLst/>
+          </a:prstGeom>
+          <a:noFill/>
+        </p:spPr>
+        <p:txBody>
+          <a:bodyPr wrap="square" lIns="0" rIns="0" tIns="0" bIns="0" anchor="ctr">
+            <a:spAutoFit/>
+          </a:bodyPr>
+          <a:lstStyle/>
+          <a:p>
+            <a:pPr algn="l"/>
+            <a:r>
+              <a:rPr sz="700" b="0" i="0">
+                <a:solidFill>
+                  <a:srgbClr val="F8FAFC"/>
+                </a:solidFill>
+                <a:latin typeface="Arial"/>
+              </a:rPr>
+              <a:t>Read 20p</a:t>
+            </a:r>
+          </a:p>
+        </p:txBody>
+      </p:sp>
+      <p:sp>
+        <p:nvSpPr>
+          <p:cNvPr id="54" name="TextBox 53"/>
+          <p:cNvSpPr txBox="1"/>
+          <p:nvPr/>
+        </p:nvSpPr>
+        <p:spPr>
+          <a:xfrm>
+            <a:off x="4640580" y="4055720"/>
+            <a:ext cx="2068830" cy="160000"/>
+          </a:xfrm>
+          <a:prstGeom prst="rect">
+            <a:avLst/>
+          </a:prstGeom>
+          <a:noFill/>
+        </p:spPr>
+        <p:txBody>
+          <a:bodyPr wrap="square" lIns="0" rIns="0" tIns="0" bIns="0" anchor="t">
+            <a:spAutoFit/>
+          </a:bodyPr>
+          <a:lstStyle/>
+          <a:p>
+            <a:pPr algn="ctr"/>
+            <a:r>
+              <a:rPr sz="1000" b="1" i="0">
+                <a:solidFill>
+                  <a:srgbClr val="38BDF8"/>
+                </a:solidFill>
+                <a:latin typeface="Arial"/>
+              </a:rPr>
+              <a:t>Quick list</a:t>
+            </a:r>
+          </a:p>
+        </p:txBody>
+      </p:sp>
+      <p:sp>
+        <p:nvSpPr>
+          <p:cNvPr id="55" name="TextBox 54"/>
+          <p:cNvSpPr txBox="1"/>
+          <p:nvPr/>
+        </p:nvSpPr>
+        <p:spPr>
+          <a:xfrm>
+            <a:off x="4640580" y="4205720"/>
+            <a:ext cx="2068830" cy="140000"/>
+          </a:xfrm>
+          <a:prstGeom prst="rect">
+            <a:avLst/>
+          </a:prstGeom>
+          <a:noFill/>
+        </p:spPr>
+        <p:txBody>
+          <a:bodyPr wrap="square" lIns="0" rIns="0" tIns="0" bIns="0" anchor="t">
+            <a:spAutoFit/>
+          </a:bodyPr>
+          <a:lstStyle/>
+          <a:p>
+            <a:pPr algn="ctr"/>
+            <a:r>
+              <a:rPr sz="800" b="0" i="0">
+                <a:solidFill>
+                  <a:srgbClr val="94A3B8"/>
+                </a:solidFill>
+                <a:latin typeface="Arial"/>
+              </a:rPr>
+              <a:t>Mobile swipe</a:t>
+            </a:r>
+          </a:p>
+        </p:txBody>
+      </p:sp>
+      <p:sp>
+        <p:nvSpPr>
+          <p:cNvPr id="56" name="Rectangle 55"/>
+          <p:cNvSpPr/>
+          <p:nvPr/>
+        </p:nvSpPr>
+        <p:spPr>
+          <a:xfrm>
+            <a:off x="6846570" y="2250000"/>
+            <a:ext cx="2068830" cy="1760000"/>
+          </a:xfrm>
+          <a:prstGeom prst="rect">
+            <a:avLst/>
+          </a:prstGeom>
+          <a:solidFill>
+            <a:srgbClr val="0F1C2C"/>
+          </a:solidFill>
+          <a:ln>
+            <a:noFill/>
+          </a:ln>
+        </p:spPr>
+        <p:style>
+          <a:lnRef idx="1">
+            <a:schemeClr val="accent1"/>
+          </a:lnRef>
+          <a:fillRef idx="3">
+            <a:schemeClr val="accent1"/>
+          </a:fillRef>
+          <a:effectRef idx="2">
+            <a:schemeClr val="accent1"/>
+          </a:effectRef>
+          <a:fontRef idx="minor">
+            <a:schemeClr val="lt1"/>
+          </a:fontRef>
+        </p:style>
+        <p:txBody>
+          <a:bodyPr rtlCol="0" anchor="ctr"/>
+          <a:lstStyle/>
+          <a:p>
+            <a:pPr algn="ctr"/>
+          </a:p>
+        </p:txBody>
+      </p:sp>
+      <p:sp>
+        <p:nvSpPr>
+          <p:cNvPr id="57" name="Rectangle 56"/>
+          <p:cNvSpPr/>
+          <p:nvPr/>
+        </p:nvSpPr>
+        <p:spPr>
+          <a:xfrm>
+            <a:off x="6846570" y="2250000"/>
+            <a:ext cx="2068830" cy="182880"/>
+          </a:xfrm>
+          <a:prstGeom prst="rect">
+            <a:avLst/>
+          </a:prstGeom>
+          <a:solidFill>
+            <a:srgbClr val="334155"/>
+          </a:solidFill>
+          <a:ln>
+            <a:noFill/>
+          </a:ln>
+        </p:spPr>
+        <p:style>
+          <a:lnRef idx="1">
+            <a:schemeClr val="accent1"/>
+          </a:lnRef>
+          <a:fillRef idx="3">
+            <a:schemeClr val="accent1"/>
+          </a:fillRef>
+          <a:effectRef idx="2">
+            <a:schemeClr val="accent1"/>
+          </a:effectRef>
+          <a:fontRef idx="minor">
+            <a:schemeClr val="lt1"/>
+          </a:fontRef>
+        </p:style>
+        <p:txBody>
+          <a:bodyPr rtlCol="0" anchor="ctr"/>
+          <a:lstStyle/>
+          <a:p>
+            <a:pPr algn="ctr"/>
+          </a:p>
+        </p:txBody>
+      </p:sp>
+      <p:sp>
+        <p:nvSpPr>
+          <p:cNvPr id="58" name="TextBox 57"/>
+          <p:cNvSpPr txBox="1"/>
+          <p:nvPr/>
+        </p:nvSpPr>
+        <p:spPr>
+          <a:xfrm>
+            <a:off x="6938010" y="2268000"/>
+            <a:ext cx="1885950" cy="150000"/>
+          </a:xfrm>
+          <a:prstGeom prst="rect">
+            <a:avLst/>
+          </a:prstGeom>
+          <a:noFill/>
+        </p:spPr>
+        <p:txBody>
+          <a:bodyPr wrap="square" lIns="0" rIns="0" tIns="0" bIns="0" anchor="t">
+            <a:spAutoFit/>
+          </a:bodyPr>
+          <a:lstStyle/>
+          <a:p>
+            <a:pPr algn="l"/>
+            <a:r>
+              <a:rPr sz="800" b="1" i="0">
+                <a:solidFill>
+                  <a:srgbClr val="F8FAFC"/>
+                </a:solidFill>
+                <a:latin typeface="Arial"/>
+              </a:rPr>
+              <a:t>TODO  /  Team</a:t>
+            </a:r>
+          </a:p>
+        </p:txBody>
+      </p:sp>
+      <p:sp>
+        <p:nvSpPr>
+          <p:cNvPr id="59" name="Rectangle 58"/>
+          <p:cNvSpPr/>
+          <p:nvPr/>
+        </p:nvSpPr>
+        <p:spPr>
+          <a:xfrm>
+            <a:off x="6938010" y="2480000"/>
+            <a:ext cx="1885950" cy="140000"/>
+          </a:xfrm>
+          <a:prstGeom prst="rect">
+            <a:avLst/>
+          </a:prstGeom>
+          <a:solidFill>
+            <a:srgbClr val="0F172A"/>
+          </a:solidFill>
+          <a:ln>
+            <a:noFill/>
+          </a:ln>
+        </p:spPr>
+        <p:style>
+          <a:lnRef idx="1">
+            <a:schemeClr val="accent1"/>
+          </a:lnRef>
+          <a:fillRef idx="3">
+            <a:schemeClr val="accent1"/>
+          </a:fillRef>
+          <a:effectRef idx="2">
+            <a:schemeClr val="accent1"/>
+          </a:effectRef>
+          <a:fontRef idx="minor">
+            <a:schemeClr val="lt1"/>
+          </a:fontRef>
+        </p:style>
+        <p:txBody>
+          <a:bodyPr rtlCol="0" anchor="ctr"/>
+          <a:lstStyle/>
+          <a:p>
+            <a:pPr algn="ctr"/>
+          </a:p>
+        </p:txBody>
+      </p:sp>
+      <p:sp>
+        <p:nvSpPr>
+          <p:cNvPr id="60" name="Oval 59"/>
+          <p:cNvSpPr/>
+          <p:nvPr/>
+        </p:nvSpPr>
+        <p:spPr>
+          <a:xfrm>
+            <a:off x="6981570" y="2500000"/>
+            <a:ext cx="100000" cy="100000"/>
+          </a:xfrm>
+          <a:prstGeom prst="ellipse">
+            <a:avLst/>
+          </a:prstGeom>
+          <a:solidFill>
+            <a:srgbClr val="A78BFA"/>
+          </a:solidFill>
+          <a:ln>
+            <a:noFill/>
+          </a:ln>
+        </p:spPr>
+        <p:style>
+          <a:lnRef idx="1">
+            <a:schemeClr val="accent1"/>
+          </a:lnRef>
+          <a:fillRef idx="3">
+            <a:schemeClr val="accent1"/>
+          </a:fillRef>
+          <a:effectRef idx="2">
+            <a:schemeClr val="accent1"/>
+          </a:effectRef>
+          <a:fontRef idx="minor">
+            <a:schemeClr val="lt1"/>
+          </a:fontRef>
+        </p:style>
+        <p:txBody>
+          <a:bodyPr rtlCol="0" anchor="ctr"/>
+          <a:lstStyle/>
+          <a:p>
+            <a:pPr algn="ctr"/>
+          </a:p>
+        </p:txBody>
+      </p:sp>
+      <p:sp>
+        <p:nvSpPr>
+          <p:cNvPr id="61" name="TextBox 60"/>
+          <p:cNvSpPr txBox="1"/>
+          <p:nvPr/>
+        </p:nvSpPr>
+        <p:spPr>
+          <a:xfrm>
+            <a:off x="6981570" y="2500000"/>
+            <a:ext cx="100000" cy="100000"/>
+          </a:xfrm>
+          <a:prstGeom prst="rect">
+            <a:avLst/>
+          </a:prstGeom>
+          <a:noFill/>
+        </p:spPr>
+        <p:txBody>
+          <a:bodyPr wrap="square" lIns="0" rIns="0" tIns="0" bIns="0" anchor="ctr">
+            <a:spAutoFit/>
+          </a:bodyPr>
+          <a:lstStyle/>
+          <a:p>
+            <a:pPr algn="ctr"/>
+            <a:r>
+              <a:rPr sz="500" b="1" i="0">
+                <a:solidFill>
+                  <a:srgbClr val="F8FAFC"/>
+                </a:solidFill>
+                <a:latin typeface="Arial"/>
+              </a:rPr>
+              <a:t>JS</a:t>
+            </a:r>
+          </a:p>
+        </p:txBody>
+      </p:sp>
+      <p:sp>
+        <p:nvSpPr>
+          <p:cNvPr id="62" name="TextBox 61"/>
+          <p:cNvSpPr txBox="1"/>
+          <p:nvPr/>
+        </p:nvSpPr>
+        <p:spPr>
+          <a:xfrm>
+            <a:off x="7111570" y="2480000"/>
+            <a:ext cx="100000" cy="140000"/>
+          </a:xfrm>
+          <a:prstGeom prst="rect">
+            <a:avLst/>
+          </a:prstGeom>
+          <a:noFill/>
+        </p:spPr>
+        <p:txBody>
+          <a:bodyPr wrap="square" lIns="0" rIns="0" tIns="0" bIns="0" anchor="ctr">
+            <a:spAutoFit/>
+          </a:bodyPr>
+          <a:lstStyle/>
+          <a:p>
+            <a:pPr algn="l"/>
+            <a:r>
+              <a:rPr sz="800" b="0" i="0">
+                <a:solidFill>
+                  <a:srgbClr val="34D399"/>
+                </a:solidFill>
+                <a:latin typeface="Arial"/>
+              </a:rPr>
+              <a:t>☑</a:t>
+            </a:r>
+          </a:p>
+        </p:txBody>
+      </p:sp>
+      <p:sp>
+        <p:nvSpPr>
+          <p:cNvPr id="63" name="TextBox 62"/>
+          <p:cNvSpPr txBox="1"/>
+          <p:nvPr/>
+        </p:nvSpPr>
+        <p:spPr>
+          <a:xfrm>
+            <a:off x="7211570" y="2480000"/>
+            <a:ext cx="1608830" cy="140000"/>
+          </a:xfrm>
+          <a:prstGeom prst="rect">
+            <a:avLst/>
+          </a:prstGeom>
+          <a:noFill/>
+        </p:spPr>
+        <p:txBody>
+          <a:bodyPr wrap="square" lIns="0" rIns="0" tIns="0" bIns="0" anchor="ctr">
+            <a:spAutoFit/>
+          </a:bodyPr>
+          <a:lstStyle/>
+          <a:p>
+            <a:pPr algn="l"/>
+            <a:r>
+              <a:rPr sz="700" b="0" i="0">
+                <a:solidFill>
+                  <a:srgbClr val="64748B"/>
+                </a:solidFill>
+                <a:latin typeface="Arial"/>
+              </a:rPr>
+              <a:t>Deploy v2</a:t>
+            </a:r>
+          </a:p>
+        </p:txBody>
+      </p:sp>
+      <p:sp>
+        <p:nvSpPr>
+          <p:cNvPr id="64" name="Rectangle 63"/>
+          <p:cNvSpPr/>
+          <p:nvPr/>
+        </p:nvSpPr>
+        <p:spPr>
+          <a:xfrm>
+            <a:off x="6938010" y="2640000"/>
+            <a:ext cx="1885950" cy="140000"/>
+          </a:xfrm>
+          <a:prstGeom prst="rect">
+            <a:avLst/>
+          </a:prstGeom>
+          <a:solidFill>
+            <a:srgbClr val="0F172A"/>
+          </a:solidFill>
+          <a:ln>
+            <a:noFill/>
+          </a:ln>
+        </p:spPr>
+        <p:style>
+          <a:lnRef idx="1">
+            <a:schemeClr val="accent1"/>
+          </a:lnRef>
+          <a:fillRef idx="3">
+            <a:schemeClr val="accent1"/>
+          </a:fillRef>
+          <a:effectRef idx="2">
+            <a:schemeClr val="accent1"/>
+          </a:effectRef>
+          <a:fontRef idx="minor">
+            <a:schemeClr val="lt1"/>
+          </a:fontRef>
+        </p:style>
+        <p:txBody>
+          <a:bodyPr rtlCol="0" anchor="ctr"/>
+          <a:lstStyle/>
+          <a:p>
+            <a:pPr algn="ctr"/>
+          </a:p>
+        </p:txBody>
+      </p:sp>
+      <p:sp>
+        <p:nvSpPr>
+          <p:cNvPr id="65" name="Oval 64"/>
+          <p:cNvSpPr/>
+          <p:nvPr/>
+        </p:nvSpPr>
+        <p:spPr>
+          <a:xfrm>
+            <a:off x="6981570" y="2660000"/>
+            <a:ext cx="100000" cy="100000"/>
+          </a:xfrm>
+          <a:prstGeom prst="ellipse">
+            <a:avLst/>
+          </a:prstGeom>
+          <a:solidFill>
+            <a:srgbClr val="FB923C"/>
+          </a:solidFill>
+          <a:ln>
+            <a:noFill/>
+          </a:ln>
+        </p:spPr>
+        <p:style>
+          <a:lnRef idx="1">
+            <a:schemeClr val="accent1"/>
+          </a:lnRef>
+          <a:fillRef idx="3">
+            <a:schemeClr val="accent1"/>
+          </a:fillRef>
+          <a:effectRef idx="2">
+            <a:schemeClr val="accent1"/>
+          </a:effectRef>
+          <a:fontRef idx="minor">
+            <a:schemeClr val="lt1"/>
+          </a:fontRef>
+        </p:style>
+        <p:txBody>
+          <a:bodyPr rtlCol="0" anchor="ctr"/>
+          <a:lstStyle/>
+          <a:p>
+            <a:pPr algn="ctr"/>
+          </a:p>
+        </p:txBody>
+      </p:sp>
+      <p:sp>
+        <p:nvSpPr>
+          <p:cNvPr id="66" name="TextBox 65"/>
+          <p:cNvSpPr txBox="1"/>
+          <p:nvPr/>
+        </p:nvSpPr>
+        <p:spPr>
+          <a:xfrm>
+            <a:off x="6981570" y="2660000"/>
+            <a:ext cx="100000" cy="100000"/>
+          </a:xfrm>
+          <a:prstGeom prst="rect">
+            <a:avLst/>
+          </a:prstGeom>
+          <a:noFill/>
+        </p:spPr>
+        <p:txBody>
+          <a:bodyPr wrap="square" lIns="0" rIns="0" tIns="0" bIns="0" anchor="ctr">
+            <a:spAutoFit/>
+          </a:bodyPr>
+          <a:lstStyle/>
+          <a:p>
+            <a:pPr algn="ctr"/>
+            <a:r>
+              <a:rPr sz="500" b="1" i="0">
+                <a:solidFill>
+                  <a:srgbClr val="F8FAFC"/>
+                </a:solidFill>
+                <a:latin typeface="Arial"/>
+              </a:rPr>
+              <a:t>AK</a:t>
+            </a:r>
+          </a:p>
+        </p:txBody>
+      </p:sp>
+      <p:sp>
+        <p:nvSpPr>
+          <p:cNvPr id="67" name="TextBox 66"/>
+          <p:cNvSpPr txBox="1"/>
+          <p:nvPr/>
+        </p:nvSpPr>
+        <p:spPr>
+          <a:xfrm>
+            <a:off x="7111570" y="2640000"/>
+            <a:ext cx="100000" cy="140000"/>
+          </a:xfrm>
+          <a:prstGeom prst="rect">
+            <a:avLst/>
+          </a:prstGeom>
+          <a:noFill/>
+        </p:spPr>
+        <p:txBody>
+          <a:bodyPr wrap="square" lIns="0" rIns="0" tIns="0" bIns="0" anchor="ctr">
+            <a:spAutoFit/>
+          </a:bodyPr>
+          <a:lstStyle/>
+          <a:p>
+            <a:pPr algn="l"/>
+            <a:r>
+              <a:rPr sz="800" b="0" i="0">
+                <a:solidFill>
+                  <a:srgbClr val="94A3B8"/>
+                </a:solidFill>
+                <a:latin typeface="Arial"/>
+              </a:rPr>
+              <a:t>☐</a:t>
+            </a:r>
+          </a:p>
+        </p:txBody>
+      </p:sp>
+      <p:sp>
+        <p:nvSpPr>
+          <p:cNvPr id="68" name="TextBox 67"/>
+          <p:cNvSpPr txBox="1"/>
+          <p:nvPr/>
+        </p:nvSpPr>
+        <p:spPr>
+          <a:xfrm>
+            <a:off x="7211570" y="2640000"/>
+            <a:ext cx="1608830" cy="140000"/>
+          </a:xfrm>
+          <a:prstGeom prst="rect">
+            <a:avLst/>
+          </a:prstGeom>
+          <a:noFill/>
+        </p:spPr>
+        <p:txBody>
+          <a:bodyPr wrap="square" lIns="0" rIns="0" tIns="0" bIns="0" anchor="ctr">
+            <a:spAutoFit/>
+          </a:bodyPr>
+          <a:lstStyle/>
+          <a:p>
+            <a:pPr algn="l"/>
+            <a:r>
+              <a:rPr sz="700" b="0" i="0">
+                <a:solidFill>
+                  <a:srgbClr val="F8FAFC"/>
+                </a:solidFill>
+                <a:latin typeface="Arial"/>
+              </a:rPr>
+              <a:t>Review PR #42</a:t>
+            </a:r>
+          </a:p>
+        </p:txBody>
+      </p:sp>
+      <p:sp>
+        <p:nvSpPr>
+          <p:cNvPr id="69" name="Rectangle 68"/>
+          <p:cNvSpPr/>
+          <p:nvPr/>
+        </p:nvSpPr>
+        <p:spPr>
+          <a:xfrm>
+            <a:off x="6938010" y="2800000"/>
+            <a:ext cx="1885950" cy="140000"/>
+          </a:xfrm>
+          <a:prstGeom prst="rect">
+            <a:avLst/>
+          </a:prstGeom>
+          <a:solidFill>
+            <a:srgbClr val="0F172A"/>
+          </a:solidFill>
+          <a:ln>
+            <a:noFill/>
+          </a:ln>
+        </p:spPr>
+        <p:style>
+          <a:lnRef idx="1">
+            <a:schemeClr val="accent1"/>
+          </a:lnRef>
+          <a:fillRef idx="3">
+            <a:schemeClr val="accent1"/>
+          </a:fillRef>
+          <a:effectRef idx="2">
+            <a:schemeClr val="accent1"/>
+          </a:effectRef>
+          <a:fontRef idx="minor">
+            <a:schemeClr val="lt1"/>
+          </a:fontRef>
+        </p:style>
+        <p:txBody>
+          <a:bodyPr rtlCol="0" anchor="ctr"/>
+          <a:lstStyle/>
+          <a:p>
+            <a:pPr algn="ctr"/>
+          </a:p>
+        </p:txBody>
+      </p:sp>
+      <p:sp>
+        <p:nvSpPr>
+          <p:cNvPr id="70" name="Oval 69"/>
+          <p:cNvSpPr/>
+          <p:nvPr/>
+        </p:nvSpPr>
+        <p:spPr>
+          <a:xfrm>
+            <a:off x="6981570" y="2820000"/>
+            <a:ext cx="100000" cy="100000"/>
+          </a:xfrm>
+          <a:prstGeom prst="ellipse">
+            <a:avLst/>
+          </a:prstGeom>
+          <a:solidFill>
+            <a:srgbClr val="38BDF8"/>
+          </a:solidFill>
+          <a:ln>
+            <a:noFill/>
+          </a:ln>
+        </p:spPr>
+        <p:style>
+          <a:lnRef idx="1">
+            <a:schemeClr val="accent1"/>
+          </a:lnRef>
+          <a:fillRef idx="3">
+            <a:schemeClr val="accent1"/>
+          </a:fillRef>
+          <a:effectRef idx="2">
+            <a:schemeClr val="accent1"/>
+          </a:effectRef>
+          <a:fontRef idx="minor">
+            <a:schemeClr val="lt1"/>
+          </a:fontRef>
+        </p:style>
+        <p:txBody>
+          <a:bodyPr rtlCol="0" anchor="ctr"/>
+          <a:lstStyle/>
+          <a:p>
+            <a:pPr algn="ctr"/>
+          </a:p>
+        </p:txBody>
+      </p:sp>
+      <p:sp>
+        <p:nvSpPr>
+          <p:cNvPr id="71" name="TextBox 70"/>
+          <p:cNvSpPr txBox="1"/>
+          <p:nvPr/>
+        </p:nvSpPr>
+        <p:spPr>
+          <a:xfrm>
+            <a:off x="6981570" y="2820000"/>
+            <a:ext cx="100000" cy="100000"/>
+          </a:xfrm>
+          <a:prstGeom prst="rect">
+            <a:avLst/>
+          </a:prstGeom>
+          <a:noFill/>
+        </p:spPr>
+        <p:txBody>
+          <a:bodyPr wrap="square" lIns="0" rIns="0" tIns="0" bIns="0" anchor="ctr">
+            <a:spAutoFit/>
+          </a:bodyPr>
+          <a:lstStyle/>
+          <a:p>
+            <a:pPr algn="ctr"/>
+            <a:r>
+              <a:rPr sz="500" b="1" i="0">
+                <a:solidFill>
+                  <a:srgbClr val="F8FAFC"/>
+                </a:solidFill>
+                <a:latin typeface="Arial"/>
+              </a:rPr>
+              <a:t>MT</a:t>
+            </a:r>
+          </a:p>
+        </p:txBody>
+      </p:sp>
+      <p:sp>
+        <p:nvSpPr>
+          <p:cNvPr id="72" name="TextBox 71"/>
+          <p:cNvSpPr txBox="1"/>
+          <p:nvPr/>
+        </p:nvSpPr>
+        <p:spPr>
+          <a:xfrm>
+            <a:off x="7111570" y="2800000"/>
+            <a:ext cx="100000" cy="140000"/>
+          </a:xfrm>
+          <a:prstGeom prst="rect">
+            <a:avLst/>
+          </a:prstGeom>
+          <a:noFill/>
+        </p:spPr>
+        <p:txBody>
+          <a:bodyPr wrap="square" lIns="0" rIns="0" tIns="0" bIns="0" anchor="ctr">
+            <a:spAutoFit/>
+          </a:bodyPr>
+          <a:lstStyle/>
+          <a:p>
+            <a:pPr algn="l"/>
+            <a:r>
+              <a:rPr sz="800" b="0" i="0">
+                <a:solidFill>
+                  <a:srgbClr val="94A3B8"/>
+                </a:solidFill>
+                <a:latin typeface="Arial"/>
+              </a:rPr>
+              <a:t>☐</a:t>
+            </a:r>
+          </a:p>
+        </p:txBody>
+      </p:sp>
+      <p:sp>
+        <p:nvSpPr>
+          <p:cNvPr id="73" name="TextBox 72"/>
+          <p:cNvSpPr txBox="1"/>
+          <p:nvPr/>
+        </p:nvSpPr>
+        <p:spPr>
+          <a:xfrm>
+            <a:off x="7211570" y="2800000"/>
+            <a:ext cx="1608830" cy="140000"/>
+          </a:xfrm>
+          <a:prstGeom prst="rect">
+            <a:avLst/>
+          </a:prstGeom>
+          <a:noFill/>
+        </p:spPr>
+        <p:txBody>
+          <a:bodyPr wrap="square" lIns="0" rIns="0" tIns="0" bIns="0" anchor="ctr">
+            <a:spAutoFit/>
+          </a:bodyPr>
+          <a:lstStyle/>
+          <a:p>
+            <a:pPr algn="l"/>
+            <a:r>
+              <a:rPr sz="700" b="0" i="0">
+                <a:solidFill>
+                  <a:srgbClr val="F8FAFC"/>
+                </a:solidFill>
+                <a:latin typeface="Arial"/>
+              </a:rPr>
+              <a:t>Update docs</a:t>
+            </a:r>
+          </a:p>
+        </p:txBody>
+      </p:sp>
+      <p:sp>
+        <p:nvSpPr>
+          <p:cNvPr id="74" name="Rectangle 73"/>
+          <p:cNvSpPr/>
+          <p:nvPr/>
+        </p:nvSpPr>
+        <p:spPr>
+          <a:xfrm>
+            <a:off x="6938010" y="2960000"/>
+            <a:ext cx="1885950" cy="140000"/>
+          </a:xfrm>
+          <a:prstGeom prst="rect">
+            <a:avLst/>
+          </a:prstGeom>
+          <a:solidFill>
+            <a:srgbClr val="0F172A"/>
+          </a:solidFill>
+          <a:ln>
+            <a:noFill/>
+          </a:ln>
+        </p:spPr>
+        <p:style>
+          <a:lnRef idx="1">
+            <a:schemeClr val="accent1"/>
+          </a:lnRef>
+          <a:fillRef idx="3">
+            <a:schemeClr val="accent1"/>
+          </a:fillRef>
+          <a:effectRef idx="2">
+            <a:schemeClr val="accent1"/>
+          </a:effectRef>
+          <a:fontRef idx="minor">
+            <a:schemeClr val="lt1"/>
+          </a:fontRef>
+        </p:style>
+        <p:txBody>
+          <a:bodyPr rtlCol="0" anchor="ctr"/>
+          <a:lstStyle/>
+          <a:p>
+            <a:pPr algn="ctr"/>
+          </a:p>
+        </p:txBody>
+      </p:sp>
+      <p:sp>
+        <p:nvSpPr>
+          <p:cNvPr id="75" name="Oval 74"/>
+          <p:cNvSpPr/>
+          <p:nvPr/>
+        </p:nvSpPr>
+        <p:spPr>
+          <a:xfrm>
+            <a:off x="6981570" y="2980000"/>
+            <a:ext cx="100000" cy="100000"/>
+          </a:xfrm>
+          <a:prstGeom prst="ellipse">
+            <a:avLst/>
+          </a:prstGeom>
+          <a:solidFill>
+            <a:srgbClr val="34D399"/>
+          </a:solidFill>
+          <a:ln>
+            <a:noFill/>
+          </a:ln>
+        </p:spPr>
+        <p:style>
+          <a:lnRef idx="1">
+            <a:schemeClr val="accent1"/>
+          </a:lnRef>
+          <a:fillRef idx="3">
+            <a:schemeClr val="accent1"/>
+          </a:fillRef>
+          <a:effectRef idx="2">
+            <a:schemeClr val="accent1"/>
+          </a:effectRef>
+          <a:fontRef idx="minor">
+            <a:schemeClr val="lt1"/>
+          </a:fontRef>
+        </p:style>
+        <p:txBody>
+          <a:bodyPr rtlCol="0" anchor="ctr"/>
+          <a:lstStyle/>
+          <a:p>
+            <a:pPr algn="ctr"/>
+          </a:p>
+        </p:txBody>
+      </p:sp>
+      <p:sp>
+        <p:nvSpPr>
+          <p:cNvPr id="76" name="TextBox 75"/>
+          <p:cNvSpPr txBox="1"/>
+          <p:nvPr/>
+        </p:nvSpPr>
+        <p:spPr>
+          <a:xfrm>
+            <a:off x="6981570" y="2980000"/>
+            <a:ext cx="100000" cy="100000"/>
+          </a:xfrm>
+          <a:prstGeom prst="rect">
+            <a:avLst/>
+          </a:prstGeom>
+          <a:noFill/>
+        </p:spPr>
+        <p:txBody>
+          <a:bodyPr wrap="square" lIns="0" rIns="0" tIns="0" bIns="0" anchor="ctr">
+            <a:spAutoFit/>
+          </a:bodyPr>
+          <a:lstStyle/>
+          <a:p>
+            <a:pPr algn="ctr"/>
+            <a:r>
+              <a:rPr sz="500" b="1" i="0">
+                <a:solidFill>
+                  <a:srgbClr val="F8FAFC"/>
+                </a:solidFill>
+                <a:latin typeface="Arial"/>
+              </a:rPr>
+              <a:t>LV</a:t>
+            </a:r>
+          </a:p>
+        </p:txBody>
+      </p:sp>
+      <p:sp>
+        <p:nvSpPr>
+          <p:cNvPr id="77" name="TextBox 76"/>
+          <p:cNvSpPr txBox="1"/>
+          <p:nvPr/>
+        </p:nvSpPr>
+        <p:spPr>
+          <a:xfrm>
+            <a:off x="7111570" y="2960000"/>
+            <a:ext cx="100000" cy="140000"/>
+          </a:xfrm>
+          <a:prstGeom prst="rect">
+            <a:avLst/>
+          </a:prstGeom>
+          <a:noFill/>
+        </p:spPr>
+        <p:txBody>
+          <a:bodyPr wrap="square" lIns="0" rIns="0" tIns="0" bIns="0" anchor="ctr">
+            <a:spAutoFit/>
+          </a:bodyPr>
+          <a:lstStyle/>
+          <a:p>
+            <a:pPr algn="l"/>
+            <a:r>
+              <a:rPr sz="800" b="0" i="0">
+                <a:solidFill>
+                  <a:srgbClr val="34D399"/>
+                </a:solidFill>
+                <a:latin typeface="Arial"/>
+              </a:rPr>
+              <a:t>☑</a:t>
+            </a:r>
+          </a:p>
+        </p:txBody>
+      </p:sp>
+      <p:sp>
+        <p:nvSpPr>
+          <p:cNvPr id="78" name="TextBox 77"/>
+          <p:cNvSpPr txBox="1"/>
+          <p:nvPr/>
+        </p:nvSpPr>
+        <p:spPr>
+          <a:xfrm>
+            <a:off x="7211570" y="2960000"/>
+            <a:ext cx="1608830" cy="140000"/>
+          </a:xfrm>
+          <a:prstGeom prst="rect">
+            <a:avLst/>
+          </a:prstGeom>
+          <a:noFill/>
+        </p:spPr>
+        <p:txBody>
+          <a:bodyPr wrap="square" lIns="0" rIns="0" tIns="0" bIns="0" anchor="ctr">
+            <a:spAutoFit/>
+          </a:bodyPr>
+          <a:lstStyle/>
+          <a:p>
+            <a:pPr algn="l"/>
+            <a:r>
+              <a:rPr sz="700" b="0" i="0">
+                <a:solidFill>
+                  <a:srgbClr val="64748B"/>
+                </a:solidFill>
+                <a:latin typeface="Arial"/>
+              </a:rPr>
+              <a:t>Fix bug #11</a:t>
+            </a:r>
+          </a:p>
+        </p:txBody>
+      </p:sp>
+      <p:sp>
+        <p:nvSpPr>
+          <p:cNvPr id="79" name="TextBox 78"/>
+          <p:cNvSpPr txBox="1"/>
+          <p:nvPr/>
+        </p:nvSpPr>
+        <p:spPr>
+          <a:xfrm>
+            <a:off x="6846570" y="4055720"/>
+            <a:ext cx="2068830" cy="160000"/>
+          </a:xfrm>
+          <a:prstGeom prst="rect">
+            <a:avLst/>
+          </a:prstGeom>
+          <a:noFill/>
+        </p:spPr>
+        <p:txBody>
+          <a:bodyPr wrap="square" lIns="0" rIns="0" tIns="0" bIns="0" anchor="t">
+            <a:spAutoFit/>
+          </a:bodyPr>
+          <a:lstStyle/>
+          <a:p>
+            <a:pPr algn="ctr"/>
+            <a:r>
+              <a:rPr sz="1000" b="1" i="0">
+                <a:solidFill>
+                  <a:srgbClr val="A78BFA"/>
+                </a:solidFill>
+                <a:latin typeface="Arial"/>
+              </a:rPr>
+              <a:t>Team</a:t>
+            </a:r>
+          </a:p>
+        </p:txBody>
+      </p:sp>
+      <p:sp>
+        <p:nvSpPr>
+          <p:cNvPr id="80" name="TextBox 79"/>
+          <p:cNvSpPr txBox="1"/>
+          <p:nvPr/>
+        </p:nvSpPr>
+        <p:spPr>
+          <a:xfrm>
+            <a:off x="6846570" y="4205720"/>
+            <a:ext cx="2068830" cy="140000"/>
+          </a:xfrm>
+          <a:prstGeom prst="rect">
+            <a:avLst/>
+          </a:prstGeom>
+          <a:noFill/>
+        </p:spPr>
+        <p:txBody>
+          <a:bodyPr wrap="square" lIns="0" rIns="0" tIns="0" bIns="0" anchor="t">
+            <a:spAutoFit/>
+          </a:bodyPr>
+          <a:lstStyle/>
+          <a:p>
+            <a:pPr algn="ctr"/>
+            <a:r>
+              <a:rPr sz="800" b="0" i="0">
+                <a:solidFill>
+                  <a:srgbClr val="94A3B8"/>
+                </a:solidFill>
+                <a:latin typeface="Arial"/>
+              </a:rPr>
+              <a:t>Shared tasks</a:t>
+            </a:r>
+          </a:p>
+        </p:txBody>
+      </p:sp>
+      <p:sp>
+        <p:nvSpPr>
+          <p:cNvPr id="81" name="TextBox 80"/>
+          <p:cNvSpPr txBox="1"/>
+          <p:nvPr/>
+        </p:nvSpPr>
+        <p:spPr>
+          <a:xfrm>
+            <a:off x="457200" y="4620000"/>
+            <a:ext cx="8229600" cy="200000"/>
+          </a:xfrm>
+          <a:prstGeom prst="rect">
+            <a:avLst/>
+          </a:prstGeom>
+          <a:noFill/>
+        </p:spPr>
+        <p:txBody>
+          <a:bodyPr wrap="square" lIns="0" rIns="0" tIns="0" bIns="0" anchor="ctr">
+            <a:spAutoFit/>
+          </a:bodyPr>
+          <a:lstStyle/>
+          <a:p>
+            <a:pPr algn="ctr"/>
+            <a:r>
+              <a:rPr sz="1100" b="0" i="1">
+                <a:solidFill>
+                  <a:srgbClr val="94A3B8"/>
+                </a:solidFill>
+                <a:latin typeface="Arial"/>
+              </a:rPr>
+              <a:t>AI musí hádat, co chceš. Hádá pokaždé jinak.</a:t>
+            </a:r>
+          </a:p>
+        </p:txBody>
+      </p:sp>
+    </p:spTree>
+  </p:cSld>
+  <p:clrMapOvr>
+    <a:masterClrMapping/>
+  </p:clrMapOvr>
+</p:sld>
+</file>
+
+<file path=ppt/slides/slide12.xml><?xml version="1.0" encoding="utf-8"?>
+<p:sld xmlns:a="http://schemas.openxmlformats.org/drawingml/2006/main" xmlns:p="http://schemas.openxmlformats.org/presentationml/2006/main" xmlns:r="http://schemas.openxmlformats.org/officeDocument/2006/relationships">
+  <p:cSld>
+    <p:bg>
+      <p:bgPr>
+        <a:solidFill>
+          <a:srgbClr val="0F172A"/>
+        </a:solidFill>
+        <a:effectLst/>
+      </p:bgPr>
+    </p:bg>
+    <p:spTree>
+      <p:nvGrpSpPr>
+        <p:cNvPr id="1" name=""/>
+        <p:cNvGrpSpPr/>
+        <p:nvPr/>
+      </p:nvGrpSpPr>
+      <p:grpSpPr/>
+      <p:sp>
+        <p:nvSpPr>
+          <p:cNvPr id="2" name="TextBox 1"/>
+          <p:cNvSpPr txBox="1"/>
+          <p:nvPr/>
+        </p:nvSpPr>
+        <p:spPr>
+          <a:xfrm>
+            <a:off x="457200" y="274320"/>
+            <a:ext cx="8229600" cy="640080"/>
+          </a:xfrm>
+          <a:prstGeom prst="rect">
+            <a:avLst/>
+          </a:prstGeom>
+          <a:noFill/>
+        </p:spPr>
+        <p:txBody>
+          <a:bodyPr wrap="square" lIns="0" rIns="0" tIns="0" bIns="0" anchor="ctr">
+            <a:spAutoFit/>
+          </a:bodyPr>
+          <a:lstStyle/>
+          <a:p>
+            <a:pPr algn="l"/>
+            <a:r>
+              <a:rPr sz="2600" b="1" i="0">
+                <a:solidFill>
+                  <a:srgbClr val="F8FAFC"/>
+                </a:solidFill>
+                <a:latin typeface="Arial Black"/>
+              </a:rPr>
+              <a:t>DLOUHÝ PROMPT = ZMATENÝ AGENT</a:t>
+            </a:r>
+          </a:p>
+        </p:txBody>
+      </p:sp>
+      <p:sp>
+        <p:nvSpPr>
+          <p:cNvPr id="3" name="TextBox 2"/>
+          <p:cNvSpPr txBox="1"/>
+          <p:nvPr/>
+        </p:nvSpPr>
+        <p:spPr>
+          <a:xfrm>
+            <a:off x="457200" y="868680"/>
+            <a:ext cx="8229600" cy="320040"/>
+          </a:xfrm>
+          <a:prstGeom prst="rect">
+            <a:avLst/>
+          </a:prstGeom>
+          <a:noFill/>
+        </p:spPr>
+        <p:txBody>
+          <a:bodyPr wrap="square" lIns="0" rIns="0" tIns="0" bIns="0" anchor="ctr">
+            <a:spAutoFit/>
+          </a:bodyPr>
+          <a:lstStyle/>
+          <a:p>
+            <a:pPr algn="l"/>
+            <a:r>
+              <a:rPr sz="1400" b="0" i="1">
+                <a:solidFill>
+                  <a:srgbClr val="94A3B8"/>
+                </a:solidFill>
+                <a:latin typeface="Arial"/>
+              </a:rPr>
+              <a:t>Když chceš všechno najednou, nedostaneš nic pořádně</a:t>
+            </a:r>
+          </a:p>
+        </p:txBody>
+      </p:sp>
+      <p:sp>
+        <p:nvSpPr>
+          <p:cNvPr id="4" name="Rectangle 3"/>
+          <p:cNvSpPr/>
+          <p:nvPr/>
+        </p:nvSpPr>
+        <p:spPr>
+          <a:xfrm>
+            <a:off x="0" y="4892040"/>
+            <a:ext cx="9144000" cy="251460"/>
+          </a:xfrm>
+          <a:prstGeom prst="rect">
+            <a:avLst/>
+          </a:prstGeom>
+          <a:solidFill>
+            <a:srgbClr val="38BDF8"/>
+          </a:solidFill>
+          <a:ln>
+            <a:noFill/>
+          </a:ln>
+        </p:spPr>
+        <p:style>
+          <a:lnRef idx="1">
+            <a:schemeClr val="accent1"/>
+          </a:lnRef>
+          <a:fillRef idx="3">
+            <a:schemeClr val="accent1"/>
+          </a:fillRef>
+          <a:effectRef idx="2">
+            <a:schemeClr val="accent1"/>
+          </a:effectRef>
+          <a:fontRef idx="minor">
+            <a:schemeClr val="lt1"/>
+          </a:fontRef>
+        </p:style>
+        <p:txBody>
+          <a:bodyPr rtlCol="0" anchor="ctr"/>
+          <a:lstStyle/>
+          <a:p>
+            <a:pPr algn="ctr"/>
+          </a:p>
+        </p:txBody>
+      </p:sp>
+      <p:sp>
+        <p:nvSpPr>
+          <p:cNvPr id="5" name="TextBox 4"/>
+          <p:cNvSpPr txBox="1"/>
+          <p:nvPr/>
+        </p:nvSpPr>
+        <p:spPr>
+          <a:xfrm>
+            <a:off x="8046720" y="4754880"/>
+            <a:ext cx="914400" cy="274320"/>
+          </a:xfrm>
+          <a:prstGeom prst="rect">
+            <a:avLst/>
+          </a:prstGeom>
+          <a:noFill/>
+        </p:spPr>
+        <p:txBody>
+          <a:bodyPr wrap="square" lIns="0" rIns="0" tIns="0" bIns="0" anchor="ctr">
+            <a:spAutoFit/>
+          </a:bodyPr>
+          <a:lstStyle/>
+          <a:p>
+            <a:pPr algn="r"/>
+            <a:r>
+              <a:rPr sz="900" b="0" i="0">
+                <a:solidFill>
+                  <a:srgbClr val="94A3B8"/>
+                </a:solidFill>
+                <a:latin typeface="Arial"/>
+              </a:rPr>
+              <a:t>6 / 13</a:t>
+            </a:r>
+          </a:p>
+        </p:txBody>
+      </p:sp>
+      <p:sp>
+        <p:nvSpPr>
+          <p:cNvPr id="6" name="Rectangle 5"/>
+          <p:cNvSpPr/>
+          <p:nvPr/>
+        </p:nvSpPr>
+        <p:spPr>
+          <a:xfrm>
+            <a:off x="457200" y="1371600"/>
+            <a:ext cx="4000500" cy="3200000"/>
+          </a:xfrm>
+          <a:prstGeom prst="rect">
+            <a:avLst/>
+          </a:prstGeom>
+          <a:solidFill>
+            <a:srgbClr val="0F1C2C"/>
+          </a:solidFill>
+          <a:ln>
+            <a:noFill/>
+          </a:ln>
+        </p:spPr>
+        <p:style>
+          <a:lnRef idx="1">
+            <a:schemeClr val="accent1"/>
+          </a:lnRef>
+          <a:fillRef idx="3">
+            <a:schemeClr val="accent1"/>
+          </a:fillRef>
+          <a:effectRef idx="2">
+            <a:schemeClr val="accent1"/>
+          </a:effectRef>
+          <a:fontRef idx="minor">
+            <a:schemeClr val="lt1"/>
+          </a:fontRef>
+        </p:style>
+        <p:txBody>
+          <a:bodyPr rtlCol="0" anchor="ctr"/>
+          <a:lstStyle/>
+          <a:p>
+            <a:pPr algn="ctr"/>
+          </a:p>
+        </p:txBody>
+      </p:sp>
+      <p:sp>
+        <p:nvSpPr>
+          <p:cNvPr id="7" name="Rectangle 6"/>
+          <p:cNvSpPr/>
+          <p:nvPr/>
+        </p:nvSpPr>
+        <p:spPr>
+          <a:xfrm>
+            <a:off x="457200" y="1371600"/>
+            <a:ext cx="4000500" cy="45720"/>
+          </a:xfrm>
+          <a:prstGeom prst="rect">
+            <a:avLst/>
+          </a:prstGeom>
+          <a:solidFill>
+            <a:srgbClr val="FB923C"/>
+          </a:solidFill>
+          <a:ln>
+            <a:noFill/>
+          </a:ln>
+        </p:spPr>
+        <p:style>
+          <a:lnRef idx="1">
+            <a:schemeClr val="accent1"/>
+          </a:lnRef>
+          <a:fillRef idx="3">
+            <a:schemeClr val="accent1"/>
+          </a:fillRef>
+          <a:effectRef idx="2">
+            <a:schemeClr val="accent1"/>
+          </a:effectRef>
+          <a:fontRef idx="minor">
+            <a:schemeClr val="lt1"/>
+          </a:fontRef>
+        </p:style>
+        <p:txBody>
+          <a:bodyPr rtlCol="0" anchor="ctr"/>
+          <a:lstStyle/>
+          <a:p>
+            <a:pPr algn="ctr"/>
+          </a:p>
+        </p:txBody>
+      </p:sp>
+      <p:sp>
+        <p:nvSpPr>
+          <p:cNvPr id="8" name="TextBox 7"/>
+          <p:cNvSpPr txBox="1"/>
+          <p:nvPr/>
+        </p:nvSpPr>
+        <p:spPr>
+          <a:xfrm>
+            <a:off x="640080" y="1463040"/>
+            <a:ext cx="3726180" cy="240000"/>
+          </a:xfrm>
+          <a:prstGeom prst="rect">
+            <a:avLst/>
+          </a:prstGeom>
+          <a:noFill/>
+        </p:spPr>
+        <p:txBody>
+          <a:bodyPr wrap="square" lIns="0" rIns="0" tIns="0" bIns="0" anchor="t">
+            <a:spAutoFit/>
+          </a:bodyPr>
+          <a:lstStyle/>
+          <a:p>
+            <a:pPr algn="l"/>
+            <a:r>
+              <a:rPr sz="1100" b="1" i="0">
+                <a:solidFill>
+                  <a:srgbClr val="FB923C"/>
+                </a:solidFill>
+                <a:latin typeface="Arial"/>
+              </a:rPr>
+              <a:t>PROMPT  →  500+ slov</a:t>
+            </a:r>
+          </a:p>
+        </p:txBody>
+      </p:sp>
+      <p:sp>
+        <p:nvSpPr>
+          <p:cNvPr id="9" name="TextBox 8"/>
+          <p:cNvSpPr txBox="1"/>
+          <p:nvPr/>
+        </p:nvSpPr>
+        <p:spPr>
+          <a:xfrm>
+            <a:off x="640080" y="1783080"/>
+            <a:ext cx="3634740" cy="2742800"/>
+          </a:xfrm>
+          <a:prstGeom prst="rect">
+            <a:avLst/>
+          </a:prstGeom>
+          <a:noFill/>
+        </p:spPr>
+        <p:txBody>
+          <a:bodyPr wrap="square" lIns="0" rIns="0" tIns="0" bIns="0">
+            <a:spAutoFit/>
+          </a:bodyPr>
+          <a:lstStyle/>
+          <a:p>
+            <a:pPr algn="l"/>
+            <a:r>
+              <a:rPr sz="900">
+                <a:solidFill>
+                  <a:srgbClr val="94A3B8"/>
+                </a:solidFill>
+                <a:latin typeface="Arial"/>
+              </a:rPr>
+              <a:t>„Udělej mi TODO app. Chci auth s Google a GitHub, real-time sync přes WebSockets, offline mode, AI-powered sumarizace úkolů, kanban board, dark mode, tagy, prioritu 1-5, deadline notifikace, mobile push, desktop klient v Electronu, export do PDF/CSV/iCal, zero-downtime migrace, Redis cache, Elasticsearch pro search, i18n do 12 jazyků, GDPR compliance, Stripe subscription s 3 tiery, A/B testing, analytics přes Mixpanel, keyboard shortcuts, drag &amp; drop reordering, undo/redo historie, sharing přes veřejné linky, OAuth SSO pro tým, webhook integrace, CLI nástroj, browser extension, Slack &amp; Teams notifikace, AI chat asistent…"</a:t>
+            </a:r>
+          </a:p>
+        </p:txBody>
+      </p:sp>
+      <p:sp>
+        <p:nvSpPr>
+          <p:cNvPr id="10" name="TextBox 9"/>
+          <p:cNvSpPr txBox="1"/>
+          <p:nvPr/>
+        </p:nvSpPr>
+        <p:spPr>
+          <a:xfrm>
+            <a:off x="4457700" y="2831600"/>
+            <a:ext cx="228600" cy="280000"/>
+          </a:xfrm>
+          <a:prstGeom prst="rect">
+            <a:avLst/>
+          </a:prstGeom>
+          <a:noFill/>
+        </p:spPr>
+        <p:txBody>
+          <a:bodyPr wrap="square" lIns="0" rIns="0" tIns="0" bIns="0" anchor="ctr">
+            <a:spAutoFit/>
+          </a:bodyPr>
+          <a:lstStyle/>
+          <a:p>
+            <a:pPr algn="ctr"/>
+            <a:r>
+              <a:rPr sz="2400" b="1" i="0">
+                <a:solidFill>
+                  <a:srgbClr val="94A3B8"/>
+                </a:solidFill>
+                <a:latin typeface="Arial"/>
+              </a:rPr>
+              <a:t>→</a:t>
+            </a:r>
+          </a:p>
+        </p:txBody>
+      </p:sp>
+      <p:sp>
+        <p:nvSpPr>
+          <p:cNvPr id="11" name="Rectangle 10"/>
+          <p:cNvSpPr/>
+          <p:nvPr/>
+        </p:nvSpPr>
+        <p:spPr>
+          <a:xfrm>
+            <a:off x="4686300" y="1371600"/>
+            <a:ext cx="4000500" cy="3200000"/>
+          </a:xfrm>
+          <a:prstGeom prst="rect">
+            <a:avLst/>
+          </a:prstGeom>
+          <a:solidFill>
+            <a:srgbClr val="0F1C2C"/>
+          </a:solidFill>
+          <a:ln>
+            <a:noFill/>
+          </a:ln>
+        </p:spPr>
+        <p:style>
+          <a:lnRef idx="1">
+            <a:schemeClr val="accent1"/>
+          </a:lnRef>
+          <a:fillRef idx="3">
+            <a:schemeClr val="accent1"/>
+          </a:fillRef>
+          <a:effectRef idx="2">
+            <a:schemeClr val="accent1"/>
+          </a:effectRef>
+          <a:fontRef idx="minor">
+            <a:schemeClr val="lt1"/>
+          </a:fontRef>
+        </p:style>
+        <p:txBody>
+          <a:bodyPr rtlCol="0" anchor="ctr"/>
+          <a:lstStyle/>
+          <a:p>
+            <a:pPr algn="ctr"/>
+          </a:p>
+        </p:txBody>
+      </p:sp>
+      <p:sp>
+        <p:nvSpPr>
+          <p:cNvPr id="12" name="Rectangle 11"/>
+          <p:cNvSpPr/>
+          <p:nvPr/>
+        </p:nvSpPr>
+        <p:spPr>
+          <a:xfrm>
+            <a:off x="4686300" y="1371600"/>
+            <a:ext cx="4000500" cy="45720"/>
+          </a:xfrm>
+          <a:prstGeom prst="rect">
+            <a:avLst/>
+          </a:prstGeom>
+          <a:solidFill>
+            <a:srgbClr val="F87171"/>
+          </a:solidFill>
+          <a:ln>
+            <a:noFill/>
+          </a:ln>
+        </p:spPr>
+        <p:style>
+          <a:lnRef idx="1">
+            <a:schemeClr val="accent1"/>
+          </a:lnRef>
+          <a:fillRef idx="3">
+            <a:schemeClr val="accent1"/>
+          </a:fillRef>
+          <a:effectRef idx="2">
+            <a:schemeClr val="accent1"/>
+          </a:effectRef>
+          <a:fontRef idx="minor">
+            <a:schemeClr val="lt1"/>
+          </a:fontRef>
+        </p:style>
+        <p:txBody>
+          <a:bodyPr rtlCol="0" anchor="ctr"/>
+          <a:lstStyle/>
+          <a:p>
+            <a:pPr algn="ctr"/>
+          </a:p>
+        </p:txBody>
+      </p:sp>
+      <p:sp>
+        <p:nvSpPr>
+          <p:cNvPr id="13" name="TextBox 12"/>
+          <p:cNvSpPr txBox="1"/>
+          <p:nvPr/>
+        </p:nvSpPr>
+        <p:spPr>
+          <a:xfrm>
+            <a:off x="4869180" y="1463040"/>
+            <a:ext cx="3726180" cy="240000"/>
+          </a:xfrm>
+          <a:prstGeom prst="rect">
+            <a:avLst/>
+          </a:prstGeom>
+          <a:noFill/>
+        </p:spPr>
+        <p:txBody>
+          <a:bodyPr wrap="square" lIns="0" rIns="0" tIns="0" bIns="0" anchor="t">
+            <a:spAutoFit/>
+          </a:bodyPr>
+          <a:lstStyle/>
+          <a:p>
+            <a:pPr algn="l"/>
+            <a:r>
+              <a:rPr sz="1100" b="1" i="0">
+                <a:solidFill>
+                  <a:srgbClr val="F87171"/>
+                </a:solidFill>
+                <a:latin typeface="Arial"/>
+              </a:rPr>
+              <a:t>CO AI UDĚLALA</a:t>
+            </a:r>
+          </a:p>
+        </p:txBody>
+      </p:sp>
+      <p:sp>
+        <p:nvSpPr>
+          <p:cNvPr id="14" name="TextBox 13"/>
+          <p:cNvSpPr txBox="1"/>
+          <p:nvPr/>
+        </p:nvSpPr>
+        <p:spPr>
+          <a:xfrm>
+            <a:off x="4823460" y="1783080"/>
+            <a:ext cx="240000" cy="280000"/>
+          </a:xfrm>
+          <a:prstGeom prst="rect">
+            <a:avLst/>
+          </a:prstGeom>
+          <a:noFill/>
+        </p:spPr>
+        <p:txBody>
+          <a:bodyPr wrap="square" lIns="0" rIns="0" tIns="0" bIns="0" anchor="ctr">
+            <a:spAutoFit/>
+          </a:bodyPr>
+          <a:lstStyle/>
+          <a:p>
+            <a:pPr algn="ctr"/>
+            <a:r>
+              <a:rPr sz="1400" b="1" i="0">
+                <a:solidFill>
+                  <a:srgbClr val="34D399"/>
+                </a:solidFill>
+                <a:latin typeface="Arial"/>
+              </a:rPr>
+              <a:t>✓</a:t>
+            </a:r>
+          </a:p>
+        </p:txBody>
+      </p:sp>
+      <p:sp>
+        <p:nvSpPr>
+          <p:cNvPr id="15" name="TextBox 14"/>
+          <p:cNvSpPr txBox="1"/>
+          <p:nvPr/>
+        </p:nvSpPr>
+        <p:spPr>
+          <a:xfrm>
+            <a:off x="5086300" y="1813080"/>
+            <a:ext cx="3450500" cy="130000"/>
+          </a:xfrm>
+          <a:prstGeom prst="rect">
+            <a:avLst/>
+          </a:prstGeom>
+          <a:noFill/>
+        </p:spPr>
+        <p:txBody>
+          <a:bodyPr wrap="square" lIns="0" rIns="0" tIns="0" bIns="0" anchor="t">
+            <a:spAutoFit/>
+          </a:bodyPr>
+          <a:lstStyle/>
+          <a:p>
+            <a:pPr algn="l"/>
+            <a:r>
+              <a:rPr sz="900" b="1" i="0">
+                <a:solidFill>
+                  <a:srgbClr val="F8FAFC"/>
+                </a:solidFill>
+                <a:latin typeface="Arial"/>
+              </a:rPr>
+              <a:t>Auth (Google jen)</a:t>
+            </a:r>
+          </a:p>
+        </p:txBody>
+      </p:sp>
+      <p:sp>
+        <p:nvSpPr>
+          <p:cNvPr id="16" name="TextBox 15"/>
+          <p:cNvSpPr txBox="1"/>
+          <p:nvPr/>
+        </p:nvSpPr>
+        <p:spPr>
+          <a:xfrm>
+            <a:off x="5086300" y="1933080"/>
+            <a:ext cx="3450500" cy="120000"/>
+          </a:xfrm>
+          <a:prstGeom prst="rect">
+            <a:avLst/>
+          </a:prstGeom>
+          <a:noFill/>
+        </p:spPr>
+        <p:txBody>
+          <a:bodyPr wrap="square" lIns="0" rIns="0" tIns="0" bIns="0" anchor="t">
+            <a:spAutoFit/>
+          </a:bodyPr>
+          <a:lstStyle/>
+          <a:p>
+            <a:pPr algn="l"/>
+            <a:r>
+              <a:rPr sz="700" b="0" i="1">
+                <a:solidFill>
+                  <a:srgbClr val="94A3B8"/>
+                </a:solidFill>
+                <a:latin typeface="Arial"/>
+              </a:rPr>
+              <a:t>ale zapomněla na GitHub</a:t>
+            </a:r>
+          </a:p>
+        </p:txBody>
+      </p:sp>
+      <p:sp>
+        <p:nvSpPr>
+          <p:cNvPr id="17" name="TextBox 16"/>
+          <p:cNvSpPr txBox="1"/>
+          <p:nvPr/>
+        </p:nvSpPr>
+        <p:spPr>
+          <a:xfrm>
+            <a:off x="4823460" y="2063080"/>
+            <a:ext cx="240000" cy="280000"/>
+          </a:xfrm>
+          <a:prstGeom prst="rect">
+            <a:avLst/>
+          </a:prstGeom>
+          <a:noFill/>
+        </p:spPr>
+        <p:txBody>
+          <a:bodyPr wrap="square" lIns="0" rIns="0" tIns="0" bIns="0" anchor="ctr">
+            <a:spAutoFit/>
+          </a:bodyPr>
+          <a:lstStyle/>
+          <a:p>
+            <a:pPr algn="ctr"/>
+            <a:r>
+              <a:rPr sz="1400" b="1" i="0">
+                <a:solidFill>
+                  <a:srgbClr val="F87171"/>
+                </a:solidFill>
+                <a:latin typeface="Arial"/>
+              </a:rPr>
+              <a:t>✗</a:t>
+            </a:r>
+          </a:p>
+        </p:txBody>
+      </p:sp>
+      <p:sp>
+        <p:nvSpPr>
+          <p:cNvPr id="18" name="TextBox 17"/>
+          <p:cNvSpPr txBox="1"/>
+          <p:nvPr/>
+        </p:nvSpPr>
+        <p:spPr>
+          <a:xfrm>
+            <a:off x="5086300" y="2093080"/>
+            <a:ext cx="3450500" cy="130000"/>
+          </a:xfrm>
+          <a:prstGeom prst="rect">
+            <a:avLst/>
+          </a:prstGeom>
+          <a:noFill/>
+        </p:spPr>
+        <p:txBody>
+          <a:bodyPr wrap="square" lIns="0" rIns="0" tIns="0" bIns="0" anchor="t">
+            <a:spAutoFit/>
+          </a:bodyPr>
+          <a:lstStyle/>
+          <a:p>
+            <a:pPr algn="l"/>
+            <a:r>
+              <a:rPr sz="900" b="1" i="0">
+                <a:solidFill>
+                  <a:srgbClr val="F8FAFC"/>
+                </a:solidFill>
+                <a:latin typeface="Arial"/>
+              </a:rPr>
+              <a:t>Real-time sync</a:t>
+            </a:r>
+          </a:p>
+        </p:txBody>
+      </p:sp>
+      <p:sp>
+        <p:nvSpPr>
+          <p:cNvPr id="19" name="TextBox 18"/>
+          <p:cNvSpPr txBox="1"/>
+          <p:nvPr/>
+        </p:nvSpPr>
+        <p:spPr>
+          <a:xfrm>
+            <a:off x="5086300" y="2213080"/>
+            <a:ext cx="3450500" cy="120000"/>
+          </a:xfrm>
+          <a:prstGeom prst="rect">
+            <a:avLst/>
+          </a:prstGeom>
+          <a:noFill/>
+        </p:spPr>
+        <p:txBody>
+          <a:bodyPr wrap="square" lIns="0" rIns="0" tIns="0" bIns="0" anchor="t">
+            <a:spAutoFit/>
+          </a:bodyPr>
+          <a:lstStyle/>
+          <a:p>
+            <a:pPr algn="l"/>
+            <a:r>
+              <a:rPr sz="700" b="0" i="1">
+                <a:solidFill>
+                  <a:srgbClr val="94A3B8"/>
+                </a:solidFill>
+                <a:latin typeface="Arial"/>
+              </a:rPr>
+              <a:t>chybí úplně</a:t>
+            </a:r>
+          </a:p>
+        </p:txBody>
+      </p:sp>
+      <p:sp>
+        <p:nvSpPr>
+          <p:cNvPr id="20" name="TextBox 19"/>
+          <p:cNvSpPr txBox="1"/>
+          <p:nvPr/>
+        </p:nvSpPr>
+        <p:spPr>
+          <a:xfrm>
+            <a:off x="4823460" y="2343080"/>
+            <a:ext cx="240000" cy="280000"/>
+          </a:xfrm>
+          <a:prstGeom prst="rect">
+            <a:avLst/>
+          </a:prstGeom>
+          <a:noFill/>
+        </p:spPr>
+        <p:txBody>
+          <a:bodyPr wrap="square" lIns="0" rIns="0" tIns="0" bIns="0" anchor="ctr">
+            <a:spAutoFit/>
+          </a:bodyPr>
+          <a:lstStyle/>
+          <a:p>
+            <a:pPr algn="ctr"/>
+            <a:r>
+              <a:rPr sz="1400" b="1" i="0">
+                <a:solidFill>
+                  <a:srgbClr val="FBBF24"/>
+                </a:solidFill>
+                <a:latin typeface="Arial"/>
+              </a:rPr>
+              <a:t>~</a:t>
+            </a:r>
+          </a:p>
+        </p:txBody>
+      </p:sp>
+      <p:sp>
+        <p:nvSpPr>
+          <p:cNvPr id="21" name="TextBox 20"/>
+          <p:cNvSpPr txBox="1"/>
+          <p:nvPr/>
+        </p:nvSpPr>
+        <p:spPr>
+          <a:xfrm>
+            <a:off x="5086300" y="2373080"/>
+            <a:ext cx="3450500" cy="130000"/>
+          </a:xfrm>
+          <a:prstGeom prst="rect">
+            <a:avLst/>
+          </a:prstGeom>
+          <a:noFill/>
+        </p:spPr>
+        <p:txBody>
+          <a:bodyPr wrap="square" lIns="0" rIns="0" tIns="0" bIns="0" anchor="t">
+            <a:spAutoFit/>
+          </a:bodyPr>
+          <a:lstStyle/>
+          <a:p>
+            <a:pPr algn="l"/>
+            <a:r>
+              <a:rPr sz="900" b="1" i="0">
+                <a:solidFill>
+                  <a:srgbClr val="F8FAFC"/>
+                </a:solidFill>
+                <a:latin typeface="Arial"/>
+              </a:rPr>
+              <a:t>Kanban board</a:t>
+            </a:r>
+          </a:p>
+        </p:txBody>
+      </p:sp>
+      <p:sp>
+        <p:nvSpPr>
+          <p:cNvPr id="22" name="TextBox 21"/>
+          <p:cNvSpPr txBox="1"/>
+          <p:nvPr/>
+        </p:nvSpPr>
+        <p:spPr>
+          <a:xfrm>
+            <a:off x="5086300" y="2493080"/>
+            <a:ext cx="3450500" cy="120000"/>
+          </a:xfrm>
+          <a:prstGeom prst="rect">
+            <a:avLst/>
+          </a:prstGeom>
+          <a:noFill/>
+        </p:spPr>
+        <p:txBody>
+          <a:bodyPr wrap="square" lIns="0" rIns="0" tIns="0" bIns="0" anchor="t">
+            <a:spAutoFit/>
+          </a:bodyPr>
+          <a:lstStyle/>
+          <a:p>
+            <a:pPr algn="l"/>
+            <a:r>
+              <a:rPr sz="700" b="0" i="1">
+                <a:solidFill>
+                  <a:srgbClr val="94A3B8"/>
+                </a:solidFill>
+                <a:latin typeface="Arial"/>
+              </a:rPr>
+              <a:t>polovičatý, bez drag&amp;drop</a:t>
+            </a:r>
+          </a:p>
+        </p:txBody>
+      </p:sp>
+      <p:sp>
+        <p:nvSpPr>
+          <p:cNvPr id="23" name="TextBox 22"/>
+          <p:cNvSpPr txBox="1"/>
+          <p:nvPr/>
+        </p:nvSpPr>
+        <p:spPr>
+          <a:xfrm>
+            <a:off x="4823460" y="2623080"/>
+            <a:ext cx="240000" cy="280000"/>
+          </a:xfrm>
+          <a:prstGeom prst="rect">
+            <a:avLst/>
+          </a:prstGeom>
+          <a:noFill/>
+        </p:spPr>
+        <p:txBody>
+          <a:bodyPr wrap="square" lIns="0" rIns="0" tIns="0" bIns="0" anchor="ctr">
+            <a:spAutoFit/>
+          </a:bodyPr>
+          <a:lstStyle/>
+          <a:p>
+            <a:pPr algn="ctr"/>
+            <a:r>
+              <a:rPr sz="1400" b="1" i="0">
+                <a:solidFill>
+                  <a:srgbClr val="F87171"/>
+                </a:solidFill>
+                <a:latin typeface="Arial"/>
+              </a:rPr>
+              <a:t>✗</a:t>
+            </a:r>
+          </a:p>
+        </p:txBody>
+      </p:sp>
+      <p:sp>
+        <p:nvSpPr>
+          <p:cNvPr id="24" name="TextBox 23"/>
+          <p:cNvSpPr txBox="1"/>
+          <p:nvPr/>
+        </p:nvSpPr>
+        <p:spPr>
+          <a:xfrm>
+            <a:off x="5086300" y="2653080"/>
+            <a:ext cx="3450500" cy="130000"/>
+          </a:xfrm>
+          <a:prstGeom prst="rect">
+            <a:avLst/>
+          </a:prstGeom>
+          <a:noFill/>
+        </p:spPr>
+        <p:txBody>
+          <a:bodyPr wrap="square" lIns="0" rIns="0" tIns="0" bIns="0" anchor="t">
+            <a:spAutoFit/>
+          </a:bodyPr>
+          <a:lstStyle/>
+          <a:p>
+            <a:pPr algn="l"/>
+            <a:r>
+              <a:rPr sz="900" b="1" i="0">
+                <a:solidFill>
+                  <a:srgbClr val="F8FAFC"/>
+                </a:solidFill>
+                <a:latin typeface="Arial"/>
+              </a:rPr>
+              <a:t>Offline mode</a:t>
+            </a:r>
+          </a:p>
+        </p:txBody>
+      </p:sp>
+      <p:sp>
+        <p:nvSpPr>
+          <p:cNvPr id="25" name="TextBox 24"/>
+          <p:cNvSpPr txBox="1"/>
+          <p:nvPr/>
+        </p:nvSpPr>
+        <p:spPr>
+          <a:xfrm>
+            <a:off x="5086300" y="2773080"/>
+            <a:ext cx="3450500" cy="120000"/>
+          </a:xfrm>
+          <a:prstGeom prst="rect">
+            <a:avLst/>
+          </a:prstGeom>
+          <a:noFill/>
+        </p:spPr>
+        <p:txBody>
+          <a:bodyPr wrap="square" lIns="0" rIns="0" tIns="0" bIns="0" anchor="t">
+            <a:spAutoFit/>
+          </a:bodyPr>
+          <a:lstStyle/>
+          <a:p>
+            <a:pPr algn="l"/>
+            <a:r>
+              <a:rPr sz="700" b="0" i="1">
+                <a:solidFill>
+                  <a:srgbClr val="94A3B8"/>
+                </a:solidFill>
+                <a:latin typeface="Arial"/>
+              </a:rPr>
+              <a:t>ignoroval</a:t>
+            </a:r>
+          </a:p>
+        </p:txBody>
+      </p:sp>
+      <p:sp>
+        <p:nvSpPr>
+          <p:cNvPr id="26" name="TextBox 25"/>
+          <p:cNvSpPr txBox="1"/>
+          <p:nvPr/>
+        </p:nvSpPr>
+        <p:spPr>
+          <a:xfrm>
+            <a:off x="4823460" y="2903080"/>
+            <a:ext cx="240000" cy="280000"/>
+          </a:xfrm>
+          <a:prstGeom prst="rect">
+            <a:avLst/>
+          </a:prstGeom>
+          <a:noFill/>
+        </p:spPr>
+        <p:txBody>
+          <a:bodyPr wrap="square" lIns="0" rIns="0" tIns="0" bIns="0" anchor="ctr">
+            <a:spAutoFit/>
+          </a:bodyPr>
+          <a:lstStyle/>
+          <a:p>
+            <a:pPr algn="ctr"/>
+            <a:r>
+              <a:rPr sz="1400" b="1" i="0">
+                <a:solidFill>
+                  <a:srgbClr val="FBBF24"/>
+                </a:solidFill>
+                <a:latin typeface="Arial"/>
+              </a:rPr>
+              <a:t>~</a:t>
+            </a:r>
+          </a:p>
+        </p:txBody>
+      </p:sp>
+      <p:sp>
+        <p:nvSpPr>
+          <p:cNvPr id="27" name="TextBox 26"/>
+          <p:cNvSpPr txBox="1"/>
+          <p:nvPr/>
+        </p:nvSpPr>
+        <p:spPr>
+          <a:xfrm>
+            <a:off x="5086300" y="2933080"/>
+            <a:ext cx="3450500" cy="130000"/>
+          </a:xfrm>
+          <a:prstGeom prst="rect">
+            <a:avLst/>
+          </a:prstGeom>
+          <a:noFill/>
+        </p:spPr>
+        <p:txBody>
+          <a:bodyPr wrap="square" lIns="0" rIns="0" tIns="0" bIns="0" anchor="t">
+            <a:spAutoFit/>
+          </a:bodyPr>
+          <a:lstStyle/>
+          <a:p>
+            <a:pPr algn="l"/>
+            <a:r>
+              <a:rPr sz="900" b="1" i="0">
+                <a:solidFill>
+                  <a:srgbClr val="F8FAFC"/>
+                </a:solidFill>
+                <a:latin typeface="Arial"/>
+              </a:rPr>
+              <a:t>AI sumarizace</a:t>
+            </a:r>
+          </a:p>
+        </p:txBody>
+      </p:sp>
+      <p:sp>
+        <p:nvSpPr>
+          <p:cNvPr id="28" name="TextBox 27"/>
+          <p:cNvSpPr txBox="1"/>
+          <p:nvPr/>
+        </p:nvSpPr>
+        <p:spPr>
+          <a:xfrm>
+            <a:off x="5086300" y="3053080"/>
+            <a:ext cx="3450500" cy="120000"/>
+          </a:xfrm>
+          <a:prstGeom prst="rect">
+            <a:avLst/>
+          </a:prstGeom>
+          <a:noFill/>
+        </p:spPr>
+        <p:txBody>
+          <a:bodyPr wrap="square" lIns="0" rIns="0" tIns="0" bIns="0" anchor="t">
+            <a:spAutoFit/>
+          </a:bodyPr>
+          <a:lstStyle/>
+          <a:p>
+            <a:pPr algn="l"/>
+            <a:r>
+              <a:rPr sz="700" b="0" i="1">
+                <a:solidFill>
+                  <a:srgbClr val="94A3B8"/>
+                </a:solidFill>
+                <a:latin typeface="Arial"/>
+              </a:rPr>
+              <a:t>neexistuje, jen placeholder</a:t>
+            </a:r>
+          </a:p>
+        </p:txBody>
+      </p:sp>
+      <p:sp>
+        <p:nvSpPr>
+          <p:cNvPr id="29" name="TextBox 28"/>
+          <p:cNvSpPr txBox="1"/>
+          <p:nvPr/>
+        </p:nvSpPr>
+        <p:spPr>
+          <a:xfrm>
+            <a:off x="4823460" y="3183080"/>
+            <a:ext cx="240000" cy="280000"/>
+          </a:xfrm>
+          <a:prstGeom prst="rect">
+            <a:avLst/>
+          </a:prstGeom>
+          <a:noFill/>
+        </p:spPr>
+        <p:txBody>
+          <a:bodyPr wrap="square" lIns="0" rIns="0" tIns="0" bIns="0" anchor="ctr">
+            <a:spAutoFit/>
+          </a:bodyPr>
+          <a:lstStyle/>
+          <a:p>
+            <a:pPr algn="ctr"/>
+            <a:r>
+              <a:rPr sz="1400" b="1" i="0">
+                <a:solidFill>
+                  <a:srgbClr val="F87171"/>
+                </a:solidFill>
+                <a:latin typeface="Arial"/>
+              </a:rPr>
+              <a:t>✗</a:t>
+            </a:r>
+          </a:p>
+        </p:txBody>
+      </p:sp>
+      <p:sp>
+        <p:nvSpPr>
+          <p:cNvPr id="30" name="TextBox 29"/>
+          <p:cNvSpPr txBox="1"/>
+          <p:nvPr/>
+        </p:nvSpPr>
+        <p:spPr>
+          <a:xfrm>
+            <a:off x="5086300" y="3213080"/>
+            <a:ext cx="3450500" cy="130000"/>
+          </a:xfrm>
+          <a:prstGeom prst="rect">
+            <a:avLst/>
+          </a:prstGeom>
+          <a:noFill/>
+        </p:spPr>
+        <p:txBody>
+          <a:bodyPr wrap="square" lIns="0" rIns="0" tIns="0" bIns="0" anchor="t">
+            <a:spAutoFit/>
+          </a:bodyPr>
+          <a:lstStyle/>
+          <a:p>
+            <a:pPr algn="l"/>
+            <a:r>
+              <a:rPr sz="900" b="1" i="0">
+                <a:solidFill>
+                  <a:srgbClr val="F8FAFC"/>
+                </a:solidFill>
+                <a:latin typeface="Arial"/>
+              </a:rPr>
+              <a:t>i18n, Stripe, Webhooks…</a:t>
+            </a:r>
+          </a:p>
+        </p:txBody>
+      </p:sp>
+      <p:sp>
+        <p:nvSpPr>
+          <p:cNvPr id="31" name="TextBox 30"/>
+          <p:cNvSpPr txBox="1"/>
+          <p:nvPr/>
+        </p:nvSpPr>
+        <p:spPr>
+          <a:xfrm>
+            <a:off x="5086300" y="3333080"/>
+            <a:ext cx="3450500" cy="120000"/>
+          </a:xfrm>
+          <a:prstGeom prst="rect">
+            <a:avLst/>
+          </a:prstGeom>
+          <a:noFill/>
+        </p:spPr>
+        <p:txBody>
+          <a:bodyPr wrap="square" lIns="0" rIns="0" tIns="0" bIns="0" anchor="t">
+            <a:spAutoFit/>
+          </a:bodyPr>
+          <a:lstStyle/>
+          <a:p>
+            <a:pPr algn="l"/>
+            <a:r>
+              <a:rPr sz="700" b="0" i="1">
+                <a:solidFill>
+                  <a:srgbClr val="94A3B8"/>
+                </a:solidFill>
+                <a:latin typeface="Arial"/>
+              </a:rPr>
+              <a:t>ani jedno</a:t>
+            </a:r>
+          </a:p>
+        </p:txBody>
+      </p:sp>
+      <p:sp>
+        <p:nvSpPr>
+          <p:cNvPr id="32" name="TextBox 31"/>
+          <p:cNvSpPr txBox="1"/>
+          <p:nvPr/>
+        </p:nvSpPr>
+        <p:spPr>
+          <a:xfrm>
+            <a:off x="4823460" y="3463080"/>
+            <a:ext cx="240000" cy="280000"/>
+          </a:xfrm>
+          <a:prstGeom prst="rect">
+            <a:avLst/>
+          </a:prstGeom>
+          <a:noFill/>
+        </p:spPr>
+        <p:txBody>
+          <a:bodyPr wrap="square" lIns="0" rIns="0" tIns="0" bIns="0" anchor="ctr">
+            <a:spAutoFit/>
+          </a:bodyPr>
+          <a:lstStyle/>
+          <a:p>
+            <a:pPr algn="ctr"/>
+            <a:r>
+              <a:rPr sz="1400" b="1" i="0">
+                <a:solidFill>
+                  <a:srgbClr val="34D399"/>
+                </a:solidFill>
+                <a:latin typeface="Arial"/>
+              </a:rPr>
+              <a:t>✓</a:t>
+            </a:r>
+          </a:p>
+        </p:txBody>
+      </p:sp>
+      <p:sp>
+        <p:nvSpPr>
+          <p:cNvPr id="33" name="TextBox 32"/>
+          <p:cNvSpPr txBox="1"/>
+          <p:nvPr/>
+        </p:nvSpPr>
+        <p:spPr>
+          <a:xfrm>
+            <a:off x="5086300" y="3493080"/>
+            <a:ext cx="3450500" cy="130000"/>
+          </a:xfrm>
+          <a:prstGeom prst="rect">
+            <a:avLst/>
+          </a:prstGeom>
+          <a:noFill/>
+        </p:spPr>
+        <p:txBody>
+          <a:bodyPr wrap="square" lIns="0" rIns="0" tIns="0" bIns="0" anchor="t">
+            <a:spAutoFit/>
+          </a:bodyPr>
+          <a:lstStyle/>
+          <a:p>
+            <a:pPr algn="l"/>
+            <a:r>
+              <a:rPr sz="900" b="1" i="0">
+                <a:solidFill>
+                  <a:srgbClr val="F8FAFC"/>
+                </a:solidFill>
+                <a:latin typeface="Arial"/>
+              </a:rPr>
+              <a:t>Dark mode</a:t>
+            </a:r>
+          </a:p>
+        </p:txBody>
+      </p:sp>
+      <p:sp>
+        <p:nvSpPr>
+          <p:cNvPr id="34" name="TextBox 33"/>
+          <p:cNvSpPr txBox="1"/>
+          <p:nvPr/>
+        </p:nvSpPr>
+        <p:spPr>
+          <a:xfrm>
+            <a:off x="5086300" y="3613080"/>
+            <a:ext cx="3450500" cy="120000"/>
+          </a:xfrm>
+          <a:prstGeom prst="rect">
+            <a:avLst/>
+          </a:prstGeom>
+          <a:noFill/>
+        </p:spPr>
+        <p:txBody>
+          <a:bodyPr wrap="square" lIns="0" rIns="0" tIns="0" bIns="0" anchor="t">
+            <a:spAutoFit/>
+          </a:bodyPr>
+          <a:lstStyle/>
+          <a:p>
+            <a:pPr algn="l"/>
+            <a:r>
+              <a:rPr sz="700" b="0" i="1">
+                <a:solidFill>
+                  <a:srgbClr val="94A3B8"/>
+                </a:solidFill>
+                <a:latin typeface="Arial"/>
+              </a:rPr>
+              <a:t>je</a:t>
+            </a:r>
+          </a:p>
+        </p:txBody>
+      </p:sp>
+      <p:sp>
+        <p:nvSpPr>
+          <p:cNvPr id="35" name="TextBox 34"/>
+          <p:cNvSpPr txBox="1"/>
+          <p:nvPr/>
+        </p:nvSpPr>
+        <p:spPr>
+          <a:xfrm>
+            <a:off x="4823460" y="3743080"/>
+            <a:ext cx="240000" cy="280000"/>
+          </a:xfrm>
+          <a:prstGeom prst="rect">
+            <a:avLst/>
+          </a:prstGeom>
+          <a:noFill/>
+        </p:spPr>
+        <p:txBody>
+          <a:bodyPr wrap="square" lIns="0" rIns="0" tIns="0" bIns="0" anchor="ctr">
+            <a:spAutoFit/>
+          </a:bodyPr>
+          <a:lstStyle/>
+          <a:p>
+            <a:pPr algn="ctr"/>
+            <a:r>
+              <a:rPr sz="1400" b="1" i="0">
+                <a:solidFill>
+                  <a:srgbClr val="FB923C"/>
+                </a:solidFill>
+                <a:latin typeface="Arial"/>
+              </a:rPr>
+              <a:t>⚠</a:t>
+            </a:r>
+          </a:p>
+        </p:txBody>
+      </p:sp>
+      <p:sp>
+        <p:nvSpPr>
+          <p:cNvPr id="36" name="TextBox 35"/>
+          <p:cNvSpPr txBox="1"/>
+          <p:nvPr/>
+        </p:nvSpPr>
+        <p:spPr>
+          <a:xfrm>
+            <a:off x="5086300" y="3773080"/>
+            <a:ext cx="3450500" cy="130000"/>
+          </a:xfrm>
+          <a:prstGeom prst="rect">
+            <a:avLst/>
+          </a:prstGeom>
+          <a:noFill/>
+        </p:spPr>
+        <p:txBody>
+          <a:bodyPr wrap="square" lIns="0" rIns="0" tIns="0" bIns="0" anchor="t">
+            <a:spAutoFit/>
+          </a:bodyPr>
+          <a:lstStyle/>
+          <a:p>
+            <a:pPr algn="l"/>
+            <a:r>
+              <a:rPr sz="900" b="1" i="0">
+                <a:solidFill>
+                  <a:srgbClr val="F8FAFC"/>
+                </a:solidFill>
+                <a:latin typeface="Arial"/>
+              </a:rPr>
+              <a:t>500 řádků kódu</a:t>
+            </a:r>
+          </a:p>
+        </p:txBody>
+      </p:sp>
+      <p:sp>
+        <p:nvSpPr>
+          <p:cNvPr id="37" name="TextBox 36"/>
+          <p:cNvSpPr txBox="1"/>
+          <p:nvPr/>
+        </p:nvSpPr>
+        <p:spPr>
+          <a:xfrm>
+            <a:off x="5086300" y="3893080"/>
+            <a:ext cx="3450500" cy="120000"/>
+          </a:xfrm>
+          <a:prstGeom prst="rect">
+            <a:avLst/>
+          </a:prstGeom>
+          <a:noFill/>
+        </p:spPr>
+        <p:txBody>
+          <a:bodyPr wrap="square" lIns="0" rIns="0" tIns="0" bIns="0" anchor="t">
+            <a:spAutoFit/>
+          </a:bodyPr>
+          <a:lstStyle/>
+          <a:p>
+            <a:pPr algn="l"/>
+            <a:r>
+              <a:rPr sz="700" b="0" i="1">
+                <a:solidFill>
+                  <a:srgbClr val="94A3B8"/>
+                </a:solidFill>
+                <a:latin typeface="Arial"/>
+              </a:rPr>
+              <a:t>nikdo neví co kde je</a:t>
+            </a:r>
+          </a:p>
+        </p:txBody>
+      </p:sp>
+      <p:sp>
+        <p:nvSpPr>
+          <p:cNvPr id="38" name="TextBox 37"/>
+          <p:cNvSpPr txBox="1"/>
+          <p:nvPr/>
+        </p:nvSpPr>
+        <p:spPr>
+          <a:xfrm>
+            <a:off x="457200" y="4620000"/>
+            <a:ext cx="8229600" cy="200000"/>
+          </a:xfrm>
+          <a:prstGeom prst="rect">
+            <a:avLst/>
+          </a:prstGeom>
+          <a:noFill/>
+        </p:spPr>
+        <p:txBody>
+          <a:bodyPr wrap="square" lIns="0" rIns="0" tIns="0" bIns="0" anchor="ctr">
+            <a:spAutoFit/>
+          </a:bodyPr>
+          <a:lstStyle/>
+          <a:p>
+            <a:pPr algn="ctr"/>
+            <a:r>
+              <a:rPr sz="1100" b="0" i="1">
+                <a:solidFill>
+                  <a:srgbClr val="94A3B8"/>
+                </a:solidFill>
+                <a:latin typeface="Arial"/>
+              </a:rPr>
+              <a:t>Víc slov ≠ víc porozumění. AI vybere, co si zapamatovala naposled.</a:t>
+            </a:r>
+          </a:p>
+        </p:txBody>
+      </p:sp>
+    </p:spTree>
+  </p:cSld>
+  <p:clrMapOvr>
+    <a:masterClrMapping/>
+  </p:clrMapOvr>
+</p:sld>
+</file>
+
+<file path=ppt/slides/slide13.xml><?xml version="1.0" encoding="utf-8"?>
+<p:sld xmlns:a="http://schemas.openxmlformats.org/drawingml/2006/main" xmlns:p="http://schemas.openxmlformats.org/presentationml/2006/main" xmlns:r="http://schemas.openxmlformats.org/officeDocument/2006/relationships">
+  <p:cSld>
+    <p:bg>
+      <p:bgPr>
+        <a:solidFill>
+          <a:srgbClr val="0F172A"/>
+        </a:solidFill>
+        <a:effectLst/>
+      </p:bgPr>
+    </p:bg>
+    <p:spTree>
+      <p:nvGrpSpPr>
+        <p:cNvPr id="1" name=""/>
+        <p:cNvGrpSpPr/>
+        <p:nvPr/>
+      </p:nvGrpSpPr>
+      <p:grpSpPr/>
+      <p:sp>
+        <p:nvSpPr>
+          <p:cNvPr id="2" name="TextBox 1"/>
+          <p:cNvSpPr txBox="1"/>
+          <p:nvPr/>
+        </p:nvSpPr>
+        <p:spPr>
+          <a:xfrm>
+            <a:off x="457200" y="274320"/>
+            <a:ext cx="8229600" cy="640080"/>
+          </a:xfrm>
+          <a:prstGeom prst="rect">
+            <a:avLst/>
+          </a:prstGeom>
+          <a:noFill/>
+        </p:spPr>
+        <p:txBody>
+          <a:bodyPr wrap="square" lIns="0" rIns="0" tIns="0" bIns="0" anchor="ctr">
+            <a:spAutoFit/>
+          </a:bodyPr>
+          <a:lstStyle/>
+          <a:p>
+            <a:pPr algn="l"/>
+            <a:r>
+              <a:rPr sz="2600" b="1" i="0">
+                <a:solidFill>
+                  <a:srgbClr val="F8FAFC"/>
+                </a:solidFill>
+                <a:latin typeface="Arial Black"/>
+              </a:rPr>
+              <a:t>PRD = PŘESNĚ CO POTŘEBUJEŠ</a:t>
+            </a:r>
+          </a:p>
+        </p:txBody>
+      </p:sp>
+      <p:sp>
+        <p:nvSpPr>
+          <p:cNvPr id="3" name="TextBox 2"/>
+          <p:cNvSpPr txBox="1"/>
+          <p:nvPr/>
+        </p:nvSpPr>
+        <p:spPr>
+          <a:xfrm>
+            <a:off x="457200" y="868680"/>
+            <a:ext cx="8229600" cy="320040"/>
+          </a:xfrm>
+          <a:prstGeom prst="rect">
+            <a:avLst/>
+          </a:prstGeom>
+          <a:noFill/>
+        </p:spPr>
+        <p:txBody>
+          <a:bodyPr wrap="square" lIns="0" rIns="0" tIns="0" bIns="0" anchor="ctr">
+            <a:spAutoFit/>
+          </a:bodyPr>
+          <a:lstStyle/>
+          <a:p>
+            <a:pPr algn="l"/>
+            <a:r>
+              <a:rPr sz="1400" b="0" i="1">
+                <a:solidFill>
+                  <a:srgbClr val="94A3B8"/>
+                </a:solidFill>
+                <a:latin typeface="Arial"/>
+              </a:rPr>
+              <a:t>Struktura rodí určitost — AI dostane rozhodnutí, ne hádanku</a:t>
+            </a:r>
+          </a:p>
+        </p:txBody>
+      </p:sp>
+      <p:sp>
+        <p:nvSpPr>
+          <p:cNvPr id="4" name="Rectangle 3"/>
+          <p:cNvSpPr/>
+          <p:nvPr/>
+        </p:nvSpPr>
+        <p:spPr>
+          <a:xfrm>
+            <a:off x="0" y="4892040"/>
+            <a:ext cx="9144000" cy="251460"/>
+          </a:xfrm>
+          <a:prstGeom prst="rect">
+            <a:avLst/>
+          </a:prstGeom>
+          <a:solidFill>
+            <a:srgbClr val="38BDF8"/>
+          </a:solidFill>
+          <a:ln>
+            <a:noFill/>
+          </a:ln>
+        </p:spPr>
+        <p:style>
+          <a:lnRef idx="1">
+            <a:schemeClr val="accent1"/>
+          </a:lnRef>
+          <a:fillRef idx="3">
+            <a:schemeClr val="accent1"/>
+          </a:fillRef>
+          <a:effectRef idx="2">
+            <a:schemeClr val="accent1"/>
+          </a:effectRef>
+          <a:fontRef idx="minor">
+            <a:schemeClr val="lt1"/>
+          </a:fontRef>
+        </p:style>
+        <p:txBody>
+          <a:bodyPr rtlCol="0" anchor="ctr"/>
+          <a:lstStyle/>
+          <a:p>
+            <a:pPr algn="ctr"/>
+          </a:p>
+        </p:txBody>
+      </p:sp>
+      <p:sp>
+        <p:nvSpPr>
+          <p:cNvPr id="5" name="TextBox 4"/>
+          <p:cNvSpPr txBox="1"/>
+          <p:nvPr/>
+        </p:nvSpPr>
+        <p:spPr>
+          <a:xfrm>
+            <a:off x="8046720" y="4754880"/>
+            <a:ext cx="914400" cy="274320"/>
+          </a:xfrm>
+          <a:prstGeom prst="rect">
+            <a:avLst/>
+          </a:prstGeom>
+          <a:noFill/>
+        </p:spPr>
+        <p:txBody>
+          <a:bodyPr wrap="square" lIns="0" rIns="0" tIns="0" bIns="0" anchor="ctr">
+            <a:spAutoFit/>
+          </a:bodyPr>
+          <a:lstStyle/>
+          <a:p>
+            <a:pPr algn="r"/>
+            <a:r>
+              <a:rPr sz="900" b="0" i="0">
+                <a:solidFill>
+                  <a:srgbClr val="94A3B8"/>
+                </a:solidFill>
+                <a:latin typeface="Arial"/>
+              </a:rPr>
+              <a:t>7 / 13</a:t>
+            </a:r>
+          </a:p>
+        </p:txBody>
+      </p:sp>
+      <p:sp>
+        <p:nvSpPr>
+          <p:cNvPr id="6" name="Rectangle 5"/>
+          <p:cNvSpPr/>
+          <p:nvPr/>
+        </p:nvSpPr>
+        <p:spPr>
+          <a:xfrm>
+            <a:off x="457200" y="1371600"/>
+            <a:ext cx="4000500" cy="3200000"/>
+          </a:xfrm>
+          <a:prstGeom prst="rect">
+            <a:avLst/>
+          </a:prstGeom>
+          <a:solidFill>
+            <a:srgbClr val="0F1C2C"/>
+          </a:solidFill>
+          <a:ln>
+            <a:noFill/>
+          </a:ln>
+        </p:spPr>
+        <p:style>
+          <a:lnRef idx="1">
+            <a:schemeClr val="accent1"/>
+          </a:lnRef>
+          <a:fillRef idx="3">
+            <a:schemeClr val="accent1"/>
+          </a:fillRef>
+          <a:effectRef idx="2">
+            <a:schemeClr val="accent1"/>
+          </a:effectRef>
+          <a:fontRef idx="minor">
+            <a:schemeClr val="lt1"/>
+          </a:fontRef>
+        </p:style>
+        <p:txBody>
+          <a:bodyPr rtlCol="0" anchor="ctr"/>
+          <a:lstStyle/>
+          <a:p>
+            <a:pPr algn="ctr"/>
+          </a:p>
+        </p:txBody>
+      </p:sp>
+      <p:sp>
+        <p:nvSpPr>
+          <p:cNvPr id="7" name="Rectangle 6"/>
+          <p:cNvSpPr/>
+          <p:nvPr/>
+        </p:nvSpPr>
+        <p:spPr>
+          <a:xfrm>
+            <a:off x="457200" y="1371600"/>
+            <a:ext cx="4000500" cy="45720"/>
+          </a:xfrm>
+          <a:prstGeom prst="rect">
+            <a:avLst/>
+          </a:prstGeom>
+          <a:solidFill>
+            <a:srgbClr val="34D399"/>
+          </a:solidFill>
+          <a:ln>
+            <a:noFill/>
+          </a:ln>
+        </p:spPr>
+        <p:style>
+          <a:lnRef idx="1">
+            <a:schemeClr val="accent1"/>
+          </a:lnRef>
+          <a:fillRef idx="3">
+            <a:schemeClr val="accent1"/>
+          </a:fillRef>
+          <a:effectRef idx="2">
+            <a:schemeClr val="accent1"/>
+          </a:effectRef>
+          <a:fontRef idx="minor">
+            <a:schemeClr val="lt1"/>
+          </a:fontRef>
+        </p:style>
+        <p:txBody>
+          <a:bodyPr rtlCol="0" anchor="ctr"/>
+          <a:lstStyle/>
+          <a:p>
+            <a:pPr algn="ctr"/>
+          </a:p>
+        </p:txBody>
+      </p:sp>
+      <p:sp>
+        <p:nvSpPr>
+          <p:cNvPr id="8" name="TextBox 7"/>
+          <p:cNvSpPr txBox="1"/>
+          <p:nvPr/>
+        </p:nvSpPr>
+        <p:spPr>
+          <a:xfrm>
+            <a:off x="640080" y="1463040"/>
+            <a:ext cx="3726180" cy="240000"/>
+          </a:xfrm>
+          <a:prstGeom prst="rect">
+            <a:avLst/>
+          </a:prstGeom>
+          <a:noFill/>
+        </p:spPr>
+        <p:txBody>
+          <a:bodyPr wrap="square" lIns="0" rIns="0" tIns="0" bIns="0" anchor="t">
+            <a:spAutoFit/>
+          </a:bodyPr>
+          <a:lstStyle/>
+          <a:p>
+            <a:pPr algn="l"/>
+            <a:r>
+              <a:rPr sz="1100" b="1" i="0">
+                <a:solidFill>
+                  <a:srgbClr val="34D399"/>
+                </a:solidFill>
+                <a:latin typeface="Consolas"/>
+              </a:rPr>
+              <a:t>PRD.md</a:t>
+            </a:r>
+          </a:p>
+        </p:txBody>
+      </p:sp>
+      <p:sp>
+        <p:nvSpPr>
+          <p:cNvPr id="9" name="Rectangle 8"/>
+          <p:cNvSpPr/>
+          <p:nvPr/>
+        </p:nvSpPr>
+        <p:spPr>
+          <a:xfrm>
+            <a:off x="640080" y="1783080"/>
+            <a:ext cx="3634740" cy="651410"/>
+          </a:xfrm>
+          <a:prstGeom prst="rect">
+            <a:avLst/>
+          </a:prstGeom>
+          <a:solidFill>
+            <a:srgbClr val="0F172A"/>
+          </a:solidFill>
+          <a:ln>
+            <a:noFill/>
+          </a:ln>
+        </p:spPr>
+        <p:style>
+          <a:lnRef idx="1">
+            <a:schemeClr val="accent1"/>
+          </a:lnRef>
+          <a:fillRef idx="3">
+            <a:schemeClr val="accent1"/>
+          </a:fillRef>
+          <a:effectRef idx="2">
+            <a:schemeClr val="accent1"/>
+          </a:effectRef>
+          <a:fontRef idx="minor">
+            <a:schemeClr val="lt1"/>
+          </a:fontRef>
+        </p:style>
+        <p:txBody>
+          <a:bodyPr rtlCol="0" anchor="ctr"/>
+          <a:lstStyle/>
+          <a:p>
+            <a:pPr algn="ctr"/>
+          </a:p>
+        </p:txBody>
+      </p:sp>
+      <p:sp>
+        <p:nvSpPr>
+          <p:cNvPr id="10" name="Rectangle 9"/>
+          <p:cNvSpPr/>
+          <p:nvPr/>
+        </p:nvSpPr>
+        <p:spPr>
+          <a:xfrm>
+            <a:off x="640080" y="1783080"/>
+            <a:ext cx="30000" cy="651410"/>
+          </a:xfrm>
+          <a:prstGeom prst="rect">
+            <a:avLst/>
+          </a:prstGeom>
+          <a:solidFill>
+            <a:srgbClr val="38BDF8"/>
+          </a:solidFill>
+          <a:ln>
+            <a:noFill/>
+          </a:ln>
+        </p:spPr>
+        <p:style>
+          <a:lnRef idx="1">
+            <a:schemeClr val="accent1"/>
+          </a:lnRef>
+          <a:fillRef idx="3">
+            <a:schemeClr val="accent1"/>
+          </a:fillRef>
+          <a:effectRef idx="2">
+            <a:schemeClr val="accent1"/>
+          </a:effectRef>
+          <a:fontRef idx="minor">
+            <a:schemeClr val="lt1"/>
+          </a:fontRef>
+        </p:style>
+        <p:txBody>
+          <a:bodyPr rtlCol="0" anchor="ctr"/>
+          <a:lstStyle/>
+          <a:p>
+            <a:pPr algn="ctr"/>
+          </a:p>
+        </p:txBody>
+      </p:sp>
+      <p:sp>
+        <p:nvSpPr>
+          <p:cNvPr id="11" name="TextBox 10"/>
+          <p:cNvSpPr txBox="1"/>
+          <p:nvPr/>
+        </p:nvSpPr>
+        <p:spPr>
+          <a:xfrm>
+            <a:off x="731520" y="1813080"/>
+            <a:ext cx="3360420" cy="150000"/>
+          </a:xfrm>
+          <a:prstGeom prst="rect">
+            <a:avLst/>
+          </a:prstGeom>
+          <a:noFill/>
+        </p:spPr>
+        <p:txBody>
+          <a:bodyPr wrap="square" lIns="0" rIns="0" tIns="0" bIns="0" anchor="t">
+            <a:spAutoFit/>
+          </a:bodyPr>
+          <a:lstStyle/>
+          <a:p>
+            <a:pPr algn="l"/>
+            <a:r>
+              <a:rPr sz="900" b="1" i="0">
+                <a:solidFill>
+                  <a:srgbClr val="38BDF8"/>
+                </a:solidFill>
+                <a:latin typeface="Consolas"/>
+              </a:rPr>
+              <a:t># Problém</a:t>
+            </a:r>
+          </a:p>
+        </p:txBody>
+      </p:sp>
+      <p:sp>
+        <p:nvSpPr>
+          <p:cNvPr id="12" name="TextBox 11"/>
+          <p:cNvSpPr txBox="1"/>
+          <p:nvPr/>
+        </p:nvSpPr>
+        <p:spPr>
+          <a:xfrm>
+            <a:off x="731520" y="1973080"/>
+            <a:ext cx="3360420" cy="431410"/>
+          </a:xfrm>
+          <a:prstGeom prst="rect">
+            <a:avLst/>
+          </a:prstGeom>
+          <a:noFill/>
+        </p:spPr>
+        <p:txBody>
+          <a:bodyPr wrap="square" lIns="0" rIns="0" tIns="0" bIns="0" anchor="t">
+            <a:spAutoFit/>
+          </a:bodyPr>
+          <a:lstStyle/>
+          <a:p>
+            <a:pPr algn="l"/>
+            <a:r>
+              <a:rPr sz="800" b="0" i="0">
+                <a:solidFill>
+                  <a:srgbClr val="F8FAFC"/>
+                </a:solidFill>
+                <a:latin typeface="Arial"/>
+              </a:rPr>
+              <a:t>Tým 8 lidí si přehazuje úkoly v Slacku.
+Nikdo neví, co je hotové.</a:t>
+            </a:r>
+          </a:p>
+        </p:txBody>
+      </p:sp>
+      <p:sp>
+        <p:nvSpPr>
+          <p:cNvPr id="13" name="Rectangle 12"/>
+          <p:cNvSpPr/>
+          <p:nvPr/>
+        </p:nvSpPr>
+        <p:spPr>
+          <a:xfrm>
+            <a:off x="640080" y="2480210"/>
+            <a:ext cx="3634740" cy="651410"/>
+          </a:xfrm>
+          <a:prstGeom prst="rect">
+            <a:avLst/>
+          </a:prstGeom>
+          <a:solidFill>
+            <a:srgbClr val="0F172A"/>
+          </a:solidFill>
+          <a:ln>
+            <a:noFill/>
+          </a:ln>
+        </p:spPr>
+        <p:style>
+          <a:lnRef idx="1">
+            <a:schemeClr val="accent1"/>
+          </a:lnRef>
+          <a:fillRef idx="3">
+            <a:schemeClr val="accent1"/>
+          </a:fillRef>
+          <a:effectRef idx="2">
+            <a:schemeClr val="accent1"/>
+          </a:effectRef>
+          <a:fontRef idx="minor">
+            <a:schemeClr val="lt1"/>
+          </a:fontRef>
+        </p:style>
+        <p:txBody>
+          <a:bodyPr rtlCol="0" anchor="ctr"/>
+          <a:lstStyle/>
+          <a:p>
+            <a:pPr algn="ctr"/>
+          </a:p>
+        </p:txBody>
+      </p:sp>
+      <p:sp>
+        <p:nvSpPr>
+          <p:cNvPr id="14" name="Rectangle 13"/>
+          <p:cNvSpPr/>
+          <p:nvPr/>
+        </p:nvSpPr>
+        <p:spPr>
+          <a:xfrm>
+            <a:off x="640080" y="2480210"/>
+            <a:ext cx="30000" cy="651410"/>
+          </a:xfrm>
+          <a:prstGeom prst="rect">
+            <a:avLst/>
+          </a:prstGeom>
+          <a:solidFill>
+            <a:srgbClr val="38BDF8"/>
+          </a:solidFill>
+          <a:ln>
+            <a:noFill/>
+          </a:ln>
+        </p:spPr>
+        <p:style>
+          <a:lnRef idx="1">
+            <a:schemeClr val="accent1"/>
+          </a:lnRef>
+          <a:fillRef idx="3">
+            <a:schemeClr val="accent1"/>
+          </a:fillRef>
+          <a:effectRef idx="2">
+            <a:schemeClr val="accent1"/>
+          </a:effectRef>
+          <a:fontRef idx="minor">
+            <a:schemeClr val="lt1"/>
+          </a:fontRef>
+        </p:style>
+        <p:txBody>
+          <a:bodyPr rtlCol="0" anchor="ctr"/>
+          <a:lstStyle/>
+          <a:p>
+            <a:pPr algn="ctr"/>
+          </a:p>
+        </p:txBody>
+      </p:sp>
+      <p:sp>
+        <p:nvSpPr>
+          <p:cNvPr id="15" name="TextBox 14"/>
+          <p:cNvSpPr txBox="1"/>
+          <p:nvPr/>
+        </p:nvSpPr>
+        <p:spPr>
+          <a:xfrm>
+            <a:off x="731520" y="2510210"/>
+            <a:ext cx="3360420" cy="150000"/>
+          </a:xfrm>
+          <a:prstGeom prst="rect">
+            <a:avLst/>
+          </a:prstGeom>
+          <a:noFill/>
+        </p:spPr>
+        <p:txBody>
+          <a:bodyPr wrap="square" lIns="0" rIns="0" tIns="0" bIns="0" anchor="t">
+            <a:spAutoFit/>
+          </a:bodyPr>
+          <a:lstStyle/>
+          <a:p>
+            <a:pPr algn="l"/>
+            <a:r>
+              <a:rPr sz="900" b="1" i="0">
+                <a:solidFill>
+                  <a:srgbClr val="38BDF8"/>
+                </a:solidFill>
+                <a:latin typeface="Consolas"/>
+              </a:rPr>
+              <a:t># Uživatel</a:t>
+            </a:r>
+          </a:p>
+        </p:txBody>
+      </p:sp>
+      <p:sp>
+        <p:nvSpPr>
+          <p:cNvPr id="16" name="TextBox 15"/>
+          <p:cNvSpPr txBox="1"/>
+          <p:nvPr/>
+        </p:nvSpPr>
+        <p:spPr>
+          <a:xfrm>
+            <a:off x="731520" y="2670210"/>
+            <a:ext cx="3360420" cy="431410"/>
+          </a:xfrm>
+          <a:prstGeom prst="rect">
+            <a:avLst/>
+          </a:prstGeom>
+          <a:noFill/>
+        </p:spPr>
+        <p:txBody>
+          <a:bodyPr wrap="square" lIns="0" rIns="0" tIns="0" bIns="0" anchor="t">
+            <a:spAutoFit/>
+          </a:bodyPr>
+          <a:lstStyle/>
+          <a:p>
+            <a:pPr algn="l"/>
+            <a:r>
+              <a:rPr sz="800" b="0" i="0">
+                <a:solidFill>
+                  <a:srgbClr val="F8FAFC"/>
+                </a:solidFill>
+                <a:latin typeface="Arial"/>
+              </a:rPr>
+              <a:t>Projekt manažer v malém studiu.
+Otevře appku 5× denně.</a:t>
+            </a:r>
+          </a:p>
+        </p:txBody>
+      </p:sp>
+      <p:sp>
+        <p:nvSpPr>
+          <p:cNvPr id="17" name="Rectangle 16"/>
+          <p:cNvSpPr/>
+          <p:nvPr/>
+        </p:nvSpPr>
+        <p:spPr>
+          <a:xfrm>
+            <a:off x="640080" y="3177340"/>
+            <a:ext cx="3634740" cy="651410"/>
+          </a:xfrm>
+          <a:prstGeom prst="rect">
+            <a:avLst/>
+          </a:prstGeom>
+          <a:solidFill>
+            <a:srgbClr val="0F172A"/>
+          </a:solidFill>
+          <a:ln>
+            <a:noFill/>
+          </a:ln>
+        </p:spPr>
+        <p:style>
+          <a:lnRef idx="1">
+            <a:schemeClr val="accent1"/>
+          </a:lnRef>
+          <a:fillRef idx="3">
+            <a:schemeClr val="accent1"/>
+          </a:fillRef>
+          <a:effectRef idx="2">
+            <a:schemeClr val="accent1"/>
+          </a:effectRef>
+          <a:fontRef idx="minor">
+            <a:schemeClr val="lt1"/>
+          </a:fontRef>
+        </p:style>
+        <p:txBody>
+          <a:bodyPr rtlCol="0" anchor="ctr"/>
+          <a:lstStyle/>
+          <a:p>
+            <a:pPr algn="ctr"/>
+          </a:p>
+        </p:txBody>
+      </p:sp>
+      <p:sp>
+        <p:nvSpPr>
+          <p:cNvPr id="18" name="Rectangle 17"/>
+          <p:cNvSpPr/>
+          <p:nvPr/>
+        </p:nvSpPr>
+        <p:spPr>
+          <a:xfrm>
+            <a:off x="640080" y="3177340"/>
+            <a:ext cx="30000" cy="651410"/>
+          </a:xfrm>
+          <a:prstGeom prst="rect">
+            <a:avLst/>
+          </a:prstGeom>
+          <a:solidFill>
+            <a:srgbClr val="38BDF8"/>
+          </a:solidFill>
+          <a:ln>
+            <a:noFill/>
+          </a:ln>
+        </p:spPr>
+        <p:style>
+          <a:lnRef idx="1">
+            <a:schemeClr val="accent1"/>
+          </a:lnRef>
+          <a:fillRef idx="3">
+            <a:schemeClr val="accent1"/>
+          </a:fillRef>
+          <a:effectRef idx="2">
+            <a:schemeClr val="accent1"/>
+          </a:effectRef>
+          <a:fontRef idx="minor">
+            <a:schemeClr val="lt1"/>
+          </a:fontRef>
+        </p:style>
+        <p:txBody>
+          <a:bodyPr rtlCol="0" anchor="ctr"/>
+          <a:lstStyle/>
+          <a:p>
+            <a:pPr algn="ctr"/>
+          </a:p>
+        </p:txBody>
+      </p:sp>
+      <p:sp>
+        <p:nvSpPr>
+          <p:cNvPr id="19" name="TextBox 18"/>
+          <p:cNvSpPr txBox="1"/>
+          <p:nvPr/>
+        </p:nvSpPr>
+        <p:spPr>
+          <a:xfrm>
+            <a:off x="731520" y="3207340"/>
+            <a:ext cx="3360420" cy="150000"/>
+          </a:xfrm>
+          <a:prstGeom prst="rect">
+            <a:avLst/>
+          </a:prstGeom>
+          <a:noFill/>
+        </p:spPr>
+        <p:txBody>
+          <a:bodyPr wrap="square" lIns="0" rIns="0" tIns="0" bIns="0" anchor="t">
+            <a:spAutoFit/>
+          </a:bodyPr>
+          <a:lstStyle/>
+          <a:p>
+            <a:pPr algn="l"/>
+            <a:r>
+              <a:rPr sz="900" b="1" i="0">
+                <a:solidFill>
+                  <a:srgbClr val="38BDF8"/>
+                </a:solidFill>
+                <a:latin typeface="Consolas"/>
+              </a:rPr>
+              <a:t># Top 3 akce</a:t>
+            </a:r>
+          </a:p>
+        </p:txBody>
+      </p:sp>
+      <p:sp>
+        <p:nvSpPr>
+          <p:cNvPr id="20" name="TextBox 19"/>
+          <p:cNvSpPr txBox="1"/>
+          <p:nvPr/>
+        </p:nvSpPr>
+        <p:spPr>
+          <a:xfrm>
+            <a:off x="731520" y="3367340"/>
+            <a:ext cx="3360420" cy="431410"/>
+          </a:xfrm>
+          <a:prstGeom prst="rect">
+            <a:avLst/>
+          </a:prstGeom>
+          <a:noFill/>
+        </p:spPr>
+        <p:txBody>
+          <a:bodyPr wrap="square" lIns="0" rIns="0" tIns="0" bIns="0" anchor="t">
+            <a:spAutoFit/>
+          </a:bodyPr>
+          <a:lstStyle/>
+          <a:p>
+            <a:pPr algn="l"/>
+            <a:r>
+              <a:rPr sz="800" b="0" i="0">
+                <a:solidFill>
+                  <a:srgbClr val="F8FAFC"/>
+                </a:solidFill>
+                <a:latin typeface="Arial"/>
+              </a:rPr>
+              <a:t>1. Přidat úkol  2. Označit hotovo
+3. Přiřadit kolegu</a:t>
+            </a:r>
+          </a:p>
+        </p:txBody>
+      </p:sp>
+      <p:sp>
+        <p:nvSpPr>
+          <p:cNvPr id="21" name="Rectangle 20"/>
+          <p:cNvSpPr/>
+          <p:nvPr/>
+        </p:nvSpPr>
+        <p:spPr>
+          <a:xfrm>
+            <a:off x="640080" y="3874470"/>
+            <a:ext cx="3634740" cy="651410"/>
+          </a:xfrm>
+          <a:prstGeom prst="rect">
+            <a:avLst/>
+          </a:prstGeom>
+          <a:solidFill>
+            <a:srgbClr val="0F172A"/>
+          </a:solidFill>
+          <a:ln>
+            <a:noFill/>
+          </a:ln>
+        </p:spPr>
+        <p:style>
+          <a:lnRef idx="1">
+            <a:schemeClr val="accent1"/>
+          </a:lnRef>
+          <a:fillRef idx="3">
+            <a:schemeClr val="accent1"/>
+          </a:fillRef>
+          <a:effectRef idx="2">
+            <a:schemeClr val="accent1"/>
+          </a:effectRef>
+          <a:fontRef idx="minor">
+            <a:schemeClr val="lt1"/>
+          </a:fontRef>
+        </p:style>
+        <p:txBody>
+          <a:bodyPr rtlCol="0" anchor="ctr"/>
+          <a:lstStyle/>
+          <a:p>
+            <a:pPr algn="ctr"/>
+          </a:p>
+        </p:txBody>
+      </p:sp>
+      <p:sp>
+        <p:nvSpPr>
+          <p:cNvPr id="22" name="Rectangle 21"/>
+          <p:cNvSpPr/>
+          <p:nvPr/>
+        </p:nvSpPr>
+        <p:spPr>
+          <a:xfrm>
+            <a:off x="640080" y="3874470"/>
+            <a:ext cx="30000" cy="651410"/>
+          </a:xfrm>
+          <a:prstGeom prst="rect">
+            <a:avLst/>
+          </a:prstGeom>
+          <a:solidFill>
+            <a:srgbClr val="38BDF8"/>
+          </a:solidFill>
+          <a:ln>
+            <a:noFill/>
+          </a:ln>
+        </p:spPr>
+        <p:style>
+          <a:lnRef idx="1">
+            <a:schemeClr val="accent1"/>
+          </a:lnRef>
+          <a:fillRef idx="3">
+            <a:schemeClr val="accent1"/>
+          </a:fillRef>
+          <a:effectRef idx="2">
+            <a:schemeClr val="accent1"/>
+          </a:effectRef>
+          <a:fontRef idx="minor">
+            <a:schemeClr val="lt1"/>
+          </a:fontRef>
+        </p:style>
+        <p:txBody>
+          <a:bodyPr rtlCol="0" anchor="ctr"/>
+          <a:lstStyle/>
+          <a:p>
+            <a:pPr algn="ctr"/>
+          </a:p>
+        </p:txBody>
+      </p:sp>
+      <p:sp>
+        <p:nvSpPr>
+          <p:cNvPr id="23" name="TextBox 22"/>
+          <p:cNvSpPr txBox="1"/>
+          <p:nvPr/>
+        </p:nvSpPr>
+        <p:spPr>
+          <a:xfrm>
+            <a:off x="731520" y="3904470"/>
+            <a:ext cx="3360420" cy="150000"/>
+          </a:xfrm>
+          <a:prstGeom prst="rect">
+            <a:avLst/>
+          </a:prstGeom>
+          <a:noFill/>
+        </p:spPr>
+        <p:txBody>
+          <a:bodyPr wrap="square" lIns="0" rIns="0" tIns="0" bIns="0" anchor="t">
+            <a:spAutoFit/>
+          </a:bodyPr>
+          <a:lstStyle/>
+          <a:p>
+            <a:pPr algn="l"/>
+            <a:r>
+              <a:rPr sz="900" b="1" i="0">
+                <a:solidFill>
+                  <a:srgbClr val="38BDF8"/>
+                </a:solidFill>
+                <a:latin typeface="Consolas"/>
+              </a:rPr>
+              <a:t># Data model</a:t>
+            </a:r>
+          </a:p>
+        </p:txBody>
+      </p:sp>
+      <p:sp>
+        <p:nvSpPr>
+          <p:cNvPr id="24" name="TextBox 23"/>
+          <p:cNvSpPr txBox="1"/>
+          <p:nvPr/>
+        </p:nvSpPr>
+        <p:spPr>
+          <a:xfrm>
+            <a:off x="731520" y="4064470"/>
+            <a:ext cx="3360420" cy="431410"/>
+          </a:xfrm>
+          <a:prstGeom prst="rect">
+            <a:avLst/>
+          </a:prstGeom>
+          <a:noFill/>
+        </p:spPr>
+        <p:txBody>
+          <a:bodyPr wrap="square" lIns="0" rIns="0" tIns="0" bIns="0" anchor="t">
+            <a:spAutoFit/>
+          </a:bodyPr>
+          <a:lstStyle/>
+          <a:p>
+            <a:pPr algn="l"/>
+            <a:r>
+              <a:rPr sz="800" b="0" i="0">
+                <a:solidFill>
+                  <a:srgbClr val="F8FAFC"/>
+                </a:solidFill>
+                <a:latin typeface="Arial"/>
+              </a:rPr>
+              <a:t>tasks (id, title, status, owner_id)
+users (id, name, avatar)</a:t>
+            </a:r>
+          </a:p>
+        </p:txBody>
+      </p:sp>
+      <p:sp>
+        <p:nvSpPr>
+          <p:cNvPr id="25" name="TextBox 24"/>
+          <p:cNvSpPr txBox="1"/>
+          <p:nvPr/>
+        </p:nvSpPr>
+        <p:spPr>
+          <a:xfrm>
+            <a:off x="4457700" y="2831600"/>
+            <a:ext cx="228600" cy="280000"/>
+          </a:xfrm>
+          <a:prstGeom prst="rect">
+            <a:avLst/>
+          </a:prstGeom>
+          <a:noFill/>
+        </p:spPr>
+        <p:txBody>
+          <a:bodyPr wrap="square" lIns="0" rIns="0" tIns="0" bIns="0" anchor="ctr">
+            <a:spAutoFit/>
+          </a:bodyPr>
+          <a:lstStyle/>
+          <a:p>
+            <a:pPr algn="ctr"/>
+            <a:r>
+              <a:rPr sz="2400" b="1" i="0">
+                <a:solidFill>
+                  <a:srgbClr val="34D399"/>
+                </a:solidFill>
+                <a:latin typeface="Arial"/>
+              </a:rPr>
+              <a:t>→</a:t>
+            </a:r>
+          </a:p>
+        </p:txBody>
+      </p:sp>
+      <p:sp>
+        <p:nvSpPr>
+          <p:cNvPr id="26" name="Rectangle 25"/>
+          <p:cNvSpPr/>
+          <p:nvPr/>
+        </p:nvSpPr>
+        <p:spPr>
+          <a:xfrm>
+            <a:off x="4686300" y="1371600"/>
+            <a:ext cx="4000500" cy="3200000"/>
+          </a:xfrm>
+          <a:prstGeom prst="rect">
+            <a:avLst/>
+          </a:prstGeom>
+          <a:solidFill>
+            <a:srgbClr val="0F1C2C"/>
+          </a:solidFill>
+          <a:ln>
+            <a:noFill/>
+          </a:ln>
+        </p:spPr>
+        <p:style>
+          <a:lnRef idx="1">
+            <a:schemeClr val="accent1"/>
+          </a:lnRef>
+          <a:fillRef idx="3">
+            <a:schemeClr val="accent1"/>
+          </a:fillRef>
+          <a:effectRef idx="2">
+            <a:schemeClr val="accent1"/>
+          </a:effectRef>
+          <a:fontRef idx="minor">
+            <a:schemeClr val="lt1"/>
+          </a:fontRef>
+        </p:style>
+        <p:txBody>
+          <a:bodyPr rtlCol="0" anchor="ctr"/>
+          <a:lstStyle/>
+          <a:p>
+            <a:pPr algn="ctr"/>
+          </a:p>
+        </p:txBody>
+      </p:sp>
+      <p:sp>
+        <p:nvSpPr>
+          <p:cNvPr id="27" name="Rectangle 26"/>
+          <p:cNvSpPr/>
+          <p:nvPr/>
+        </p:nvSpPr>
+        <p:spPr>
+          <a:xfrm>
+            <a:off x="4686300" y="1371600"/>
+            <a:ext cx="4000500" cy="45720"/>
+          </a:xfrm>
+          <a:prstGeom prst="rect">
+            <a:avLst/>
+          </a:prstGeom>
+          <a:solidFill>
+            <a:srgbClr val="38BDF8"/>
+          </a:solidFill>
+          <a:ln>
+            <a:noFill/>
+          </a:ln>
+        </p:spPr>
+        <p:style>
+          <a:lnRef idx="1">
+            <a:schemeClr val="accent1"/>
+          </a:lnRef>
+          <a:fillRef idx="3">
+            <a:schemeClr val="accent1"/>
+          </a:fillRef>
+          <a:effectRef idx="2">
+            <a:schemeClr val="accent1"/>
+          </a:effectRef>
+          <a:fontRef idx="minor">
+            <a:schemeClr val="lt1"/>
+          </a:fontRef>
+        </p:style>
+        <p:txBody>
+          <a:bodyPr rtlCol="0" anchor="ctr"/>
+          <a:lstStyle/>
+          <a:p>
+            <a:pPr algn="ctr"/>
+          </a:p>
+        </p:txBody>
+      </p:sp>
+      <p:sp>
+        <p:nvSpPr>
+          <p:cNvPr id="28" name="TextBox 27"/>
+          <p:cNvSpPr txBox="1"/>
+          <p:nvPr/>
+        </p:nvSpPr>
+        <p:spPr>
+          <a:xfrm>
+            <a:off x="4869180" y="1463040"/>
+            <a:ext cx="3726180" cy="240000"/>
+          </a:xfrm>
+          <a:prstGeom prst="rect">
+            <a:avLst/>
+          </a:prstGeom>
+          <a:noFill/>
+        </p:spPr>
+        <p:txBody>
+          <a:bodyPr wrap="square" lIns="0" rIns="0" tIns="0" bIns="0" anchor="t">
+            <a:spAutoFit/>
+          </a:bodyPr>
+          <a:lstStyle/>
+          <a:p>
+            <a:pPr algn="l"/>
+            <a:r>
+              <a:rPr sz="1100" b="1" i="0">
+                <a:solidFill>
+                  <a:srgbClr val="38BDF8"/>
+                </a:solidFill>
+                <a:latin typeface="Arial"/>
+              </a:rPr>
+              <a:t>VÝSLEDNÁ APPKA</a:t>
+            </a:r>
+          </a:p>
+        </p:txBody>
+      </p:sp>
+      <p:sp>
+        <p:nvSpPr>
+          <p:cNvPr id="29" name="TextBox 28"/>
+          <p:cNvSpPr txBox="1"/>
+          <p:nvPr/>
+        </p:nvSpPr>
+        <p:spPr>
+          <a:xfrm>
+            <a:off x="4869180" y="1783080"/>
+            <a:ext cx="3634740" cy="220000"/>
+          </a:xfrm>
+          <a:prstGeom prst="rect">
+            <a:avLst/>
+          </a:prstGeom>
+          <a:noFill/>
+        </p:spPr>
+        <p:txBody>
+          <a:bodyPr wrap="square" lIns="0" rIns="0" tIns="0" bIns="0" anchor="ctr">
+            <a:spAutoFit/>
+          </a:bodyPr>
+          <a:lstStyle/>
+          <a:p>
+            <a:pPr algn="l"/>
+            <a:r>
+              <a:rPr sz="1100" b="1" i="0">
+                <a:solidFill>
+                  <a:srgbClr val="F8FAFC"/>
+                </a:solidFill>
+                <a:latin typeface="Arial"/>
+              </a:rPr>
+              <a:t>Studio Tasks — 8 lidí, 12 úkolů</a:t>
+            </a:r>
+          </a:p>
+        </p:txBody>
+      </p:sp>
+      <p:sp>
+        <p:nvSpPr>
+          <p:cNvPr id="30" name="Rectangle 29"/>
+          <p:cNvSpPr/>
+          <p:nvPr/>
+        </p:nvSpPr>
+        <p:spPr>
+          <a:xfrm>
+            <a:off x="4869180" y="2043080"/>
+            <a:ext cx="3034740" cy="200000"/>
+          </a:xfrm>
+          <a:prstGeom prst="rect">
+            <a:avLst/>
+          </a:prstGeom>
+          <a:solidFill>
+            <a:srgbClr val="0F172A"/>
+          </a:solidFill>
+          <a:ln>
+            <a:solidFill>
+              <a:srgbClr val="334155"/>
+            </a:solidFill>
+          </a:ln>
+        </p:spPr>
+        <p:style>
+          <a:lnRef idx="1">
+            <a:schemeClr val="accent1"/>
+          </a:lnRef>
+          <a:fillRef idx="3">
+            <a:schemeClr val="accent1"/>
+          </a:fillRef>
+          <a:effectRef idx="2">
+            <a:schemeClr val="accent1"/>
+          </a:effectRef>
+          <a:fontRef idx="minor">
+            <a:schemeClr val="lt1"/>
+          </a:fontRef>
+        </p:style>
+        <p:txBody>
+          <a:bodyPr rtlCol="0" anchor="ctr"/>
+          <a:lstStyle/>
+          <a:p>
+            <a:pPr algn="ctr"/>
+          </a:p>
+        </p:txBody>
+      </p:sp>
+      <p:sp>
+        <p:nvSpPr>
+          <p:cNvPr id="31" name="TextBox 30"/>
+          <p:cNvSpPr txBox="1"/>
+          <p:nvPr/>
+        </p:nvSpPr>
+        <p:spPr>
+          <a:xfrm>
+            <a:off x="4929180" y="2043080"/>
+            <a:ext cx="2934740" cy="200000"/>
+          </a:xfrm>
+          <a:prstGeom prst="rect">
+            <a:avLst/>
+          </a:prstGeom>
+          <a:noFill/>
+        </p:spPr>
+        <p:txBody>
+          <a:bodyPr wrap="square" lIns="0" rIns="0" tIns="0" bIns="0" anchor="ctr">
+            <a:spAutoFit/>
+          </a:bodyPr>
+          <a:lstStyle/>
+          <a:p>
+            <a:pPr algn="l"/>
+            <a:r>
+              <a:rPr sz="800" b="0" i="1">
+                <a:solidFill>
+                  <a:srgbClr val="64748B"/>
+                </a:solidFill>
+                <a:latin typeface="Arial"/>
+              </a:rPr>
+              <a:t>+ Přidej úkol…</a:t>
+            </a:r>
+          </a:p>
+        </p:txBody>
+      </p:sp>
+      <p:sp>
+        <p:nvSpPr>
+          <p:cNvPr id="32" name="Rectangle 31"/>
+          <p:cNvSpPr/>
+          <p:nvPr/>
+        </p:nvSpPr>
+        <p:spPr>
+          <a:xfrm>
+            <a:off x="7943920" y="2043080"/>
+            <a:ext cx="560000" cy="200000"/>
+          </a:xfrm>
+          <a:prstGeom prst="rect">
+            <a:avLst/>
+          </a:prstGeom>
+          <a:solidFill>
+            <a:srgbClr val="38BDF8"/>
+          </a:solidFill>
+          <a:ln>
+            <a:noFill/>
+          </a:ln>
+        </p:spPr>
+        <p:style>
+          <a:lnRef idx="1">
+            <a:schemeClr val="accent1"/>
+          </a:lnRef>
+          <a:fillRef idx="3">
+            <a:schemeClr val="accent1"/>
+          </a:fillRef>
+          <a:effectRef idx="2">
+            <a:schemeClr val="accent1"/>
+          </a:effectRef>
+          <a:fontRef idx="minor">
+            <a:schemeClr val="lt1"/>
+          </a:fontRef>
+        </p:style>
+        <p:txBody>
+          <a:bodyPr rtlCol="0" anchor="ctr"/>
+          <a:lstStyle/>
+          <a:p>
+            <a:pPr algn="ctr"/>
+          </a:p>
+        </p:txBody>
+      </p:sp>
+      <p:sp>
+        <p:nvSpPr>
+          <p:cNvPr id="33" name="TextBox 32"/>
+          <p:cNvSpPr txBox="1"/>
+          <p:nvPr/>
+        </p:nvSpPr>
+        <p:spPr>
+          <a:xfrm>
+            <a:off x="7943920" y="2043080"/>
+            <a:ext cx="560000" cy="200000"/>
+          </a:xfrm>
+          <a:prstGeom prst="rect">
+            <a:avLst/>
+          </a:prstGeom>
+          <a:noFill/>
+        </p:spPr>
+        <p:txBody>
+          <a:bodyPr wrap="square" lIns="0" rIns="0" tIns="0" bIns="0" anchor="ctr">
+            <a:spAutoFit/>
+          </a:bodyPr>
+          <a:lstStyle/>
+          <a:p>
+            <a:pPr algn="ctr"/>
+            <a:r>
+              <a:rPr sz="800" b="1" i="0">
+                <a:solidFill>
+                  <a:srgbClr val="0F172A"/>
+                </a:solidFill>
+                <a:latin typeface="Arial"/>
+              </a:rPr>
+              <a:t>Přidat</a:t>
+            </a:r>
+          </a:p>
+        </p:txBody>
+      </p:sp>
+      <p:sp>
+        <p:nvSpPr>
+          <p:cNvPr id="34" name="Rectangle 33"/>
+          <p:cNvSpPr/>
+          <p:nvPr/>
+        </p:nvSpPr>
+        <p:spPr>
+          <a:xfrm>
+            <a:off x="4869180" y="2303080"/>
+            <a:ext cx="3634740" cy="260000"/>
+          </a:xfrm>
+          <a:prstGeom prst="rect">
+            <a:avLst/>
+          </a:prstGeom>
+          <a:solidFill>
+            <a:srgbClr val="0F172A"/>
+          </a:solidFill>
+          <a:ln>
+            <a:noFill/>
+          </a:ln>
+        </p:spPr>
+        <p:style>
+          <a:lnRef idx="1">
+            <a:schemeClr val="accent1"/>
+          </a:lnRef>
+          <a:fillRef idx="3">
+            <a:schemeClr val="accent1"/>
+          </a:fillRef>
+          <a:effectRef idx="2">
+            <a:schemeClr val="accent1"/>
+          </a:effectRef>
+          <a:fontRef idx="minor">
+            <a:schemeClr val="lt1"/>
+          </a:fontRef>
+        </p:style>
+        <p:txBody>
+          <a:bodyPr rtlCol="0" anchor="ctr"/>
+          <a:lstStyle/>
+          <a:p>
+            <a:pPr algn="ctr"/>
+          </a:p>
+        </p:txBody>
+      </p:sp>
+      <p:sp>
+        <p:nvSpPr>
+          <p:cNvPr id="35" name="TextBox 34"/>
+          <p:cNvSpPr txBox="1"/>
+          <p:nvPr/>
+        </p:nvSpPr>
+        <p:spPr>
+          <a:xfrm>
+            <a:off x="4914900" y="2303080"/>
+            <a:ext cx="220000" cy="260000"/>
+          </a:xfrm>
+          <a:prstGeom prst="rect">
+            <a:avLst/>
+          </a:prstGeom>
+          <a:noFill/>
+        </p:spPr>
+        <p:txBody>
+          <a:bodyPr wrap="square" lIns="0" rIns="0" tIns="0" bIns="0" anchor="ctr">
+            <a:spAutoFit/>
+          </a:bodyPr>
+          <a:lstStyle/>
+          <a:p>
+            <a:pPr algn="ctr"/>
+            <a:r>
+              <a:rPr sz="1000" b="0" i="0">
+                <a:solidFill>
+                  <a:srgbClr val="94A3B8"/>
+                </a:solidFill>
+                <a:latin typeface="Arial"/>
+              </a:rPr>
+              <a:t>☐</a:t>
+            </a:r>
+          </a:p>
+        </p:txBody>
+      </p:sp>
+      <p:sp>
+        <p:nvSpPr>
+          <p:cNvPr id="36" name="TextBox 35"/>
+          <p:cNvSpPr txBox="1"/>
+          <p:nvPr/>
+        </p:nvSpPr>
+        <p:spPr>
+          <a:xfrm>
+            <a:off x="5159180" y="2303080"/>
+            <a:ext cx="2994740" cy="260000"/>
+          </a:xfrm>
+          <a:prstGeom prst="rect">
+            <a:avLst/>
+          </a:prstGeom>
+          <a:noFill/>
+        </p:spPr>
+        <p:txBody>
+          <a:bodyPr wrap="square" lIns="0" rIns="0" tIns="0" bIns="0" anchor="ctr">
+            <a:spAutoFit/>
+          </a:bodyPr>
+          <a:lstStyle/>
+          <a:p>
+            <a:pPr algn="l"/>
+            <a:r>
+              <a:rPr sz="800" b="0" i="0">
+                <a:solidFill>
+                  <a:srgbClr val="F8FAFC"/>
+                </a:solidFill>
+                <a:latin typeface="Arial"/>
+              </a:rPr>
+              <a:t>Deploy v2 na staging</a:t>
+            </a:r>
+          </a:p>
+        </p:txBody>
+      </p:sp>
+      <p:sp>
+        <p:nvSpPr>
+          <p:cNvPr id="37" name="Oval 36"/>
+          <p:cNvSpPr/>
+          <p:nvPr/>
+        </p:nvSpPr>
+        <p:spPr>
+          <a:xfrm>
+            <a:off x="8243920" y="2343080"/>
+            <a:ext cx="180000" cy="180000"/>
+          </a:xfrm>
+          <a:prstGeom prst="ellipse">
+            <a:avLst/>
+          </a:prstGeom>
+          <a:solidFill>
+            <a:srgbClr val="FB923C"/>
+          </a:solidFill>
+          <a:ln>
+            <a:noFill/>
+          </a:ln>
+        </p:spPr>
+        <p:style>
+          <a:lnRef idx="1">
+            <a:schemeClr val="accent1"/>
+          </a:lnRef>
+          <a:fillRef idx="3">
+            <a:schemeClr val="accent1"/>
+          </a:fillRef>
+          <a:effectRef idx="2">
+            <a:schemeClr val="accent1"/>
+          </a:effectRef>
+          <a:fontRef idx="minor">
+            <a:schemeClr val="lt1"/>
+          </a:fontRef>
+        </p:style>
+        <p:txBody>
+          <a:bodyPr rtlCol="0" anchor="ctr"/>
+          <a:lstStyle/>
+          <a:p>
+            <a:pPr algn="ctr"/>
+          </a:p>
+        </p:txBody>
+      </p:sp>
+      <p:sp>
+        <p:nvSpPr>
+          <p:cNvPr id="38" name="TextBox 37"/>
+          <p:cNvSpPr txBox="1"/>
+          <p:nvPr/>
+        </p:nvSpPr>
+        <p:spPr>
+          <a:xfrm>
+            <a:off x="8243920" y="2343080"/>
+            <a:ext cx="180000" cy="180000"/>
+          </a:xfrm>
+          <a:prstGeom prst="rect">
+            <a:avLst/>
+          </a:prstGeom>
+          <a:noFill/>
+        </p:spPr>
+        <p:txBody>
+          <a:bodyPr wrap="square" lIns="0" rIns="0" tIns="0" bIns="0" anchor="ctr">
+            <a:spAutoFit/>
+          </a:bodyPr>
+          <a:lstStyle/>
+          <a:p>
+            <a:pPr algn="ctr"/>
+            <a:r>
+              <a:rPr sz="500" b="1" i="0">
+                <a:solidFill>
+                  <a:srgbClr val="F8FAFC"/>
+                </a:solidFill>
+                <a:latin typeface="Arial"/>
+              </a:rPr>
+              <a:t>AK</a:t>
+            </a:r>
+          </a:p>
+        </p:txBody>
+      </p:sp>
+      <p:sp>
+        <p:nvSpPr>
+          <p:cNvPr id="39" name="Rectangle 38"/>
+          <p:cNvSpPr/>
+          <p:nvPr/>
+        </p:nvSpPr>
+        <p:spPr>
+          <a:xfrm>
+            <a:off x="4869180" y="2593080"/>
+            <a:ext cx="3634740" cy="260000"/>
+          </a:xfrm>
+          <a:prstGeom prst="rect">
+            <a:avLst/>
+          </a:prstGeom>
+          <a:solidFill>
+            <a:srgbClr val="0F172A"/>
+          </a:solidFill>
+          <a:ln>
+            <a:noFill/>
+          </a:ln>
+        </p:spPr>
+        <p:style>
+          <a:lnRef idx="1">
+            <a:schemeClr val="accent1"/>
+          </a:lnRef>
+          <a:fillRef idx="3">
+            <a:schemeClr val="accent1"/>
+          </a:fillRef>
+          <a:effectRef idx="2">
+            <a:schemeClr val="accent1"/>
+          </a:effectRef>
+          <a:fontRef idx="minor">
+            <a:schemeClr val="lt1"/>
+          </a:fontRef>
+        </p:style>
+        <p:txBody>
+          <a:bodyPr rtlCol="0" anchor="ctr"/>
+          <a:lstStyle/>
+          <a:p>
+            <a:pPr algn="ctr"/>
+          </a:p>
+        </p:txBody>
+      </p:sp>
+      <p:sp>
+        <p:nvSpPr>
+          <p:cNvPr id="40" name="TextBox 39"/>
+          <p:cNvSpPr txBox="1"/>
+          <p:nvPr/>
+        </p:nvSpPr>
+        <p:spPr>
+          <a:xfrm>
+            <a:off x="4914900" y="2593080"/>
+            <a:ext cx="220000" cy="260000"/>
+          </a:xfrm>
+          <a:prstGeom prst="rect">
+            <a:avLst/>
+          </a:prstGeom>
+          <a:noFill/>
+        </p:spPr>
+        <p:txBody>
+          <a:bodyPr wrap="square" lIns="0" rIns="0" tIns="0" bIns="0" anchor="ctr">
+            <a:spAutoFit/>
+          </a:bodyPr>
+          <a:lstStyle/>
+          <a:p>
+            <a:pPr algn="ctr"/>
+            <a:r>
+              <a:rPr sz="1000" b="0" i="0">
+                <a:solidFill>
+                  <a:srgbClr val="94A3B8"/>
+                </a:solidFill>
+                <a:latin typeface="Arial"/>
+              </a:rPr>
+              <a:t>☐</a:t>
+            </a:r>
+          </a:p>
+        </p:txBody>
+      </p:sp>
+      <p:sp>
+        <p:nvSpPr>
+          <p:cNvPr id="41" name="TextBox 40"/>
+          <p:cNvSpPr txBox="1"/>
+          <p:nvPr/>
+        </p:nvSpPr>
+        <p:spPr>
+          <a:xfrm>
+            <a:off x="5159180" y="2593080"/>
+            <a:ext cx="2994740" cy="260000"/>
+          </a:xfrm>
+          <a:prstGeom prst="rect">
+            <a:avLst/>
+          </a:prstGeom>
+          <a:noFill/>
+        </p:spPr>
+        <p:txBody>
+          <a:bodyPr wrap="square" lIns="0" rIns="0" tIns="0" bIns="0" anchor="ctr">
+            <a:spAutoFit/>
+          </a:bodyPr>
+          <a:lstStyle/>
+          <a:p>
+            <a:pPr algn="l"/>
+            <a:r>
+              <a:rPr sz="800" b="0" i="0">
+                <a:solidFill>
+                  <a:srgbClr val="F8FAFC"/>
+                </a:solidFill>
+                <a:latin typeface="Arial"/>
+              </a:rPr>
+              <a:t>Review PR #42</a:t>
+            </a:r>
+          </a:p>
+        </p:txBody>
+      </p:sp>
+      <p:sp>
+        <p:nvSpPr>
+          <p:cNvPr id="42" name="Oval 41"/>
+          <p:cNvSpPr/>
+          <p:nvPr/>
+        </p:nvSpPr>
+        <p:spPr>
+          <a:xfrm>
+            <a:off x="8243920" y="2633080"/>
+            <a:ext cx="180000" cy="180000"/>
+          </a:xfrm>
+          <a:prstGeom prst="ellipse">
+            <a:avLst/>
+          </a:prstGeom>
+          <a:solidFill>
+            <a:srgbClr val="A78BFA"/>
+          </a:solidFill>
+          <a:ln>
+            <a:noFill/>
+          </a:ln>
+        </p:spPr>
+        <p:style>
+          <a:lnRef idx="1">
+            <a:schemeClr val="accent1"/>
+          </a:lnRef>
+          <a:fillRef idx="3">
+            <a:schemeClr val="accent1"/>
+          </a:fillRef>
+          <a:effectRef idx="2">
+            <a:schemeClr val="accent1"/>
+          </a:effectRef>
+          <a:fontRef idx="minor">
+            <a:schemeClr val="lt1"/>
+          </a:fontRef>
+        </p:style>
+        <p:txBody>
+          <a:bodyPr rtlCol="0" anchor="ctr"/>
+          <a:lstStyle/>
+          <a:p>
+            <a:pPr algn="ctr"/>
+          </a:p>
+        </p:txBody>
+      </p:sp>
+      <p:sp>
+        <p:nvSpPr>
+          <p:cNvPr id="43" name="TextBox 42"/>
+          <p:cNvSpPr txBox="1"/>
+          <p:nvPr/>
+        </p:nvSpPr>
+        <p:spPr>
+          <a:xfrm>
+            <a:off x="8243920" y="2633080"/>
+            <a:ext cx="180000" cy="180000"/>
+          </a:xfrm>
+          <a:prstGeom prst="rect">
+            <a:avLst/>
+          </a:prstGeom>
+          <a:noFill/>
+        </p:spPr>
+        <p:txBody>
+          <a:bodyPr wrap="square" lIns="0" rIns="0" tIns="0" bIns="0" anchor="ctr">
+            <a:spAutoFit/>
+          </a:bodyPr>
+          <a:lstStyle/>
+          <a:p>
+            <a:pPr algn="ctr"/>
+            <a:r>
+              <a:rPr sz="500" b="1" i="0">
+                <a:solidFill>
+                  <a:srgbClr val="F8FAFC"/>
+                </a:solidFill>
+                <a:latin typeface="Arial"/>
+              </a:rPr>
+              <a:t>JS</a:t>
+            </a:r>
+          </a:p>
+        </p:txBody>
+      </p:sp>
+      <p:sp>
+        <p:nvSpPr>
+          <p:cNvPr id="44" name="Rectangle 43"/>
+          <p:cNvSpPr/>
+          <p:nvPr/>
+        </p:nvSpPr>
+        <p:spPr>
+          <a:xfrm>
+            <a:off x="4869180" y="2883080"/>
+            <a:ext cx="3634740" cy="260000"/>
+          </a:xfrm>
+          <a:prstGeom prst="rect">
+            <a:avLst/>
+          </a:prstGeom>
+          <a:solidFill>
+            <a:srgbClr val="0F172A"/>
+          </a:solidFill>
+          <a:ln>
+            <a:noFill/>
+          </a:ln>
+        </p:spPr>
+        <p:style>
+          <a:lnRef idx="1">
+            <a:schemeClr val="accent1"/>
+          </a:lnRef>
+          <a:fillRef idx="3">
+            <a:schemeClr val="accent1"/>
+          </a:fillRef>
+          <a:effectRef idx="2">
+            <a:schemeClr val="accent1"/>
+          </a:effectRef>
+          <a:fontRef idx="minor">
+            <a:schemeClr val="lt1"/>
+          </a:fontRef>
+        </p:style>
+        <p:txBody>
+          <a:bodyPr rtlCol="0" anchor="ctr"/>
+          <a:lstStyle/>
+          <a:p>
+            <a:pPr algn="ctr"/>
+          </a:p>
+        </p:txBody>
+      </p:sp>
+      <p:sp>
+        <p:nvSpPr>
+          <p:cNvPr id="45" name="TextBox 44"/>
+          <p:cNvSpPr txBox="1"/>
+          <p:nvPr/>
+        </p:nvSpPr>
+        <p:spPr>
+          <a:xfrm>
+            <a:off x="4914900" y="2883080"/>
+            <a:ext cx="220000" cy="260000"/>
+          </a:xfrm>
+          <a:prstGeom prst="rect">
+            <a:avLst/>
+          </a:prstGeom>
+          <a:noFill/>
+        </p:spPr>
+        <p:txBody>
+          <a:bodyPr wrap="square" lIns="0" rIns="0" tIns="0" bIns="0" anchor="ctr">
+            <a:spAutoFit/>
+          </a:bodyPr>
+          <a:lstStyle/>
+          <a:p>
+            <a:pPr algn="ctr"/>
+            <a:r>
+              <a:rPr sz="1000" b="0" i="0">
+                <a:solidFill>
+                  <a:srgbClr val="34D399"/>
+                </a:solidFill>
+                <a:latin typeface="Arial"/>
+              </a:rPr>
+              <a:t>☑</a:t>
+            </a:r>
+          </a:p>
+        </p:txBody>
+      </p:sp>
+      <p:sp>
+        <p:nvSpPr>
+          <p:cNvPr id="46" name="TextBox 45"/>
+          <p:cNvSpPr txBox="1"/>
+          <p:nvPr/>
+        </p:nvSpPr>
+        <p:spPr>
+          <a:xfrm>
+            <a:off x="5159180" y="2883080"/>
+            <a:ext cx="2994740" cy="260000"/>
+          </a:xfrm>
+          <a:prstGeom prst="rect">
+            <a:avLst/>
+          </a:prstGeom>
+          <a:noFill/>
+        </p:spPr>
+        <p:txBody>
+          <a:bodyPr wrap="square" lIns="0" rIns="0" tIns="0" bIns="0" anchor="ctr">
+            <a:spAutoFit/>
+          </a:bodyPr>
+          <a:lstStyle/>
+          <a:p>
+            <a:pPr algn="l"/>
+            <a:r>
+              <a:rPr sz="800" b="0" i="0">
+                <a:solidFill>
+                  <a:srgbClr val="64748B"/>
+                </a:solidFill>
+                <a:latin typeface="Arial"/>
+              </a:rPr>
+              <a:t>Připravit prezentaci</a:t>
+            </a:r>
+          </a:p>
+        </p:txBody>
+      </p:sp>
+      <p:sp>
+        <p:nvSpPr>
+          <p:cNvPr id="47" name="Oval 46"/>
+          <p:cNvSpPr/>
+          <p:nvPr/>
+        </p:nvSpPr>
+        <p:spPr>
+          <a:xfrm>
+            <a:off x="8243920" y="2923080"/>
+            <a:ext cx="180000" cy="180000"/>
+          </a:xfrm>
+          <a:prstGeom prst="ellipse">
+            <a:avLst/>
+          </a:prstGeom>
+          <a:solidFill>
+            <a:srgbClr val="38BDF8"/>
+          </a:solidFill>
+          <a:ln>
+            <a:noFill/>
+          </a:ln>
+        </p:spPr>
+        <p:style>
+          <a:lnRef idx="1">
+            <a:schemeClr val="accent1"/>
+          </a:lnRef>
+          <a:fillRef idx="3">
+            <a:schemeClr val="accent1"/>
+          </a:fillRef>
+          <a:effectRef idx="2">
+            <a:schemeClr val="accent1"/>
+          </a:effectRef>
+          <a:fontRef idx="minor">
+            <a:schemeClr val="lt1"/>
+          </a:fontRef>
+        </p:style>
+        <p:txBody>
+          <a:bodyPr rtlCol="0" anchor="ctr"/>
+          <a:lstStyle/>
+          <a:p>
+            <a:pPr algn="ctr"/>
+          </a:p>
+        </p:txBody>
+      </p:sp>
+      <p:sp>
+        <p:nvSpPr>
+          <p:cNvPr id="48" name="TextBox 47"/>
+          <p:cNvSpPr txBox="1"/>
+          <p:nvPr/>
+        </p:nvSpPr>
+        <p:spPr>
+          <a:xfrm>
+            <a:off x="8243920" y="2923080"/>
+            <a:ext cx="180000" cy="180000"/>
+          </a:xfrm>
+          <a:prstGeom prst="rect">
+            <a:avLst/>
+          </a:prstGeom>
+          <a:noFill/>
+        </p:spPr>
+        <p:txBody>
+          <a:bodyPr wrap="square" lIns="0" rIns="0" tIns="0" bIns="0" anchor="ctr">
+            <a:spAutoFit/>
+          </a:bodyPr>
+          <a:lstStyle/>
+          <a:p>
+            <a:pPr algn="ctr"/>
+            <a:r>
+              <a:rPr sz="500" b="1" i="0">
+                <a:solidFill>
+                  <a:srgbClr val="F8FAFC"/>
+                </a:solidFill>
+                <a:latin typeface="Arial"/>
+              </a:rPr>
+              <a:t>MT</a:t>
+            </a:r>
+          </a:p>
+        </p:txBody>
+      </p:sp>
+      <p:sp>
+        <p:nvSpPr>
+          <p:cNvPr id="49" name="Rectangle 48"/>
+          <p:cNvSpPr/>
+          <p:nvPr/>
+        </p:nvSpPr>
+        <p:spPr>
+          <a:xfrm>
+            <a:off x="4869180" y="3173080"/>
+            <a:ext cx="3634740" cy="260000"/>
+          </a:xfrm>
+          <a:prstGeom prst="rect">
+            <a:avLst/>
+          </a:prstGeom>
+          <a:solidFill>
+            <a:srgbClr val="0F172A"/>
+          </a:solidFill>
+          <a:ln>
+            <a:noFill/>
+          </a:ln>
+        </p:spPr>
+        <p:style>
+          <a:lnRef idx="1">
+            <a:schemeClr val="accent1"/>
+          </a:lnRef>
+          <a:fillRef idx="3">
+            <a:schemeClr val="accent1"/>
+          </a:fillRef>
+          <a:effectRef idx="2">
+            <a:schemeClr val="accent1"/>
+          </a:effectRef>
+          <a:fontRef idx="minor">
+            <a:schemeClr val="lt1"/>
+          </a:fontRef>
+        </p:style>
+        <p:txBody>
+          <a:bodyPr rtlCol="0" anchor="ctr"/>
+          <a:lstStyle/>
+          <a:p>
+            <a:pPr algn="ctr"/>
+          </a:p>
+        </p:txBody>
+      </p:sp>
+      <p:sp>
+        <p:nvSpPr>
+          <p:cNvPr id="50" name="TextBox 49"/>
+          <p:cNvSpPr txBox="1"/>
+          <p:nvPr/>
+        </p:nvSpPr>
+        <p:spPr>
+          <a:xfrm>
+            <a:off x="4914900" y="3173080"/>
+            <a:ext cx="220000" cy="260000"/>
+          </a:xfrm>
+          <a:prstGeom prst="rect">
+            <a:avLst/>
+          </a:prstGeom>
+          <a:noFill/>
+        </p:spPr>
+        <p:txBody>
+          <a:bodyPr wrap="square" lIns="0" rIns="0" tIns="0" bIns="0" anchor="ctr">
+            <a:spAutoFit/>
+          </a:bodyPr>
+          <a:lstStyle/>
+          <a:p>
+            <a:pPr algn="ctr"/>
+            <a:r>
+              <a:rPr sz="1000" b="0" i="0">
+                <a:solidFill>
+                  <a:srgbClr val="94A3B8"/>
+                </a:solidFill>
+                <a:latin typeface="Arial"/>
+              </a:rPr>
+              <a:t>☐</a:t>
+            </a:r>
+          </a:p>
+        </p:txBody>
+      </p:sp>
+      <p:sp>
+        <p:nvSpPr>
+          <p:cNvPr id="51" name="TextBox 50"/>
+          <p:cNvSpPr txBox="1"/>
+          <p:nvPr/>
+        </p:nvSpPr>
+        <p:spPr>
+          <a:xfrm>
+            <a:off x="5159180" y="3173080"/>
+            <a:ext cx="2994740" cy="260000"/>
+          </a:xfrm>
+          <a:prstGeom prst="rect">
+            <a:avLst/>
+          </a:prstGeom>
+          <a:noFill/>
+        </p:spPr>
+        <p:txBody>
+          <a:bodyPr wrap="square" lIns="0" rIns="0" tIns="0" bIns="0" anchor="ctr">
+            <a:spAutoFit/>
+          </a:bodyPr>
+          <a:lstStyle/>
+          <a:p>
+            <a:pPr algn="l"/>
+            <a:r>
+              <a:rPr sz="800" b="0" i="0">
+                <a:solidFill>
+                  <a:srgbClr val="F8FAFC"/>
+                </a:solidFill>
+                <a:latin typeface="Arial"/>
+              </a:rPr>
+              <a:t>Napsat release notes</a:t>
+            </a:r>
+          </a:p>
+        </p:txBody>
+      </p:sp>
+      <p:sp>
+        <p:nvSpPr>
+          <p:cNvPr id="52" name="Oval 51"/>
+          <p:cNvSpPr/>
+          <p:nvPr/>
+        </p:nvSpPr>
+        <p:spPr>
+          <a:xfrm>
+            <a:off x="8243920" y="3213080"/>
+            <a:ext cx="180000" cy="180000"/>
+          </a:xfrm>
+          <a:prstGeom prst="ellipse">
+            <a:avLst/>
+          </a:prstGeom>
+          <a:solidFill>
+            <a:srgbClr val="34D399"/>
+          </a:solidFill>
+          <a:ln>
+            <a:noFill/>
+          </a:ln>
+        </p:spPr>
+        <p:style>
+          <a:lnRef idx="1">
+            <a:schemeClr val="accent1"/>
+          </a:lnRef>
+          <a:fillRef idx="3">
+            <a:schemeClr val="accent1"/>
+          </a:fillRef>
+          <a:effectRef idx="2">
+            <a:schemeClr val="accent1"/>
+          </a:effectRef>
+          <a:fontRef idx="minor">
+            <a:schemeClr val="lt1"/>
+          </a:fontRef>
+        </p:style>
+        <p:txBody>
+          <a:bodyPr rtlCol="0" anchor="ctr"/>
+          <a:lstStyle/>
+          <a:p>
+            <a:pPr algn="ctr"/>
+          </a:p>
+        </p:txBody>
+      </p:sp>
+      <p:sp>
+        <p:nvSpPr>
+          <p:cNvPr id="53" name="TextBox 52"/>
+          <p:cNvSpPr txBox="1"/>
+          <p:nvPr/>
+        </p:nvSpPr>
+        <p:spPr>
+          <a:xfrm>
+            <a:off x="8243920" y="3213080"/>
+            <a:ext cx="180000" cy="180000"/>
+          </a:xfrm>
+          <a:prstGeom prst="rect">
+            <a:avLst/>
+          </a:prstGeom>
+          <a:noFill/>
+        </p:spPr>
+        <p:txBody>
+          <a:bodyPr wrap="square" lIns="0" rIns="0" tIns="0" bIns="0" anchor="ctr">
+            <a:spAutoFit/>
+          </a:bodyPr>
+          <a:lstStyle/>
+          <a:p>
+            <a:pPr algn="ctr"/>
+            <a:r>
+              <a:rPr sz="500" b="1" i="0">
+                <a:solidFill>
+                  <a:srgbClr val="F8FAFC"/>
+                </a:solidFill>
+                <a:latin typeface="Arial"/>
+              </a:rPr>
+              <a:t>LV</a:t>
+            </a:r>
+          </a:p>
+        </p:txBody>
+      </p:sp>
+      <p:sp>
+        <p:nvSpPr>
+          <p:cNvPr id="54" name="TextBox 53"/>
+          <p:cNvSpPr txBox="1"/>
+          <p:nvPr/>
+        </p:nvSpPr>
+        <p:spPr>
+          <a:xfrm>
+            <a:off x="457200" y="4620000"/>
+            <a:ext cx="8229600" cy="200000"/>
+          </a:xfrm>
+          <a:prstGeom prst="rect">
+            <a:avLst/>
+          </a:prstGeom>
+          <a:noFill/>
+        </p:spPr>
+        <p:txBody>
+          <a:bodyPr wrap="square" lIns="0" rIns="0" tIns="0" bIns="0" anchor="ctr">
+            <a:spAutoFit/>
+          </a:bodyPr>
+          <a:lstStyle/>
+          <a:p>
+            <a:pPr algn="ctr"/>
+            <a:r>
+              <a:rPr sz="1100" b="0" i="1">
+                <a:solidFill>
+                  <a:srgbClr val="34D399"/>
+                </a:solidFill>
+                <a:latin typeface="Arial"/>
+              </a:rPr>
+              <a:t>AI dostane rozhodnutí. Nemusí hádat. Trefí se napoprvé.</a:t>
+            </a:r>
           </a:p>
         </p:txBody>
       </p:sp>
@@ -3098,6 +9733,10 @@
             </a:outerShdw>
           </a:effectLst>
         </p:spPr>
+        <p:txBody>
+          <a:bodyPr/>
+          <a:p/>
+        </p:txBody>
       </p:sp>
       <p:sp>
         <p:nvSpPr>
@@ -3118,6 +9757,10 @@
           </a:solidFill>
           <a:ln/>
         </p:spPr>
+        <p:txBody>
+          <a:bodyPr/>
+          <a:p/>
+        </p:txBody>
       </p:sp>
       <p:pic>
         <p:nvPicPr>
@@ -3240,6 +9883,10 @@
           </a:solidFill>
           <a:ln/>
         </p:spPr>
+        <p:txBody>
+          <a:bodyPr/>
+          <a:p/>
+        </p:txBody>
       </p:sp>
       <p:sp>
         <p:nvSpPr>
@@ -3306,6 +9953,10 @@
             </a:outerShdw>
           </a:effectLst>
         </p:spPr>
+        <p:txBody>
+          <a:bodyPr/>
+          <a:p/>
+        </p:txBody>
       </p:sp>
       <p:sp>
         <p:nvSpPr>
@@ -3326,6 +9977,10 @@
           </a:solidFill>
           <a:ln/>
         </p:spPr>
+        <p:txBody>
+          <a:bodyPr/>
+          <a:p/>
+        </p:txBody>
       </p:sp>
       <p:pic>
         <p:nvPicPr>
@@ -3448,6 +10103,10 @@
           </a:solidFill>
           <a:ln/>
         </p:spPr>
+        <p:txBody>
+          <a:bodyPr/>
+          <a:p/>
+        </p:txBody>
       </p:sp>
       <p:sp>
         <p:nvSpPr>
@@ -3514,6 +10173,10 @@
             </a:outerShdw>
           </a:effectLst>
         </p:spPr>
+        <p:txBody>
+          <a:bodyPr/>
+          <a:p/>
+        </p:txBody>
       </p:sp>
       <p:sp>
         <p:nvSpPr>
@@ -3534,6 +10197,10 @@
           </a:solidFill>
           <a:ln/>
         </p:spPr>
+        <p:txBody>
+          <a:bodyPr/>
+          <a:p/>
+        </p:txBody>
       </p:sp>
       <p:pic>
         <p:nvPicPr>
@@ -3656,6 +10323,10 @@
           </a:solidFill>
           <a:ln/>
         </p:spPr>
+        <p:txBody>
+          <a:bodyPr/>
+          <a:p/>
+        </p:txBody>
       </p:sp>
       <p:sp>
         <p:nvSpPr>
@@ -3722,6 +10393,10 @@
             </a:outerShdw>
           </a:effectLst>
         </p:spPr>
+        <p:txBody>
+          <a:bodyPr/>
+          <a:p/>
+        </p:txBody>
       </p:sp>
       <p:sp>
         <p:nvSpPr>
@@ -3742,6 +10417,10 @@
           </a:solidFill>
           <a:ln/>
         </p:spPr>
+        <p:txBody>
+          <a:bodyPr/>
+          <a:p/>
+        </p:txBody>
       </p:sp>
       <p:pic>
         <p:nvPicPr>
@@ -3864,6 +10543,10 @@
           </a:solidFill>
           <a:ln/>
         </p:spPr>
+        <p:txBody>
+          <a:bodyPr/>
+          <a:p/>
+        </p:txBody>
       </p:sp>
       <p:sp>
         <p:nvSpPr>
@@ -3930,6 +10613,10 @@
             </a:outerShdw>
           </a:effectLst>
         </p:spPr>
+        <p:txBody>
+          <a:bodyPr/>
+          <a:p/>
+        </p:txBody>
       </p:sp>
       <p:sp>
         <p:nvSpPr>
@@ -3950,6 +10637,10 @@
           </a:solidFill>
           <a:ln/>
         </p:spPr>
+        <p:txBody>
+          <a:bodyPr/>
+          <a:p/>
+        </p:txBody>
       </p:sp>
       <p:pic>
         <p:nvPicPr>
@@ -4072,6 +10763,10 @@
           </a:solidFill>
           <a:ln/>
         </p:spPr>
+        <p:txBody>
+          <a:bodyPr/>
+          <a:p/>
+        </p:txBody>
       </p:sp>
       <p:sp>
         <p:nvSpPr>
@@ -4138,6 +10833,10 @@
             </a:outerShdw>
           </a:effectLst>
         </p:spPr>
+        <p:txBody>
+          <a:bodyPr/>
+          <a:p/>
+        </p:txBody>
       </p:sp>
       <p:sp>
         <p:nvSpPr>
@@ -4158,6 +10857,10 @@
           </a:solidFill>
           <a:ln/>
         </p:spPr>
+        <p:txBody>
+          <a:bodyPr/>
+          <a:p/>
+        </p:txBody>
       </p:sp>
       <p:pic>
         <p:nvPicPr>
@@ -4280,6 +10983,10 @@
           </a:solidFill>
           <a:ln/>
         </p:spPr>
+        <p:txBody>
+          <a:bodyPr/>
+          <a:p/>
+        </p:txBody>
       </p:sp>
       <p:sp>
         <p:nvSpPr>
@@ -4536,6 +11243,10 @@
           </a:solidFill>
           <a:ln/>
         </p:spPr>
+        <p:txBody>
+          <a:bodyPr/>
+          <a:p/>
+        </p:txBody>
       </p:sp>
       <p:sp>
         <p:nvSpPr>
@@ -4556,6 +11267,10 @@
           </a:solidFill>
           <a:ln/>
         </p:spPr>
+        <p:txBody>
+          <a:bodyPr/>
+          <a:p/>
+        </p:txBody>
       </p:sp>
       <p:sp>
         <p:nvSpPr>
@@ -4615,6 +11330,10 @@
           </a:solidFill>
           <a:ln/>
         </p:spPr>
+        <p:txBody>
+          <a:bodyPr/>
+          <a:p/>
+        </p:txBody>
       </p:sp>
       <p:sp>
         <p:nvSpPr>
@@ -4674,6 +11393,10 @@
           </a:solidFill>
           <a:ln/>
         </p:spPr>
+        <p:txBody>
+          <a:bodyPr/>
+          <a:p/>
+        </p:txBody>
       </p:sp>
       <p:sp>
         <p:nvSpPr>
@@ -4733,6 +11456,10 @@
           </a:solidFill>
           <a:ln/>
         </p:spPr>
+        <p:txBody>
+          <a:bodyPr/>
+          <a:p/>
+        </p:txBody>
       </p:sp>
       <p:sp>
         <p:nvSpPr>
@@ -4792,6 +11519,10 @@
           </a:solidFill>
           <a:ln/>
         </p:spPr>
+        <p:txBody>
+          <a:bodyPr/>
+          <a:p/>
+        </p:txBody>
       </p:sp>
       <p:sp>
         <p:nvSpPr>
@@ -4851,6 +11582,10 @@
           </a:solidFill>
           <a:ln/>
         </p:spPr>
+        <p:txBody>
+          <a:bodyPr/>
+          <a:p/>
+        </p:txBody>
       </p:sp>
       <p:sp>
         <p:nvSpPr>
@@ -4910,6 +11645,10 @@
           </a:solidFill>
           <a:ln/>
         </p:spPr>
+        <p:txBody>
+          <a:bodyPr/>
+          <a:p/>
+        </p:txBody>
       </p:sp>
       <p:sp>
         <p:nvSpPr>
@@ -4969,6 +11708,10 @@
           </a:solidFill>
           <a:ln/>
         </p:spPr>
+        <p:txBody>
+          <a:bodyPr/>
+          <a:p/>
+        </p:txBody>
       </p:sp>
       <p:sp>
         <p:nvSpPr>
@@ -5003,7 +11746,7 @@
                 <a:ea typeface="Arial" pitchFamily="34" charset="-122"/>
                 <a:cs typeface="Arial" pitchFamily="34" charset="-120"/>
               </a:rPr>
-              <a:t>2 / 10</a:t>
+              <a:t>2 / 13</a:t>
             </a:r>
             <a:endParaRPr lang="en-US" sz="900" dirty="0"/>
           </a:p>
@@ -5099,6 +11842,10 @@
           </a:solidFill>
           <a:ln/>
         </p:spPr>
+        <p:txBody>
+          <a:bodyPr/>
+          <a:p/>
+        </p:txBody>
       </p:sp>
       <p:sp>
         <p:nvSpPr>
@@ -5119,6 +11866,10 @@
           </a:solidFill>
           <a:ln/>
         </p:spPr>
+        <p:txBody>
+          <a:bodyPr/>
+          <a:p/>
+        </p:txBody>
       </p:sp>
       <p:sp>
         <p:nvSpPr>
@@ -5234,6 +11985,10 @@
             </a:outerShdw>
           </a:effectLst>
         </p:spPr>
+        <p:txBody>
+          <a:bodyPr/>
+          <a:p/>
+        </p:txBody>
       </p:sp>
       <p:sp>
         <p:nvSpPr>
@@ -5406,6 +12161,10 @@
             </a:outerShdw>
           </a:effectLst>
         </p:spPr>
+        <p:txBody>
+          <a:bodyPr/>
+          <a:p/>
+        </p:txBody>
       </p:sp>
       <p:sp>
         <p:nvSpPr>
@@ -5426,6 +12185,10 @@
           </a:solidFill>
           <a:ln/>
         </p:spPr>
+        <p:txBody>
+          <a:bodyPr/>
+          <a:p/>
+        </p:txBody>
       </p:sp>
       <p:sp>
         <p:nvSpPr>
@@ -5591,6 +12354,10 @@
           </a:solidFill>
           <a:ln/>
         </p:spPr>
+        <p:txBody>
+          <a:bodyPr/>
+          <a:p/>
+        </p:txBody>
       </p:sp>
       <p:sp>
         <p:nvSpPr>
@@ -5650,6 +12417,10 @@
           </a:solidFill>
           <a:ln/>
         </p:spPr>
+        <p:txBody>
+          <a:bodyPr/>
+          <a:p/>
+        </p:txBody>
       </p:sp>
       <p:sp>
         <p:nvSpPr>
@@ -5684,7 +12455,7 @@
                 <a:ea typeface="Arial" pitchFamily="34" charset="-122"/>
                 <a:cs typeface="Arial" pitchFamily="34" charset="-120"/>
               </a:rPr>
-              <a:t>3 / 10</a:t>
+              <a:t>3 / 13</a:t>
             </a:r>
             <a:endParaRPr lang="en-US" sz="900" dirty="0"/>
           </a:p>
@@ -5819,6 +12590,10 @@
           </a:solidFill>
           <a:ln/>
         </p:spPr>
+        <p:txBody>
+          <a:bodyPr/>
+          <a:p/>
+        </p:txBody>
       </p:sp>
       <p:sp>
         <p:nvSpPr>
@@ -5839,6 +12614,10 @@
           </a:solidFill>
           <a:ln/>
         </p:spPr>
+        <p:txBody>
+          <a:bodyPr/>
+          <a:p/>
+        </p:txBody>
       </p:sp>
       <p:sp>
         <p:nvSpPr>
@@ -5905,6 +12684,10 @@
             </a:outerShdw>
           </a:effectLst>
         </p:spPr>
+        <p:txBody>
+          <a:bodyPr/>
+          <a:p/>
+        </p:txBody>
       </p:sp>
       <p:sp>
         <p:nvSpPr>
@@ -5925,6 +12708,10 @@
           </a:solidFill>
           <a:ln/>
         </p:spPr>
+        <p:txBody>
+          <a:bodyPr/>
+          <a:p/>
+        </p:txBody>
       </p:sp>
       <p:sp>
         <p:nvSpPr>
@@ -6069,6 +12856,10 @@
             </a:outerShdw>
           </a:effectLst>
         </p:spPr>
+        <p:txBody>
+          <a:bodyPr/>
+          <a:p/>
+        </p:txBody>
       </p:sp>
       <p:sp>
         <p:nvSpPr>
@@ -6089,6 +12880,10 @@
           </a:solidFill>
           <a:ln/>
         </p:spPr>
+        <p:txBody>
+          <a:bodyPr/>
+          <a:p/>
+        </p:txBody>
       </p:sp>
       <p:sp>
         <p:nvSpPr>
@@ -6233,6 +13028,10 @@
             </a:outerShdw>
           </a:effectLst>
         </p:spPr>
+        <p:txBody>
+          <a:bodyPr/>
+          <a:p/>
+        </p:txBody>
       </p:sp>
       <p:sp>
         <p:nvSpPr>
@@ -6253,6 +13052,10 @@
           </a:solidFill>
           <a:ln/>
         </p:spPr>
+        <p:txBody>
+          <a:bodyPr/>
+          <a:p/>
+        </p:txBody>
       </p:sp>
       <p:sp>
         <p:nvSpPr>
@@ -6397,6 +13200,10 @@
             </a:outerShdw>
           </a:effectLst>
         </p:spPr>
+        <p:txBody>
+          <a:bodyPr/>
+          <a:p/>
+        </p:txBody>
       </p:sp>
       <p:sp>
         <p:nvSpPr>
@@ -6417,6 +13224,10 @@
           </a:solidFill>
           <a:ln/>
         </p:spPr>
+        <p:txBody>
+          <a:bodyPr/>
+          <a:p/>
+        </p:txBody>
       </p:sp>
       <p:sp>
         <p:nvSpPr>
@@ -6561,6 +13372,10 @@
             </a:outerShdw>
           </a:effectLst>
         </p:spPr>
+        <p:txBody>
+          <a:bodyPr/>
+          <a:p/>
+        </p:txBody>
       </p:sp>
       <p:sp>
         <p:nvSpPr>
@@ -6581,6 +13396,10 @@
           </a:solidFill>
           <a:ln/>
         </p:spPr>
+        <p:txBody>
+          <a:bodyPr/>
+          <a:p/>
+        </p:txBody>
       </p:sp>
       <p:sp>
         <p:nvSpPr>
@@ -6679,6 +13498,10 @@
           </a:solidFill>
           <a:ln/>
         </p:spPr>
+        <p:txBody>
+          <a:bodyPr/>
+          <a:p/>
+        </p:txBody>
       </p:sp>
       <p:pic>
         <p:nvPicPr>
@@ -6801,6 +13624,10 @@
           </a:solidFill>
           <a:ln/>
         </p:spPr>
+        <p:txBody>
+          <a:bodyPr/>
+          <a:p/>
+        </p:txBody>
       </p:sp>
       <p:pic>
         <p:nvPicPr>
@@ -6923,6 +13750,10 @@
           </a:solidFill>
           <a:ln/>
         </p:spPr>
+        <p:txBody>
+          <a:bodyPr/>
+          <a:p/>
+        </p:txBody>
       </p:sp>
       <p:sp>
         <p:nvSpPr>
@@ -6957,7 +13788,7 @@
                 <a:ea typeface="Arial" pitchFamily="34" charset="-122"/>
                 <a:cs typeface="Arial" pitchFamily="34" charset="-120"/>
               </a:rPr>
-              <a:t>4 / 10</a:t>
+              <a:t>4 / 13</a:t>
             </a:r>
             <a:endParaRPr lang="en-US" sz="900" dirty="0"/>
           </a:p>
@@ -7099,6 +13930,10 @@
             </a:outerShdw>
           </a:effectLst>
         </p:spPr>
+        <p:txBody>
+          <a:bodyPr/>
+          <a:p/>
+        </p:txBody>
       </p:sp>
       <p:sp>
         <p:nvSpPr>
@@ -7397,6 +14232,10 @@
             </a:outerShdw>
           </a:effectLst>
         </p:spPr>
+        <p:txBody>
+          <a:bodyPr/>
+          <a:p/>
+        </p:txBody>
       </p:sp>
       <p:sp>
         <p:nvSpPr>
@@ -7417,6 +14256,10 @@
           </a:solidFill>
           <a:ln/>
         </p:spPr>
+        <p:txBody>
+          <a:bodyPr/>
+          <a:p/>
+        </p:txBody>
       </p:sp>
       <p:sp>
         <p:nvSpPr>
@@ -7476,6 +14319,10 @@
           </a:solidFill>
           <a:ln/>
         </p:spPr>
+        <p:txBody>
+          <a:bodyPr/>
+          <a:p/>
+        </p:txBody>
       </p:sp>
       <p:sp>
         <p:nvSpPr>
@@ -7613,6 +14460,10 @@
           </a:solidFill>
           <a:ln/>
         </p:spPr>
+        <p:txBody>
+          <a:bodyPr/>
+          <a:p/>
+        </p:txBody>
       </p:sp>
       <p:sp>
         <p:nvSpPr>
@@ -7750,6 +14601,10 @@
           </a:solidFill>
           <a:ln/>
         </p:spPr>
+        <p:txBody>
+          <a:bodyPr/>
+          <a:p/>
+        </p:txBody>
       </p:sp>
       <p:sp>
         <p:nvSpPr>
@@ -7887,6 +14742,10 @@
           </a:solidFill>
           <a:ln/>
         </p:spPr>
+        <p:txBody>
+          <a:bodyPr/>
+          <a:p/>
+        </p:txBody>
       </p:sp>
       <p:sp>
         <p:nvSpPr>
@@ -8024,6 +14883,10 @@
           </a:solidFill>
           <a:ln/>
         </p:spPr>
+        <p:txBody>
+          <a:bodyPr/>
+          <a:p/>
+        </p:txBody>
       </p:sp>
       <p:sp>
         <p:nvSpPr>
@@ -8200,6 +15063,10 @@
           </a:solidFill>
           <a:ln/>
         </p:spPr>
+        <p:txBody>
+          <a:bodyPr/>
+          <a:p/>
+        </p:txBody>
       </p:sp>
       <p:sp>
         <p:nvSpPr>
@@ -8234,7 +15101,7 @@
                 <a:ea typeface="Arial" pitchFamily="34" charset="-122"/>
                 <a:cs typeface="Arial" pitchFamily="34" charset="-120"/>
               </a:rPr>
-              <a:t>5 / 10</a:t>
+              <a:t>8 / 13</a:t>
             </a:r>
             <a:endParaRPr lang="en-US" sz="900" dirty="0"/>
           </a:p>
@@ -8376,6 +15243,10 @@
             </a:outerShdw>
           </a:effectLst>
         </p:spPr>
+        <p:txBody>
+          <a:bodyPr/>
+          <a:p/>
+        </p:txBody>
       </p:sp>
       <p:sp>
         <p:nvSpPr>
@@ -8396,6 +15267,10 @@
           </a:solidFill>
           <a:ln/>
         </p:spPr>
+        <p:txBody>
+          <a:bodyPr/>
+          <a:p/>
+        </p:txBody>
       </p:sp>
       <p:sp>
         <p:nvSpPr>
@@ -8540,6 +15415,10 @@
             </a:outerShdw>
           </a:effectLst>
         </p:spPr>
+        <p:txBody>
+          <a:bodyPr/>
+          <a:p/>
+        </p:txBody>
       </p:sp>
       <p:sp>
         <p:nvSpPr>
@@ -8560,6 +15439,10 @@
           </a:solidFill>
           <a:ln/>
         </p:spPr>
+        <p:txBody>
+          <a:bodyPr/>
+          <a:p/>
+        </p:txBody>
       </p:sp>
       <p:sp>
         <p:nvSpPr>
@@ -8704,6 +15587,10 @@
             </a:outerShdw>
           </a:effectLst>
         </p:spPr>
+        <p:txBody>
+          <a:bodyPr/>
+          <a:p/>
+        </p:txBody>
       </p:sp>
       <p:sp>
         <p:nvSpPr>
@@ -8724,6 +15611,10 @@
           </a:solidFill>
           <a:ln/>
         </p:spPr>
+        <p:txBody>
+          <a:bodyPr/>
+          <a:p/>
+        </p:txBody>
       </p:sp>
       <p:sp>
         <p:nvSpPr>
@@ -8868,6 +15759,10 @@
             </a:outerShdw>
           </a:effectLst>
         </p:spPr>
+        <p:txBody>
+          <a:bodyPr/>
+          <a:p/>
+        </p:txBody>
       </p:sp>
       <p:sp>
         <p:nvSpPr>
@@ -8888,6 +15783,10 @@
           </a:solidFill>
           <a:ln/>
         </p:spPr>
+        <p:txBody>
+          <a:bodyPr/>
+          <a:p/>
+        </p:txBody>
       </p:sp>
       <p:sp>
         <p:nvSpPr>
@@ -9025,6 +15924,10 @@
           </a:solidFill>
           <a:ln/>
         </p:spPr>
+        <p:txBody>
+          <a:bodyPr/>
+          <a:p/>
+        </p:txBody>
       </p:sp>
       <p:sp>
         <p:nvSpPr>
@@ -9059,7 +15962,7 @@
                 <a:ea typeface="Arial" pitchFamily="34" charset="-122"/>
                 <a:cs typeface="Arial" pitchFamily="34" charset="-120"/>
               </a:rPr>
-              <a:t>6 / 10</a:t>
+              <a:t>9 / 13</a:t>
             </a:r>
             <a:endParaRPr lang="en-US" sz="900" dirty="0"/>
           </a:p>
@@ -9194,6 +16097,10 @@
           </a:solidFill>
           <a:ln/>
         </p:spPr>
+        <p:txBody>
+          <a:bodyPr/>
+          <a:p/>
+        </p:txBody>
       </p:sp>
       <p:sp>
         <p:nvSpPr>
@@ -9214,6 +16121,10 @@
           </a:solidFill>
           <a:ln/>
         </p:spPr>
+        <p:txBody>
+          <a:bodyPr/>
+          <a:p/>
+        </p:txBody>
       </p:sp>
       <p:sp>
         <p:nvSpPr>
@@ -9273,6 +16184,10 @@
           </a:solidFill>
           <a:ln/>
         </p:spPr>
+        <p:txBody>
+          <a:bodyPr/>
+          <a:p/>
+        </p:txBody>
       </p:sp>
       <p:sp>
         <p:nvSpPr>
@@ -9293,6 +16208,10 @@
           </a:solidFill>
           <a:ln/>
         </p:spPr>
+        <p:txBody>
+          <a:bodyPr/>
+          <a:p/>
+        </p:txBody>
       </p:sp>
       <p:sp>
         <p:nvSpPr>
@@ -9352,6 +16271,10 @@
           </a:solidFill>
           <a:ln/>
         </p:spPr>
+        <p:txBody>
+          <a:bodyPr/>
+          <a:p/>
+        </p:txBody>
       </p:sp>
       <p:sp>
         <p:nvSpPr>
@@ -9372,6 +16295,10 @@
           </a:solidFill>
           <a:ln/>
         </p:spPr>
+        <p:txBody>
+          <a:bodyPr/>
+          <a:p/>
+        </p:txBody>
       </p:sp>
       <p:sp>
         <p:nvSpPr>
@@ -9431,6 +16358,10 @@
           </a:solidFill>
           <a:ln/>
         </p:spPr>
+        <p:txBody>
+          <a:bodyPr/>
+          <a:p/>
+        </p:txBody>
       </p:sp>
       <p:sp>
         <p:nvSpPr>
@@ -9451,6 +16382,10 @@
           </a:solidFill>
           <a:ln/>
         </p:spPr>
+        <p:txBody>
+          <a:bodyPr/>
+          <a:p/>
+        </p:txBody>
       </p:sp>
       <p:sp>
         <p:nvSpPr>
@@ -9510,6 +16445,10 @@
           </a:solidFill>
           <a:ln/>
         </p:spPr>
+        <p:txBody>
+          <a:bodyPr/>
+          <a:p/>
+        </p:txBody>
       </p:sp>
       <p:sp>
         <p:nvSpPr>
@@ -9530,6 +16469,10 @@
           </a:solidFill>
           <a:ln/>
         </p:spPr>
+        <p:txBody>
+          <a:bodyPr/>
+          <a:p/>
+        </p:txBody>
       </p:sp>
       <p:sp>
         <p:nvSpPr>
@@ -9589,6 +16532,10 @@
           </a:solidFill>
           <a:ln/>
         </p:spPr>
+        <p:txBody>
+          <a:bodyPr/>
+          <a:p/>
+        </p:txBody>
       </p:sp>
       <p:pic>
         <p:nvPicPr>
@@ -9672,6 +16619,10 @@
           </a:solidFill>
           <a:ln/>
         </p:spPr>
+        <p:txBody>
+          <a:bodyPr/>
+          <a:p/>
+        </p:txBody>
       </p:sp>
       <p:sp>
         <p:nvSpPr>
@@ -9706,7 +16657,7 @@
                 <a:ea typeface="Arial" pitchFamily="34" charset="-122"/>
                 <a:cs typeface="Arial" pitchFamily="34" charset="-120"/>
               </a:rPr>
-              <a:t>7 / 10</a:t>
+              <a:t>10 / 13</a:t>
             </a:r>
             <a:endParaRPr lang="en-US" sz="900" dirty="0"/>
           </a:p>
@@ -9809,6 +16760,10 @@
             </a:outerShdw>
           </a:effectLst>
         </p:spPr>
+        <p:txBody>
+          <a:bodyPr/>
+          <a:p/>
+        </p:txBody>
       </p:sp>
       <p:sp>
         <p:nvSpPr>
@@ -9829,6 +16784,10 @@
           </a:solidFill>
           <a:ln/>
         </p:spPr>
+        <p:txBody>
+          <a:bodyPr/>
+          <a:p/>
+        </p:txBody>
       </p:sp>
       <p:sp>
         <p:nvSpPr>
@@ -10001,6 +16960,10 @@
             </a:outerShdw>
           </a:effectLst>
         </p:spPr>
+        <p:txBody>
+          <a:bodyPr/>
+          <a:p/>
+        </p:txBody>
       </p:sp>
       <p:sp>
         <p:nvSpPr>
@@ -10021,6 +16984,10 @@
           </a:solidFill>
           <a:ln/>
         </p:spPr>
+        <p:txBody>
+          <a:bodyPr/>
+          <a:p/>
+        </p:txBody>
       </p:sp>
       <p:sp>
         <p:nvSpPr>
@@ -10193,6 +17160,10 @@
             </a:outerShdw>
           </a:effectLst>
         </p:spPr>
+        <p:txBody>
+          <a:bodyPr/>
+          <a:p/>
+        </p:txBody>
       </p:sp>
       <p:sp>
         <p:nvSpPr>
@@ -10213,6 +17184,10 @@
           </a:solidFill>
           <a:ln/>
         </p:spPr>
+        <p:txBody>
+          <a:bodyPr/>
+          <a:p/>
+        </p:txBody>
       </p:sp>
       <p:sp>
         <p:nvSpPr>
@@ -10385,6 +17360,10 @@
             </a:outerShdw>
           </a:effectLst>
         </p:spPr>
+        <p:txBody>
+          <a:bodyPr/>
+          <a:p/>
+        </p:txBody>
       </p:sp>
       <p:sp>
         <p:nvSpPr>
@@ -10405,6 +17384,10 @@
           </a:solidFill>
           <a:ln/>
         </p:spPr>
+        <p:txBody>
+          <a:bodyPr/>
+          <a:p/>
+        </p:txBody>
       </p:sp>
       <p:sp>
         <p:nvSpPr>
@@ -10570,6 +17553,10 @@
           </a:solidFill>
           <a:ln/>
         </p:spPr>
+        <p:txBody>
+          <a:bodyPr/>
+          <a:p/>
+        </p:txBody>
       </p:sp>
       <p:sp>
         <p:nvSpPr>
@@ -10604,7 +17591,7 @@
                 <a:ea typeface="Arial" pitchFamily="34" charset="-122"/>
                 <a:cs typeface="Arial" pitchFamily="34" charset="-120"/>
               </a:rPr>
-              <a:t>8 / 10</a:t>
+              <a:t>11 / 13</a:t>
             </a:r>
             <a:endParaRPr lang="en-US" sz="900" dirty="0"/>
           </a:p>
@@ -10746,6 +17733,10 @@
             </a:outerShdw>
           </a:effectLst>
         </p:spPr>
+        <p:txBody>
+          <a:bodyPr/>
+          <a:p/>
+        </p:txBody>
       </p:sp>
       <p:sp>
         <p:nvSpPr>
@@ -10766,6 +17757,10 @@
           </a:solidFill>
           <a:ln/>
         </p:spPr>
+        <p:txBody>
+          <a:bodyPr/>
+          <a:p/>
+        </p:txBody>
       </p:sp>
       <p:sp>
         <p:nvSpPr>
@@ -10910,6 +17905,10 @@
             </a:outerShdw>
           </a:effectLst>
         </p:spPr>
+        <p:txBody>
+          <a:bodyPr/>
+          <a:p/>
+        </p:txBody>
       </p:sp>
       <p:sp>
         <p:nvSpPr>
@@ -10930,6 +17929,10 @@
           </a:solidFill>
           <a:ln/>
         </p:spPr>
+        <p:txBody>
+          <a:bodyPr/>
+          <a:p/>
+        </p:txBody>
       </p:sp>
       <p:sp>
         <p:nvSpPr>
@@ -11074,6 +18077,10 @@
             </a:outerShdw>
           </a:effectLst>
         </p:spPr>
+        <p:txBody>
+          <a:bodyPr/>
+          <a:p/>
+        </p:txBody>
       </p:sp>
       <p:sp>
         <p:nvSpPr>
@@ -11094,6 +18101,10 @@
           </a:solidFill>
           <a:ln/>
         </p:spPr>
+        <p:txBody>
+          <a:bodyPr/>
+          <a:p/>
+        </p:txBody>
       </p:sp>
       <p:sp>
         <p:nvSpPr>
@@ -11231,6 +18242,10 @@
           </a:solidFill>
           <a:ln/>
         </p:spPr>
+        <p:txBody>
+          <a:bodyPr/>
+          <a:p/>
+        </p:txBody>
       </p:sp>
       <p:pic>
         <p:nvPicPr>
@@ -11353,6 +18368,10 @@
           </a:solidFill>
           <a:ln/>
         </p:spPr>
+        <p:txBody>
+          <a:bodyPr/>
+          <a:p/>
+        </p:txBody>
       </p:sp>
       <p:sp>
         <p:nvSpPr>
@@ -11387,7 +18406,7 @@
                 <a:ea typeface="Arial" pitchFamily="34" charset="-122"/>
                 <a:cs typeface="Arial" pitchFamily="34" charset="-120"/>
               </a:rPr>
-              <a:t>9 / 10</a:t>
+              <a:t>12 / 13</a:t>
             </a:r>
             <a:endParaRPr lang="en-US" sz="900" dirty="0"/>
           </a:p>
